--- a/seminarski-1/Interna struktura i organizacija indeksa u Firebird bazi podataka.pptx
+++ b/seminarski-1/Interna struktura i organizacija indeksa u Firebird bazi podataka.pptx
@@ -3940,7 +3940,27 @@
                 <a:ea typeface="Calibri" pitchFamily="34" charset="-122"/>
                 <a:cs typeface="Calibri" pitchFamily="34" charset="-120"/>
               </a:rPr>
-              <a:t>Linearno čitanje svake stranice — SPORO!</a:t>
+              <a:t>Linearno čitanje svake stranice — </a:t>
+            </a:r>
+            <a:r>
+              <a:rPr lang="en-US" sz="1200" b="1" dirty="0">
+                <a:solidFill>
+                  <a:srgbClr val="475569"/>
+                </a:solidFill>
+                <a:ea typeface="Calibri" pitchFamily="34" charset="-122"/>
+                <a:cs typeface="Calibri" pitchFamily="34" charset="-120"/>
+              </a:rPr>
+              <a:t>SPORO</a:t>
+            </a:r>
+            <a:r>
+              <a:rPr lang="en-US" sz="1200" dirty="0">
+                <a:solidFill>
+                  <a:srgbClr val="475569"/>
+                </a:solidFill>
+                <a:ea typeface="Calibri" pitchFamily="34" charset="-122"/>
+                <a:cs typeface="Calibri" pitchFamily="34" charset="-120"/>
+              </a:rPr>
+              <a:t>!</a:t>
             </a:r>
             <a:endParaRPr lang="en-US" sz="1200" dirty="0"/>
           </a:p>
@@ -4208,9 +4228,7 @@
             <a:r>
               <a:rPr lang="en-US" sz="1400" b="1" dirty="0">
                 <a:solidFill>
-                  <a:schemeClr val="bg1">
-                    <a:lumMod val="85000"/>
-                  </a:schemeClr>
+                  <a:schemeClr val="bg1"/>
                 </a:solidFill>
                 <a:latin typeface="Calibri" pitchFamily="34" charset="0"/>
                 <a:ea typeface="Calibri" pitchFamily="34" charset="-122"/>
@@ -4220,9 +4238,7 @@
             </a:r>
             <a:endParaRPr lang="en-US" sz="1400" dirty="0">
               <a:solidFill>
-                <a:schemeClr val="bg1">
-                  <a:lumMod val="85000"/>
-                </a:schemeClr>
+                <a:schemeClr val="bg1"/>
               </a:solidFill>
             </a:endParaRPr>
           </a:p>
@@ -4353,9 +4369,7 @@
             <a:r>
               <a:rPr lang="en-US" sz="1400" b="1" dirty="0">
                 <a:solidFill>
-                  <a:schemeClr val="bg1">
-                    <a:lumMod val="85000"/>
-                  </a:schemeClr>
+                  <a:schemeClr val="bg1"/>
                 </a:solidFill>
                 <a:latin typeface="Calibri" pitchFamily="34" charset="0"/>
                 <a:ea typeface="Calibri" pitchFamily="34" charset="-122"/>
@@ -4365,9 +4379,7 @@
             </a:r>
             <a:endParaRPr lang="en-US" sz="1400" dirty="0">
               <a:solidFill>
-                <a:schemeClr val="bg1">
-                  <a:lumMod val="85000"/>
-                </a:schemeClr>
+                <a:schemeClr val="bg1"/>
               </a:solidFill>
             </a:endParaRPr>
           </a:p>
@@ -4498,9 +4510,7 @@
             <a:r>
               <a:rPr lang="en-US" sz="1400" b="1" dirty="0">
                 <a:solidFill>
-                  <a:schemeClr val="bg1">
-                    <a:lumMod val="85000"/>
-                  </a:schemeClr>
+                  <a:schemeClr val="bg1"/>
                 </a:solidFill>
                 <a:latin typeface="Calibri" pitchFamily="34" charset="0"/>
                 <a:ea typeface="Calibri" pitchFamily="34" charset="-122"/>
@@ -4510,9 +4520,7 @@
             </a:r>
             <a:endParaRPr lang="en-US" sz="1400" dirty="0">
               <a:solidFill>
-                <a:schemeClr val="bg1">
-                  <a:lumMod val="85000"/>
-                </a:schemeClr>
+                <a:schemeClr val="bg1"/>
               </a:solidFill>
             </a:endParaRPr>
           </a:p>
@@ -4643,9 +4651,7 @@
             <a:r>
               <a:rPr lang="en-US" sz="1400" b="1" dirty="0">
                 <a:solidFill>
-                  <a:schemeClr val="bg1">
-                    <a:lumMod val="85000"/>
-                  </a:schemeClr>
+                  <a:schemeClr val="bg1"/>
                 </a:solidFill>
                 <a:latin typeface="Calibri" pitchFamily="34" charset="0"/>
                 <a:ea typeface="Calibri" pitchFamily="34" charset="-122"/>
@@ -4653,11 +4659,9 @@
               </a:rPr>
               <a:t>Selektivnost:</a:t>
             </a:r>
-            <a:endParaRPr lang="en-US" sz="1400" dirty="0">
+            <a:endParaRPr lang="en-US" sz="1400" b="1" dirty="0">
               <a:solidFill>
-                <a:schemeClr val="bg1">
-                  <a:lumMod val="85000"/>
-                </a:schemeClr>
+                <a:schemeClr val="bg1"/>
               </a:solidFill>
             </a:endParaRPr>
           </a:p>
@@ -4788,9 +4792,7 @@
             <a:r>
               <a:rPr lang="en-US" sz="1400" b="1" dirty="0">
                 <a:solidFill>
-                  <a:schemeClr val="bg1">
-                    <a:lumMod val="85000"/>
-                  </a:schemeClr>
+                  <a:schemeClr val="bg1"/>
                 </a:solidFill>
                 <a:latin typeface="Calibri" pitchFamily="34" charset="0"/>
                 <a:ea typeface="Calibri" pitchFamily="34" charset="-122"/>
@@ -4800,9 +4802,7 @@
             </a:r>
             <a:endParaRPr lang="en-US" sz="1400" dirty="0">
               <a:solidFill>
-                <a:schemeClr val="bg1">
-                  <a:lumMod val="85000"/>
-                </a:schemeClr>
+                <a:schemeClr val="bg1"/>
               </a:solidFill>
             </a:endParaRPr>
           </a:p>
@@ -6930,7 +6930,29 @@
                 <a:ea typeface="Calibri" pitchFamily="34" charset="-122"/>
                 <a:cs typeface="Calibri" pitchFamily="34" charset="-120"/>
               </a:rPr>
-              <a:t>Svaki indeks košta: prostora, I/O operacija pri upisu.</a:t>
+              <a:t>Svaki indeks košta: </a:t>
+            </a:r>
+            <a:r>
+              <a:rPr lang="en-US" sz="1200" dirty="0" err="1">
+                <a:solidFill>
+                  <a:srgbClr val="475569"/>
+                </a:solidFill>
+                <a:latin typeface="Calibri" pitchFamily="34" charset="0"/>
+                <a:ea typeface="Calibri" pitchFamily="34" charset="-122"/>
+                <a:cs typeface="Calibri" pitchFamily="34" charset="-120"/>
+              </a:rPr>
+              <a:t>prostor</a:t>
+            </a:r>
+            <a:r>
+              <a:rPr lang="en-US" sz="1200" dirty="0">
+                <a:solidFill>
+                  <a:srgbClr val="475569"/>
+                </a:solidFill>
+                <a:latin typeface="Calibri" pitchFamily="34" charset="0"/>
+                <a:ea typeface="Calibri" pitchFamily="34" charset="-122"/>
+                <a:cs typeface="Calibri" pitchFamily="34" charset="-120"/>
+              </a:rPr>
+              <a:t>, I/O operacija pri upisu.</a:t>
             </a:r>
             <a:endParaRPr lang="en-US" sz="1200" dirty="0"/>
           </a:p>
@@ -7103,7 +7125,18 @@
                 <a:ea typeface="Calibri" pitchFamily="34" charset="-122"/>
                 <a:cs typeface="Calibri" pitchFamily="34" charset="-120"/>
               </a:rPr>
-              <a:t>Firebird: B+ stablo + MGA arhitektura.</a:t>
+              <a:t>Firebird: B+ stablo + MGA </a:t>
+            </a:r>
+            <a:r>
+              <a:rPr lang="en-US" sz="1200" dirty="0" err="1">
+                <a:solidFill>
+                  <a:srgbClr val="475569"/>
+                </a:solidFill>
+                <a:latin typeface="Calibri" pitchFamily="34" charset="0"/>
+                <a:ea typeface="Calibri" pitchFamily="34" charset="-122"/>
+                <a:cs typeface="Calibri" pitchFamily="34" charset="-120"/>
+              </a:rPr>
+              <a:t>arhitektura</a:t>
             </a:r>
             <a:endParaRPr lang="en-US" sz="1200" dirty="0"/>
           </a:p>
@@ -7231,7 +7264,7 @@
         <p:spPr>
           <a:xfrm>
             <a:off x="457200" y="3816236"/>
-            <a:ext cx="8412480" cy="815448"/>
+            <a:ext cx="8519274" cy="815448"/>
           </a:xfrm>
           <a:prstGeom prst="rect">
             <a:avLst/>
@@ -7255,7 +7288,108 @@
                 <a:ea typeface="Calibri" pitchFamily="34" charset="-122"/>
                 <a:cs typeface="Calibri" pitchFamily="34" charset="-120"/>
               </a:rPr>
-              <a:t>Firebird koristi Multi-Generational Architecture (MGA) — svaki UPDATE kreira novu verziju zapisa umesto prepisivanja. Indeksi moraju pratiti ove verzije, što dovodi do fenomena Index Bloat. Razumevanje fizičke strukture indeksa je preduslov za optimizaciju.</a:t>
+              <a:t>Firebird koristi Multi-Generational Architecture (MGA) — svaki UPDATE kreira novu verziju zapisa umesto prepisivanja. </a:t>
+            </a:r>
+            <a:endParaRPr lang="sr-Latn-RS" sz="1200" dirty="0">
+              <a:solidFill>
+                <a:srgbClr val="475569"/>
+              </a:solidFill>
+              <a:latin typeface="Calibri" pitchFamily="34" charset="0"/>
+              <a:ea typeface="Calibri" pitchFamily="34" charset="-122"/>
+              <a:cs typeface="Calibri" pitchFamily="34" charset="-120"/>
+            </a:endParaRPr>
+          </a:p>
+          <a:p>
+            <a:pPr marL="0" indent="0">
+              <a:buNone/>
+            </a:pPr>
+            <a:r>
+              <a:rPr lang="en-US" sz="1200" dirty="0" err="1">
+                <a:solidFill>
+                  <a:srgbClr val="475569"/>
+                </a:solidFill>
+                <a:latin typeface="Calibri" pitchFamily="34" charset="0"/>
+                <a:ea typeface="Calibri" pitchFamily="34" charset="-122"/>
+                <a:cs typeface="Calibri" pitchFamily="34" charset="-120"/>
+              </a:rPr>
+              <a:t>Indeksi</a:t>
+            </a:r>
+            <a:r>
+              <a:rPr lang="en-US" sz="1200" dirty="0">
+                <a:solidFill>
+                  <a:srgbClr val="475569"/>
+                </a:solidFill>
+                <a:latin typeface="Calibri" pitchFamily="34" charset="0"/>
+                <a:ea typeface="Calibri" pitchFamily="34" charset="-122"/>
+                <a:cs typeface="Calibri" pitchFamily="34" charset="-120"/>
+              </a:rPr>
+              <a:t> moraju pratiti </a:t>
+            </a:r>
+            <a:r>
+              <a:rPr lang="en-US" sz="1200" dirty="0" err="1">
+                <a:solidFill>
+                  <a:srgbClr val="475569"/>
+                </a:solidFill>
+                <a:latin typeface="Calibri" pitchFamily="34" charset="0"/>
+                <a:ea typeface="Calibri" pitchFamily="34" charset="-122"/>
+                <a:cs typeface="Calibri" pitchFamily="34" charset="-120"/>
+              </a:rPr>
+              <a:t>ove</a:t>
+            </a:r>
+            <a:r>
+              <a:rPr lang="en-US" sz="1200" dirty="0">
+                <a:solidFill>
+                  <a:srgbClr val="475569"/>
+                </a:solidFill>
+                <a:latin typeface="Calibri" pitchFamily="34" charset="0"/>
+                <a:ea typeface="Calibri" pitchFamily="34" charset="-122"/>
+                <a:cs typeface="Calibri" pitchFamily="34" charset="-120"/>
+              </a:rPr>
+              <a:t> </a:t>
+            </a:r>
+            <a:r>
+              <a:rPr lang="en-US" sz="1200" dirty="0" err="1">
+                <a:solidFill>
+                  <a:srgbClr val="475569"/>
+                </a:solidFill>
+                <a:latin typeface="Calibri" pitchFamily="34" charset="0"/>
+                <a:ea typeface="Calibri" pitchFamily="34" charset="-122"/>
+                <a:cs typeface="Calibri" pitchFamily="34" charset="-120"/>
+              </a:rPr>
+              <a:t>verzije</a:t>
+            </a:r>
+            <a:r>
+              <a:rPr lang="en-US" sz="1200" dirty="0">
+                <a:solidFill>
+                  <a:srgbClr val="475569"/>
+                </a:solidFill>
+                <a:latin typeface="Calibri" pitchFamily="34" charset="0"/>
+                <a:ea typeface="Calibri" pitchFamily="34" charset="-122"/>
+                <a:cs typeface="Calibri" pitchFamily="34" charset="-120"/>
+              </a:rPr>
+              <a:t> što dovodi do fenomena </a:t>
+            </a:r>
+            <a:r>
+              <a:rPr lang="en-US" sz="1200" b="1" dirty="0">
+                <a:solidFill>
+                  <a:srgbClr val="475569"/>
+                </a:solidFill>
+                <a:latin typeface="Calibri" pitchFamily="34" charset="0"/>
+                <a:ea typeface="Calibri" pitchFamily="34" charset="-122"/>
+                <a:cs typeface="Calibri" pitchFamily="34" charset="-120"/>
+              </a:rPr>
+              <a:t>Index Bloat</a:t>
+            </a:r>
+            <a:r>
+              <a:rPr lang="en-US" sz="1200" dirty="0">
+                <a:solidFill>
+                  <a:srgbClr val="475569"/>
+                </a:solidFill>
+                <a:latin typeface="Calibri" pitchFamily="34" charset="0"/>
+                <a:ea typeface="Calibri" pitchFamily="34" charset="-122"/>
+                <a:cs typeface="Calibri" pitchFamily="34" charset="-120"/>
+              </a:rPr>
+              <a:t>. Razumevanje fizičke strukture indeksa je preduslov za optimizaciju.</a:t>
             </a:r>
             <a:endParaRPr lang="en-US" sz="1200" dirty="0"/>
           </a:p>
@@ -8588,7 +8722,40 @@
                 <a:ea typeface="Calibri" pitchFamily="34" charset="-122"/>
                 <a:cs typeface="Calibri" pitchFamily="34" charset="-120"/>
               </a:rPr>
-              <a:t>Baza ne pretražuje — izračunava adresu trenutno.</a:t>
+              <a:t>Baza ne pretražuje — izračunava </a:t>
+            </a:r>
+            <a:r>
+              <a:rPr lang="en-US" sz="1200" dirty="0" err="1">
+                <a:solidFill>
+                  <a:srgbClr val="475569"/>
+                </a:solidFill>
+                <a:latin typeface="Calibri" pitchFamily="34" charset="0"/>
+                <a:ea typeface="Calibri" pitchFamily="34" charset="-122"/>
+                <a:cs typeface="Calibri" pitchFamily="34" charset="-120"/>
+              </a:rPr>
+              <a:t>adresu</a:t>
+            </a:r>
+            <a:r>
+              <a:rPr lang="en-US" sz="1200" dirty="0">
+                <a:solidFill>
+                  <a:srgbClr val="475569"/>
+                </a:solidFill>
+                <a:latin typeface="Calibri" pitchFamily="34" charset="0"/>
+                <a:ea typeface="Calibri" pitchFamily="34" charset="-122"/>
+                <a:cs typeface="Calibri" pitchFamily="34" charset="-120"/>
+              </a:rPr>
+              <a:t> </a:t>
+            </a:r>
+            <a:r>
+              <a:rPr lang="en-US" sz="1200" dirty="0" err="1">
+                <a:solidFill>
+                  <a:srgbClr val="475569"/>
+                </a:solidFill>
+                <a:latin typeface="Calibri" pitchFamily="34" charset="0"/>
+                <a:ea typeface="Calibri" pitchFamily="34" charset="-122"/>
+                <a:cs typeface="Calibri" pitchFamily="34" charset="-120"/>
+              </a:rPr>
+              <a:t>trenutno</a:t>
             </a:r>
             <a:endParaRPr lang="en-US" sz="1200" dirty="0"/>
           </a:p>
@@ -8734,7 +8901,7 @@
                 <a:ea typeface="Calibri" pitchFamily="34" charset="-122"/>
                 <a:cs typeface="Calibri" pitchFamily="34" charset="-120"/>
               </a:rPr>
-              <a:t>Indeks u tabeli slotova na dnu Data Page.</a:t>
+              <a:t>Indeks u tabeli slotova na dnu Data Page</a:t>
             </a:r>
             <a:endParaRPr lang="en-US" sz="1200" dirty="0"/>
           </a:p>
@@ -8751,7 +8918,40 @@
                 <a:ea typeface="Calibri" pitchFamily="34" charset="-122"/>
                 <a:cs typeface="Calibri" pitchFamily="34" charset="-120"/>
               </a:rPr>
-              <a:t>Omogućava pomeranje zapisa bez ažuriranja indeksa.</a:t>
+              <a:t>Omogućava pomeranje zapisa bez </a:t>
+            </a:r>
+            <a:r>
+              <a:rPr lang="en-US" sz="1200" dirty="0" err="1">
+                <a:solidFill>
+                  <a:srgbClr val="475569"/>
+                </a:solidFill>
+                <a:latin typeface="Calibri" pitchFamily="34" charset="0"/>
+                <a:ea typeface="Calibri" pitchFamily="34" charset="-122"/>
+                <a:cs typeface="Calibri" pitchFamily="34" charset="-120"/>
+              </a:rPr>
+              <a:t>ažuriranja</a:t>
+            </a:r>
+            <a:r>
+              <a:rPr lang="en-US" sz="1200" dirty="0">
+                <a:solidFill>
+                  <a:srgbClr val="475569"/>
+                </a:solidFill>
+                <a:latin typeface="Calibri" pitchFamily="34" charset="0"/>
+                <a:ea typeface="Calibri" pitchFamily="34" charset="-122"/>
+                <a:cs typeface="Calibri" pitchFamily="34" charset="-120"/>
+              </a:rPr>
+              <a:t> </a:t>
+            </a:r>
+            <a:r>
+              <a:rPr lang="en-US" sz="1200" dirty="0" err="1">
+                <a:solidFill>
+                  <a:srgbClr val="475569"/>
+                </a:solidFill>
+                <a:latin typeface="Calibri" pitchFamily="34" charset="0"/>
+                <a:ea typeface="Calibri" pitchFamily="34" charset="-122"/>
+                <a:cs typeface="Calibri" pitchFamily="34" charset="-120"/>
+              </a:rPr>
+              <a:t>indeksa</a:t>
             </a:r>
             <a:endParaRPr lang="en-US" sz="1200" dirty="0"/>
           </a:p>
@@ -8895,7 +9095,18 @@
                 <a:ea typeface="Calibri" pitchFamily="34" charset="-122"/>
                 <a:cs typeface="Calibri" pitchFamily="34" charset="-120"/>
               </a:rPr>
-              <a:t>Tabela slotova omogućava da se zapis fizički premesti unutar stranice (zbog MGA), a da svi indeksi koji na njega pokazuju ostanu validni — broj slota se ne menja. Bez ovog sistema, svaka promena dužine zapisa zahtevala bi hitno ažuriranje SVIH indeksa.</a:t>
+              <a:t>Tabela slotova omogućava da se zapis fizički premesti unutar stranice (zbog MGA), a da svi indeksi koji na njega pokazuju ostanu validni — broj slota se ne menja. Bez ovog sistema, svaka promena dužine zapisa zahtevala bi hitno ažuriranje SVIH </a:t>
+            </a:r>
+            <a:r>
+              <a:rPr lang="en-US" sz="1200" dirty="0" err="1">
+                <a:solidFill>
+                  <a:srgbClr val="475569"/>
+                </a:solidFill>
+                <a:latin typeface="Calibri" pitchFamily="34" charset="0"/>
+                <a:ea typeface="Calibri" pitchFamily="34" charset="-122"/>
+                <a:cs typeface="Calibri" pitchFamily="34" charset="-120"/>
+              </a:rPr>
+              <a:t>indeksa</a:t>
             </a:r>
             <a:endParaRPr lang="en-US" sz="1200" dirty="0"/>
           </a:p>
@@ -9864,7 +10075,29 @@
                 <a:ea typeface="Calibri" pitchFamily="34" charset="-122"/>
                 <a:cs typeface="Calibri" pitchFamily="34" charset="-120"/>
               </a:rPr>
-              <a:t>Gradi novo stablo od nule, odbacuje sve stare verzije.</a:t>
+              <a:t>Gradi novo stablo od nule, odbacuje sve stare </a:t>
+            </a:r>
+            <a:r>
+              <a:rPr lang="en-US" sz="1200" dirty="0" err="1">
+                <a:solidFill>
+                  <a:srgbClr val="475569"/>
+                </a:solidFill>
+                <a:latin typeface="Calibri" pitchFamily="34" charset="0"/>
+                <a:ea typeface="Calibri" pitchFamily="34" charset="-122"/>
+                <a:cs typeface="Calibri" pitchFamily="34" charset="-120"/>
+              </a:rPr>
+              <a:t>verzije</a:t>
+            </a:r>
+            <a:r>
+              <a:rPr lang="sr-Latn-RS" sz="1200" dirty="0">
+                <a:solidFill>
+                  <a:srgbClr val="475569"/>
+                </a:solidFill>
+                <a:latin typeface="Calibri" pitchFamily="34" charset="0"/>
+                <a:ea typeface="Calibri" pitchFamily="34" charset="-122"/>
+                <a:cs typeface="Calibri" pitchFamily="34" charset="-120"/>
+              </a:rPr>
+              <a:t>.</a:t>
             </a:r>
             <a:endParaRPr lang="en-US" sz="1200" dirty="0"/>
           </a:p>
@@ -10860,7 +11093,29 @@
                 <a:ea typeface="Calibri" pitchFamily="34" charset="-122"/>
                 <a:cs typeface="Calibri" pitchFamily="34" charset="-120"/>
               </a:rPr>
-              <a:t>Roditeljski čvor dobija novi pokazivač.</a:t>
+              <a:t>Roditeljski čvor dobija novi </a:t>
+            </a:r>
+            <a:r>
+              <a:rPr lang="en-US" sz="1200" dirty="0" err="1">
+                <a:solidFill>
+                  <a:srgbClr val="475569"/>
+                </a:solidFill>
+                <a:latin typeface="Calibri" pitchFamily="34" charset="0"/>
+                <a:ea typeface="Calibri" pitchFamily="34" charset="-122"/>
+                <a:cs typeface="Calibri" pitchFamily="34" charset="-120"/>
+              </a:rPr>
+              <a:t>pokazivač</a:t>
+            </a:r>
+            <a:r>
+              <a:rPr lang="sr-Latn-RS" sz="1200" dirty="0">
+                <a:solidFill>
+                  <a:srgbClr val="475569"/>
+                </a:solidFill>
+                <a:latin typeface="Calibri" pitchFamily="34" charset="0"/>
+                <a:ea typeface="Calibri" pitchFamily="34" charset="-122"/>
+                <a:cs typeface="Calibri" pitchFamily="34" charset="-120"/>
+              </a:rPr>
+              <a:t>.</a:t>
             </a:r>
             <a:endParaRPr lang="en-US" sz="1200" dirty="0"/>
           </a:p>
@@ -10874,7 +11129,51 @@
                 <a:ea typeface="Calibri" pitchFamily="34" charset="-122"/>
                 <a:cs typeface="Calibri" pitchFamily="34" charset="-120"/>
               </a:rPr>
-              <a:t>Stablo raste vertikalno.</a:t>
+              <a:t>Stablo </a:t>
+            </a:r>
+            <a:r>
+              <a:rPr lang="en-US" sz="1200" dirty="0" err="1">
+                <a:solidFill>
+                  <a:srgbClr val="475569"/>
+                </a:solidFill>
+                <a:latin typeface="Calibri" pitchFamily="34" charset="0"/>
+                <a:ea typeface="Calibri" pitchFamily="34" charset="-122"/>
+                <a:cs typeface="Calibri" pitchFamily="34" charset="-120"/>
+              </a:rPr>
+              <a:t>raste</a:t>
+            </a:r>
+            <a:r>
+              <a:rPr lang="en-US" sz="1200" dirty="0">
+                <a:solidFill>
+                  <a:srgbClr val="475569"/>
+                </a:solidFill>
+                <a:latin typeface="Calibri" pitchFamily="34" charset="0"/>
+                <a:ea typeface="Calibri" pitchFamily="34" charset="-122"/>
+                <a:cs typeface="Calibri" pitchFamily="34" charset="-120"/>
+              </a:rPr>
+              <a:t> </a:t>
+            </a:r>
+            <a:r>
+              <a:rPr lang="en-US" sz="1200" dirty="0" err="1">
+                <a:solidFill>
+                  <a:srgbClr val="475569"/>
+                </a:solidFill>
+                <a:latin typeface="Calibri" pitchFamily="34" charset="0"/>
+                <a:ea typeface="Calibri" pitchFamily="34" charset="-122"/>
+                <a:cs typeface="Calibri" pitchFamily="34" charset="-120"/>
+              </a:rPr>
+              <a:t>vertikalno</a:t>
+            </a:r>
+            <a:r>
+              <a:rPr lang="sr-Latn-RS" sz="1200" dirty="0">
+                <a:solidFill>
+                  <a:srgbClr val="475569"/>
+                </a:solidFill>
+                <a:latin typeface="Calibri" pitchFamily="34" charset="0"/>
+                <a:ea typeface="Calibri" pitchFamily="34" charset="-122"/>
+                <a:cs typeface="Calibri" pitchFamily="34" charset="-120"/>
+              </a:rPr>
+              <a:t>.</a:t>
             </a:r>
             <a:endParaRPr lang="en-US" sz="1200" dirty="0"/>
           </a:p>
@@ -11039,7 +11338,51 @@
                 <a:ea typeface="Calibri" pitchFamily="34" charset="-122"/>
                 <a:cs typeface="Calibri" pitchFamily="34" charset="-120"/>
               </a:rPr>
-              <a:t>Ostavlja bafer za nove ključeve.</a:t>
+              <a:t>Ostavlja bafer za </a:t>
+            </a:r>
+            <a:r>
+              <a:rPr lang="en-US" sz="1200" dirty="0" err="1">
+                <a:solidFill>
+                  <a:srgbClr val="475569"/>
+                </a:solidFill>
+                <a:latin typeface="Calibri" pitchFamily="34" charset="0"/>
+                <a:ea typeface="Calibri" pitchFamily="34" charset="-122"/>
+                <a:cs typeface="Calibri" pitchFamily="34" charset="-120"/>
+              </a:rPr>
+              <a:t>nove</a:t>
+            </a:r>
+            <a:r>
+              <a:rPr lang="en-US" sz="1200" dirty="0">
+                <a:solidFill>
+                  <a:srgbClr val="475569"/>
+                </a:solidFill>
+                <a:latin typeface="Calibri" pitchFamily="34" charset="0"/>
+                <a:ea typeface="Calibri" pitchFamily="34" charset="-122"/>
+                <a:cs typeface="Calibri" pitchFamily="34" charset="-120"/>
+              </a:rPr>
+              <a:t> </a:t>
+            </a:r>
+            <a:r>
+              <a:rPr lang="en-US" sz="1200" dirty="0" err="1">
+                <a:solidFill>
+                  <a:srgbClr val="475569"/>
+                </a:solidFill>
+                <a:latin typeface="Calibri" pitchFamily="34" charset="0"/>
+                <a:ea typeface="Calibri" pitchFamily="34" charset="-122"/>
+                <a:cs typeface="Calibri" pitchFamily="34" charset="-120"/>
+              </a:rPr>
+              <a:t>ključeve</a:t>
+            </a:r>
+            <a:r>
+              <a:rPr lang="sr-Latn-RS" sz="1200" dirty="0">
+                <a:solidFill>
+                  <a:srgbClr val="475569"/>
+                </a:solidFill>
+                <a:latin typeface="Calibri" pitchFamily="34" charset="0"/>
+                <a:ea typeface="Calibri" pitchFamily="34" charset="-122"/>
+                <a:cs typeface="Calibri" pitchFamily="34" charset="-120"/>
+              </a:rPr>
+              <a:t>.</a:t>
             </a:r>
             <a:endParaRPr lang="en-US" sz="1200" dirty="0"/>
           </a:p>
@@ -11056,7 +11399,18 @@
                 <a:ea typeface="Calibri" pitchFamily="34" charset="-122"/>
                 <a:cs typeface="Calibri" pitchFamily="34" charset="-120"/>
               </a:rPr>
-              <a:t>Spečava preuranjeni Page Split.</a:t>
+              <a:t>Spečava preuranjeni Page Split</a:t>
+            </a:r>
+            <a:r>
+              <a:rPr lang="sr-Latn-RS" sz="1200" dirty="0">
+                <a:solidFill>
+                  <a:srgbClr val="475569"/>
+                </a:solidFill>
+                <a:latin typeface="Calibri" pitchFamily="34" charset="0"/>
+                <a:ea typeface="Calibri" pitchFamily="34" charset="-122"/>
+                <a:cs typeface="Calibri" pitchFamily="34" charset="-120"/>
+              </a:rPr>
+              <a:t>.</a:t>
             </a:r>
             <a:endParaRPr lang="en-US" sz="1200" dirty="0"/>
           </a:p>
@@ -11202,7 +11556,40 @@
                 <a:ea typeface="Calibri" pitchFamily="34" charset="-122"/>
                 <a:cs typeface="Calibri" pitchFamily="34" charset="-120"/>
               </a:rPr>
-              <a:t>Konstantan broj I/O operacija do bilo kog zapisa.</a:t>
+              <a:t>Konstantan broj I/O operacija do bilo </a:t>
+            </a:r>
+            <a:r>
+              <a:rPr lang="en-US" sz="1200" dirty="0" err="1">
+                <a:solidFill>
+                  <a:srgbClr val="475569"/>
+                </a:solidFill>
+                <a:latin typeface="Calibri" pitchFamily="34" charset="0"/>
+                <a:ea typeface="Calibri" pitchFamily="34" charset="-122"/>
+                <a:cs typeface="Calibri" pitchFamily="34" charset="-120"/>
+              </a:rPr>
+              <a:t>kog</a:t>
+            </a:r>
+            <a:r>
+              <a:rPr lang="en-US" sz="1200" dirty="0">
+                <a:solidFill>
+                  <a:srgbClr val="475569"/>
+                </a:solidFill>
+                <a:latin typeface="Calibri" pitchFamily="34" charset="0"/>
+                <a:ea typeface="Calibri" pitchFamily="34" charset="-122"/>
+                <a:cs typeface="Calibri" pitchFamily="34" charset="-120"/>
+              </a:rPr>
+              <a:t> </a:t>
+            </a:r>
+            <a:r>
+              <a:rPr lang="en-US" sz="1200" dirty="0" err="1">
+                <a:solidFill>
+                  <a:srgbClr val="475569"/>
+                </a:solidFill>
+                <a:latin typeface="Calibri" pitchFamily="34" charset="0"/>
+                <a:ea typeface="Calibri" pitchFamily="34" charset="-122"/>
+                <a:cs typeface="Calibri" pitchFamily="34" charset="-120"/>
+              </a:rPr>
+              <a:t>zapisa</a:t>
             </a:r>
             <a:endParaRPr lang="en-US" sz="1200" dirty="0"/>
           </a:p>
@@ -11219,7 +11606,40 @@
                 <a:ea typeface="Calibri" pitchFamily="34" charset="-122"/>
                 <a:cs typeface="Calibri" pitchFamily="34" charset="-120"/>
               </a:rPr>
-              <a:t>Manja dubina = brži upiti.</a:t>
+              <a:t>Manja dubina = </a:t>
+            </a:r>
+            <a:r>
+              <a:rPr lang="en-US" sz="1200" dirty="0" err="1">
+                <a:solidFill>
+                  <a:srgbClr val="475569"/>
+                </a:solidFill>
+                <a:latin typeface="Calibri" pitchFamily="34" charset="0"/>
+                <a:ea typeface="Calibri" pitchFamily="34" charset="-122"/>
+                <a:cs typeface="Calibri" pitchFamily="34" charset="-120"/>
+              </a:rPr>
+              <a:t>brži</a:t>
+            </a:r>
+            <a:r>
+              <a:rPr lang="en-US" sz="1200" dirty="0">
+                <a:solidFill>
+                  <a:srgbClr val="475569"/>
+                </a:solidFill>
+                <a:latin typeface="Calibri" pitchFamily="34" charset="0"/>
+                <a:ea typeface="Calibri" pitchFamily="34" charset="-122"/>
+                <a:cs typeface="Calibri" pitchFamily="34" charset="-120"/>
+              </a:rPr>
+              <a:t> </a:t>
+            </a:r>
+            <a:r>
+              <a:rPr lang="en-US" sz="1200" dirty="0" err="1">
+                <a:solidFill>
+                  <a:srgbClr val="475569"/>
+                </a:solidFill>
+                <a:latin typeface="Calibri" pitchFamily="34" charset="0"/>
+                <a:ea typeface="Calibri" pitchFamily="34" charset="-122"/>
+                <a:cs typeface="Calibri" pitchFamily="34" charset="-120"/>
+              </a:rPr>
+              <a:t>upiti</a:t>
             </a:r>
             <a:endParaRPr lang="en-US" sz="1200" dirty="0"/>
           </a:p>
@@ -11236,7 +11656,40 @@
                 <a:ea typeface="Calibri" pitchFamily="34" charset="-122"/>
                 <a:cs typeface="Calibri" pitchFamily="34" charset="-120"/>
               </a:rPr>
-              <a:t>gstat -i prikazuje Depth.</a:t>
+              <a:t>gstat -i </a:t>
+            </a:r>
+            <a:r>
+              <a:rPr lang="en-US" sz="1200" dirty="0" err="1">
+                <a:solidFill>
+                  <a:srgbClr val="475569"/>
+                </a:solidFill>
+                <a:latin typeface="Calibri" pitchFamily="34" charset="0"/>
+                <a:ea typeface="Calibri" pitchFamily="34" charset="-122"/>
+                <a:cs typeface="Calibri" pitchFamily="34" charset="-120"/>
+              </a:rPr>
+              <a:t>prikazuje</a:t>
+            </a:r>
+            <a:r>
+              <a:rPr lang="en-US" sz="1200" dirty="0">
+                <a:solidFill>
+                  <a:srgbClr val="475569"/>
+                </a:solidFill>
+                <a:latin typeface="Calibri" pitchFamily="34" charset="0"/>
+                <a:ea typeface="Calibri" pitchFamily="34" charset="-122"/>
+                <a:cs typeface="Calibri" pitchFamily="34" charset="-120"/>
+              </a:rPr>
+              <a:t> </a:t>
+            </a:r>
+            <a:r>
+              <a:rPr lang="sr-Latn-RS" sz="1200" dirty="0">
+                <a:solidFill>
+                  <a:srgbClr val="475569"/>
+                </a:solidFill>
+                <a:latin typeface="Calibri" pitchFamily="34" charset="0"/>
+                <a:ea typeface="Calibri" pitchFamily="34" charset="-122"/>
+                <a:cs typeface="Calibri" pitchFamily="34" charset="-120"/>
+              </a:rPr>
+              <a:t>dubinu stabla</a:t>
             </a:r>
             <a:endParaRPr lang="en-US" sz="1200" dirty="0"/>
           </a:p>
@@ -12360,9 +12813,19 @@
                 <a:ea typeface="Calibri" pitchFamily="34" charset="-122"/>
                 <a:cs typeface="Calibri" pitchFamily="34" charset="-120"/>
               </a:rPr>
-              <a:t>IS NULL koristi indeks — nema Full Table Scan!</a:t>
-            </a:r>
-            <a:endParaRPr lang="en-US" sz="1200" dirty="0"/>
+              <a:t>IS NULL koristi indeks — </a:t>
+            </a:r>
+            <a:r>
+              <a:rPr lang="en-US" sz="1200" b="1" dirty="0">
+                <a:solidFill>
+                  <a:srgbClr val="475569"/>
+                </a:solidFill>
+                <a:ea typeface="Calibri" pitchFamily="34" charset="-122"/>
+                <a:cs typeface="Calibri" pitchFamily="34" charset="-120"/>
+              </a:rPr>
+              <a:t>nema Full Table Scan</a:t>
+            </a:r>
+            <a:endParaRPr lang="en-US" sz="1200" b="1" dirty="0"/>
           </a:p>
           <a:p>
             <a:pPr marL="0" indent="0">
@@ -13221,9 +13684,20 @@
                 <a:ea typeface="Calibri" pitchFamily="34" charset="-122"/>
                 <a:cs typeface="Calibri" pitchFamily="34" charset="-120"/>
               </a:rPr>
-              <a:t>Isti ključevi za optimizer — nema Full Scan!</a:t>
-            </a:r>
-            <a:endParaRPr lang="en-US" sz="1200" dirty="0"/>
+              <a:t>Isti ključevi za optimizer — </a:t>
+            </a:r>
+            <a:r>
+              <a:rPr lang="en-US" sz="1200" b="1" dirty="0">
+                <a:solidFill>
+                  <a:srgbClr val="475569"/>
+                </a:solidFill>
+                <a:latin typeface="Calibri" pitchFamily="34" charset="0"/>
+                <a:ea typeface="Calibri" pitchFamily="34" charset="-122"/>
+                <a:cs typeface="Calibri" pitchFamily="34" charset="-120"/>
+              </a:rPr>
+              <a:t>nema Full Scan</a:t>
+            </a:r>
+            <a:endParaRPr lang="en-US" sz="1200" b="1" dirty="0"/>
           </a:p>
         </p:txBody>
       </p:sp>

--- a/seminarski-1/Interna struktura i organizacija indeksa u Firebird bazi podataka.pptx
+++ b/seminarski-1/Interna struktura i organizacija indeksa u Firebird bazi podataka.pptx
@@ -292,6 +292,38 @@
           <a:bodyPr/>
           <a:lstStyle/>
           <a:p>
+            <a:r>
+              <a:rPr lang="en-US" dirty="0" err="1"/>
+              <a:t>Dobar</a:t>
+            </a:r>
+            <a:r>
+              <a:rPr lang="en-US" dirty="0"/>
+              <a:t> dan </a:t>
+            </a:r>
+            <a:r>
+              <a:rPr lang="en-US" dirty="0" err="1"/>
+              <a:t>svima</a:t>
+            </a:r>
+            <a:r>
+              <a:rPr lang="en-US" dirty="0"/>
+              <a:t>, ja </a:t>
+            </a:r>
+            <a:r>
+              <a:rPr lang="en-US" dirty="0" err="1"/>
+              <a:t>sam</a:t>
+            </a:r>
+            <a:r>
+              <a:rPr lang="en-US" dirty="0"/>
+              <a:t> Jefimija </a:t>
+            </a:r>
+            <a:r>
+              <a:rPr lang="en-US" dirty="0" err="1"/>
+              <a:t>Stamenovi</a:t>
+            </a:r>
+            <a:r>
+              <a:rPr lang="sr-Latn-RS" dirty="0"/>
+              <a:t>ć i danas ću vam predstaviti internu strukturu i organizaciju indeksa u Firebird bazi podataka. </a:t>
+            </a:r>
             <a:endParaRPr lang="en-US" dirty="0"/>
           </a:p>
         </p:txBody>
@@ -376,6 +408,806 @@
           <a:bodyPr/>
           <a:lstStyle/>
           <a:p>
+            <a:r>
+              <a:rPr lang="en-US" dirty="0" err="1"/>
+              <a:t>Selektivnost</a:t>
+            </a:r>
+            <a:r>
+              <a:rPr lang="en-US" dirty="0"/>
+              <a:t> je </a:t>
+            </a:r>
+            <a:r>
+              <a:rPr lang="en-US" dirty="0" err="1"/>
+              <a:t>numerička</a:t>
+            </a:r>
+            <a:r>
+              <a:rPr lang="en-US" dirty="0"/>
+              <a:t> </a:t>
+            </a:r>
+            <a:r>
+              <a:rPr lang="en-US" dirty="0" err="1"/>
+              <a:t>vrednost</a:t>
+            </a:r>
+            <a:r>
+              <a:rPr lang="en-US" dirty="0"/>
+              <a:t> </a:t>
+            </a:r>
+            <a:r>
+              <a:rPr lang="en-US" dirty="0" err="1"/>
+              <a:t>između</a:t>
+            </a:r>
+            <a:r>
+              <a:rPr lang="en-US" dirty="0"/>
+              <a:t> 0 </a:t>
+            </a:r>
+            <a:r>
+              <a:rPr lang="en-US" dirty="0" err="1"/>
+              <a:t>i</a:t>
+            </a:r>
+            <a:r>
+              <a:rPr lang="en-US" dirty="0"/>
+              <a:t> 1 </a:t>
+            </a:r>
+            <a:r>
+              <a:rPr lang="en-US" dirty="0" err="1"/>
+              <a:t>koja</a:t>
+            </a:r>
+            <a:r>
+              <a:rPr lang="en-US" dirty="0"/>
+              <a:t> </a:t>
+            </a:r>
+            <a:r>
+              <a:rPr lang="en-US" dirty="0" err="1"/>
+              <a:t>govori</a:t>
+            </a:r>
+            <a:r>
+              <a:rPr lang="en-US" dirty="0"/>
+              <a:t> </a:t>
+            </a:r>
+            <a:r>
+              <a:rPr lang="en-US" dirty="0" err="1"/>
+              <a:t>optimizatoru</a:t>
+            </a:r>
+            <a:r>
+              <a:rPr lang="en-US" dirty="0"/>
+              <a:t> </a:t>
+            </a:r>
+            <a:r>
+              <a:rPr lang="en-US" dirty="0" err="1"/>
+              <a:t>koliko</a:t>
+            </a:r>
+            <a:r>
+              <a:rPr lang="en-US" dirty="0"/>
+              <a:t> je </a:t>
+            </a:r>
+            <a:r>
+              <a:rPr lang="en-US" dirty="0" err="1"/>
+              <a:t>indeks</a:t>
+            </a:r>
+            <a:r>
+              <a:rPr lang="en-US" dirty="0"/>
+              <a:t> "</a:t>
+            </a:r>
+            <a:r>
+              <a:rPr lang="en-US" dirty="0" err="1"/>
+              <a:t>jedinstven</a:t>
+            </a:r>
+            <a:r>
+              <a:rPr lang="en-US" dirty="0"/>
+              <a:t>" — </a:t>
+            </a:r>
+            <a:r>
+              <a:rPr lang="en-US" dirty="0" err="1"/>
+              <a:t>izračunava</a:t>
+            </a:r>
+            <a:r>
+              <a:rPr lang="en-US" dirty="0"/>
+              <a:t> se </a:t>
+            </a:r>
+            <a:r>
+              <a:rPr lang="en-US" dirty="0" err="1"/>
+              <a:t>kao</a:t>
+            </a:r>
+            <a:r>
+              <a:rPr lang="en-US" dirty="0"/>
+              <a:t> 1 </a:t>
+            </a:r>
+            <a:r>
+              <a:rPr lang="en-US" dirty="0" err="1"/>
+              <a:t>podeljen</a:t>
+            </a:r>
+            <a:r>
+              <a:rPr lang="en-US" dirty="0"/>
+              <a:t> </a:t>
+            </a:r>
+            <a:r>
+              <a:rPr lang="en-US" dirty="0" err="1"/>
+              <a:t>brojem</a:t>
+            </a:r>
+            <a:r>
+              <a:rPr lang="en-US" dirty="0"/>
+              <a:t> </a:t>
+            </a:r>
+            <a:r>
+              <a:rPr lang="en-US" dirty="0" err="1"/>
+              <a:t>unikatnih</a:t>
+            </a:r>
+            <a:r>
+              <a:rPr lang="en-US" dirty="0"/>
+              <a:t> </a:t>
+            </a:r>
+            <a:r>
+              <a:rPr lang="en-US" dirty="0" err="1"/>
+              <a:t>ključeva</a:t>
+            </a:r>
+            <a:r>
+              <a:rPr lang="en-US" dirty="0"/>
+              <a:t>.</a:t>
+            </a:r>
+          </a:p>
+          <a:p>
+            <a:r>
+              <a:rPr lang="en-US" dirty="0" err="1"/>
+              <a:t>Vrednost</a:t>
+            </a:r>
+            <a:r>
+              <a:rPr lang="en-US" dirty="0"/>
+              <a:t> </a:t>
+            </a:r>
+            <a:r>
+              <a:rPr lang="en-US" dirty="0" err="1"/>
+              <a:t>blizu</a:t>
+            </a:r>
+            <a:r>
+              <a:rPr lang="en-US" dirty="0"/>
+              <a:t> 0 </a:t>
+            </a:r>
+            <a:r>
+              <a:rPr lang="en-US" dirty="0" err="1"/>
+              <a:t>znači</a:t>
+            </a:r>
+            <a:r>
+              <a:rPr lang="en-US" dirty="0"/>
+              <a:t> </a:t>
+            </a:r>
+            <a:r>
+              <a:rPr lang="en-US" dirty="0" err="1"/>
+              <a:t>odličan</a:t>
+            </a:r>
+            <a:r>
+              <a:rPr lang="en-US" dirty="0"/>
+              <a:t> </a:t>
+            </a:r>
+            <a:r>
+              <a:rPr lang="en-US" dirty="0" err="1"/>
+              <a:t>indeks</a:t>
+            </a:r>
+            <a:r>
+              <a:rPr lang="en-US" dirty="0"/>
+              <a:t> — </a:t>
+            </a:r>
+            <a:r>
+              <a:rPr lang="en-US" dirty="0" err="1"/>
+              <a:t>kao</a:t>
+            </a:r>
+            <a:r>
+              <a:rPr lang="en-US" dirty="0"/>
+              <a:t> </a:t>
+            </a:r>
+            <a:r>
+              <a:rPr lang="en-US" dirty="0" err="1"/>
+              <a:t>kod</a:t>
+            </a:r>
+            <a:r>
+              <a:rPr lang="en-US" dirty="0"/>
+              <a:t> </a:t>
+            </a:r>
+            <a:r>
+              <a:rPr lang="en-US" dirty="0" err="1"/>
+              <a:t>primarnog</a:t>
+            </a:r>
+            <a:r>
+              <a:rPr lang="en-US" dirty="0"/>
+              <a:t> </a:t>
+            </a:r>
+            <a:r>
+              <a:rPr lang="en-US" dirty="0" err="1"/>
+              <a:t>ključa</a:t>
+            </a:r>
+            <a:r>
+              <a:rPr lang="en-US" dirty="0"/>
+              <a:t> </a:t>
+            </a:r>
+            <a:r>
+              <a:rPr lang="en-US" dirty="0" err="1"/>
+              <a:t>gde</a:t>
+            </a:r>
+            <a:r>
+              <a:rPr lang="en-US" dirty="0"/>
+              <a:t> je </a:t>
+            </a:r>
+            <a:r>
+              <a:rPr lang="en-US" dirty="0" err="1"/>
+              <a:t>svaki</a:t>
+            </a:r>
+            <a:r>
+              <a:rPr lang="en-US" dirty="0"/>
+              <a:t> red </a:t>
+            </a:r>
+            <a:r>
+              <a:rPr lang="en-US" dirty="0" err="1"/>
+              <a:t>jedinstven</a:t>
+            </a:r>
+            <a:r>
+              <a:rPr lang="en-US" dirty="0"/>
+              <a:t>, pa ga optimizer </a:t>
+            </a:r>
+            <a:r>
+              <a:rPr lang="en-US" dirty="0" err="1"/>
+              <a:t>uvek</a:t>
+            </a:r>
+            <a:r>
+              <a:rPr lang="en-US" dirty="0"/>
+              <a:t> </a:t>
+            </a:r>
+            <a:r>
+              <a:rPr lang="en-US" dirty="0" err="1"/>
+              <a:t>koristi</a:t>
+            </a:r>
+            <a:r>
+              <a:rPr lang="en-US" dirty="0"/>
+              <a:t> za </a:t>
+            </a:r>
+            <a:r>
+              <a:rPr lang="en-US" dirty="0" err="1"/>
+              <a:t>pretragu</a:t>
+            </a:r>
+            <a:r>
+              <a:rPr lang="en-US" dirty="0"/>
+              <a:t>.</a:t>
+            </a:r>
+            <a:r>
+              <a:rPr lang="sr-Latn-RS" dirty="0"/>
+              <a:t> </a:t>
+            </a:r>
+            <a:r>
+              <a:rPr lang="en-US" dirty="0" err="1"/>
+              <a:t>Vrednost</a:t>
+            </a:r>
+            <a:r>
+              <a:rPr lang="en-US" dirty="0"/>
+              <a:t> </a:t>
+            </a:r>
+            <a:r>
+              <a:rPr lang="en-US" dirty="0" err="1"/>
+              <a:t>blizu</a:t>
+            </a:r>
+            <a:r>
+              <a:rPr lang="en-US" dirty="0"/>
+              <a:t> 1 </a:t>
+            </a:r>
+            <a:r>
+              <a:rPr lang="en-US" dirty="0" err="1"/>
+              <a:t>znači</a:t>
+            </a:r>
+            <a:r>
+              <a:rPr lang="en-US" dirty="0"/>
+              <a:t> </a:t>
+            </a:r>
+            <a:r>
+              <a:rPr lang="en-US" dirty="0" err="1"/>
+              <a:t>loš</a:t>
+            </a:r>
+            <a:r>
+              <a:rPr lang="en-US" dirty="0"/>
+              <a:t> </a:t>
+            </a:r>
+            <a:r>
+              <a:rPr lang="en-US" dirty="0" err="1"/>
+              <a:t>indeks</a:t>
+            </a:r>
+            <a:r>
+              <a:rPr lang="en-US" dirty="0"/>
+              <a:t> </a:t>
+            </a:r>
+            <a:r>
+              <a:rPr lang="en-US" dirty="0" err="1"/>
+              <a:t>sa</a:t>
+            </a:r>
+            <a:r>
+              <a:rPr lang="en-US" dirty="0"/>
+              <a:t> </a:t>
+            </a:r>
+            <a:r>
+              <a:rPr lang="en-US" dirty="0" err="1"/>
+              <a:t>mnogo</a:t>
+            </a:r>
+            <a:r>
+              <a:rPr lang="en-US" dirty="0"/>
+              <a:t> </a:t>
+            </a:r>
+            <a:r>
+              <a:rPr lang="en-US" dirty="0" err="1"/>
+              <a:t>duplikata</a:t>
+            </a:r>
+            <a:r>
+              <a:rPr lang="en-US" dirty="0"/>
+              <a:t> — optimizer ga </a:t>
+            </a:r>
+            <a:r>
+              <a:rPr lang="en-US" dirty="0" err="1"/>
+              <a:t>svesno</a:t>
+            </a:r>
+            <a:r>
+              <a:rPr lang="en-US" dirty="0"/>
+              <a:t> </a:t>
+            </a:r>
+            <a:r>
+              <a:rPr lang="en-US" dirty="0" err="1"/>
+              <a:t>ignoriše</a:t>
+            </a:r>
+            <a:r>
+              <a:rPr lang="en-US" dirty="0"/>
+              <a:t> </a:t>
+            </a:r>
+            <a:r>
+              <a:rPr lang="en-US" dirty="0" err="1"/>
+              <a:t>jer</a:t>
+            </a:r>
+            <a:r>
+              <a:rPr lang="en-US" dirty="0"/>
+              <a:t> </a:t>
+            </a:r>
+            <a:r>
+              <a:rPr lang="en-US" dirty="0" err="1"/>
+              <a:t>procenjuje</a:t>
+            </a:r>
+            <a:r>
+              <a:rPr lang="en-US" dirty="0"/>
+              <a:t> da je Full Table Scan </a:t>
+            </a:r>
+            <a:r>
+              <a:rPr lang="en-US" dirty="0" err="1"/>
+              <a:t>brži</a:t>
+            </a:r>
+            <a:r>
+              <a:rPr lang="en-US" dirty="0"/>
+              <a:t> od </a:t>
+            </a:r>
+            <a:r>
+              <a:rPr lang="en-US" dirty="0" err="1"/>
+              <a:t>skakanja</a:t>
+            </a:r>
+            <a:r>
+              <a:rPr lang="en-US" dirty="0"/>
+              <a:t> po </a:t>
+            </a:r>
+            <a:r>
+              <a:rPr lang="en-US" dirty="0" err="1"/>
+              <a:t>indeksu</a:t>
+            </a:r>
+            <a:r>
+              <a:rPr lang="en-US" dirty="0"/>
+              <a:t>.</a:t>
+            </a:r>
+            <a:r>
+              <a:rPr lang="sr-Latn-RS" dirty="0"/>
+              <a:t> </a:t>
+            </a:r>
+            <a:r>
+              <a:rPr lang="en-US" dirty="0"/>
+              <a:t>Problem </a:t>
+            </a:r>
+            <a:r>
+              <a:rPr lang="en-US" dirty="0" err="1"/>
+              <a:t>nastaje</a:t>
+            </a:r>
+            <a:r>
+              <a:rPr lang="en-US" dirty="0"/>
+              <a:t> </a:t>
+            </a:r>
+            <a:r>
+              <a:rPr lang="en-US" dirty="0" err="1"/>
+              <a:t>jer</a:t>
+            </a:r>
+            <a:r>
+              <a:rPr lang="en-US" dirty="0"/>
+              <a:t> se </a:t>
+            </a:r>
+            <a:r>
+              <a:rPr lang="en-US" dirty="0" err="1"/>
+              <a:t>selektivnost</a:t>
+            </a:r>
+            <a:r>
+              <a:rPr lang="en-US" dirty="0"/>
+              <a:t> ne </a:t>
+            </a:r>
+            <a:r>
+              <a:rPr lang="en-US" dirty="0" err="1"/>
+              <a:t>ažurira</a:t>
+            </a:r>
+            <a:r>
+              <a:rPr lang="en-US" dirty="0"/>
+              <a:t> </a:t>
+            </a:r>
+            <a:r>
+              <a:rPr lang="en-US" dirty="0" err="1"/>
+              <a:t>automatski</a:t>
+            </a:r>
+            <a:r>
+              <a:rPr lang="en-US" dirty="0"/>
+              <a:t> </a:t>
+            </a:r>
+            <a:r>
+              <a:rPr lang="en-US" dirty="0" err="1"/>
+              <a:t>pri</a:t>
+            </a:r>
+            <a:r>
+              <a:rPr lang="en-US" dirty="0"/>
+              <a:t> </a:t>
+            </a:r>
+            <a:r>
+              <a:rPr lang="en-US" dirty="0" err="1"/>
+              <a:t>svakom</a:t>
+            </a:r>
+            <a:r>
+              <a:rPr lang="en-US" dirty="0"/>
+              <a:t> INSERT, UPDATE </a:t>
+            </a:r>
+            <a:r>
+              <a:rPr lang="en-US" dirty="0" err="1"/>
+              <a:t>ili</a:t>
+            </a:r>
+            <a:r>
+              <a:rPr lang="en-US" dirty="0"/>
+              <a:t> DELETE — to bi </a:t>
+            </a:r>
+            <a:r>
+              <a:rPr lang="en-US" dirty="0" err="1"/>
+              <a:t>drastično</a:t>
+            </a:r>
+            <a:r>
+              <a:rPr lang="en-US" dirty="0"/>
+              <a:t> </a:t>
+            </a:r>
+            <a:r>
+              <a:rPr lang="en-US" dirty="0" err="1"/>
+              <a:t>usporilo</a:t>
+            </a:r>
+            <a:r>
+              <a:rPr lang="en-US" dirty="0"/>
+              <a:t> </a:t>
+            </a:r>
+            <a:r>
+              <a:rPr lang="en-US" dirty="0" err="1"/>
+              <a:t>upis</a:t>
+            </a:r>
+            <a:r>
+              <a:rPr lang="en-US" dirty="0"/>
+              <a:t>, pa </a:t>
+            </a:r>
+            <a:r>
+              <a:rPr lang="en-US" dirty="0" err="1"/>
+              <a:t>tokom</a:t>
+            </a:r>
+            <a:r>
+              <a:rPr lang="en-US" dirty="0"/>
+              <a:t> </a:t>
+            </a:r>
+            <a:r>
+              <a:rPr lang="en-US" dirty="0" err="1"/>
+              <a:t>vremena</a:t>
+            </a:r>
+            <a:r>
+              <a:rPr lang="en-US" dirty="0"/>
+              <a:t> </a:t>
+            </a:r>
+            <a:r>
+              <a:rPr lang="en-US" dirty="0" err="1"/>
+              <a:t>statistika</a:t>
+            </a:r>
+            <a:r>
+              <a:rPr lang="en-US" dirty="0"/>
+              <a:t> u RDB$INDICES </a:t>
+            </a:r>
+            <a:r>
+              <a:rPr lang="en-US" dirty="0" err="1"/>
+              <a:t>prestaje</a:t>
+            </a:r>
+            <a:r>
+              <a:rPr lang="en-US" dirty="0"/>
+              <a:t> da </a:t>
+            </a:r>
+            <a:r>
+              <a:rPr lang="en-US" dirty="0" err="1"/>
+              <a:t>odgovara</a:t>
+            </a:r>
+            <a:r>
+              <a:rPr lang="en-US" dirty="0"/>
+              <a:t> </a:t>
+            </a:r>
+            <a:r>
+              <a:rPr lang="en-US" dirty="0" err="1"/>
+              <a:t>stvarnom</a:t>
+            </a:r>
+            <a:r>
+              <a:rPr lang="en-US" dirty="0"/>
+              <a:t> </a:t>
+            </a:r>
+            <a:r>
+              <a:rPr lang="en-US" dirty="0" err="1"/>
+              <a:t>stanju</a:t>
+            </a:r>
+            <a:r>
+              <a:rPr lang="en-US" dirty="0"/>
+              <a:t> </a:t>
+            </a:r>
+            <a:r>
+              <a:rPr lang="en-US" dirty="0" err="1"/>
+              <a:t>podataka</a:t>
+            </a:r>
+            <a:r>
+              <a:rPr lang="en-US" dirty="0"/>
+              <a:t>.</a:t>
+            </a:r>
+            <a:r>
+              <a:rPr lang="sr-Latn-RS" dirty="0"/>
+              <a:t> </a:t>
+            </a:r>
+            <a:r>
+              <a:rPr lang="en-US" dirty="0" err="1"/>
+              <a:t>Posledica</a:t>
+            </a:r>
+            <a:r>
+              <a:rPr lang="en-US" dirty="0"/>
+              <a:t> je da optimizer </a:t>
+            </a:r>
+            <a:r>
+              <a:rPr lang="en-US" dirty="0" err="1"/>
+              <a:t>donosi</a:t>
+            </a:r>
+            <a:r>
+              <a:rPr lang="en-US" dirty="0"/>
+              <a:t> </a:t>
+            </a:r>
+            <a:r>
+              <a:rPr lang="en-US" dirty="0" err="1"/>
+              <a:t>pogrešne</a:t>
+            </a:r>
+            <a:r>
+              <a:rPr lang="en-US" dirty="0"/>
+              <a:t> </a:t>
+            </a:r>
+            <a:r>
+              <a:rPr lang="en-US" dirty="0" err="1"/>
+              <a:t>odluke</a:t>
+            </a:r>
+            <a:r>
+              <a:rPr lang="en-US" dirty="0"/>
+              <a:t> — </a:t>
+            </a:r>
+            <a:r>
+              <a:rPr lang="en-US" dirty="0" err="1"/>
+              <a:t>bira</a:t>
+            </a:r>
+            <a:r>
+              <a:rPr lang="en-US" dirty="0"/>
+              <a:t> Full Table Scan </a:t>
+            </a:r>
+            <a:r>
+              <a:rPr lang="en-US" dirty="0" err="1"/>
+              <a:t>tamo</a:t>
+            </a:r>
+            <a:r>
+              <a:rPr lang="en-US" dirty="0"/>
+              <a:t> </a:t>
+            </a:r>
+            <a:r>
+              <a:rPr lang="en-US" dirty="0" err="1"/>
+              <a:t>gde</a:t>
+            </a:r>
+            <a:r>
+              <a:rPr lang="en-US" dirty="0"/>
+              <a:t> bi Index Scan bio </a:t>
+            </a:r>
+            <a:r>
+              <a:rPr lang="en-US" dirty="0" err="1"/>
+              <a:t>brži</a:t>
+            </a:r>
+            <a:r>
+              <a:rPr lang="en-US" dirty="0"/>
+              <a:t>, </a:t>
+            </a:r>
+            <a:r>
+              <a:rPr lang="en-US" dirty="0" err="1"/>
+              <a:t>ili</a:t>
+            </a:r>
+            <a:r>
+              <a:rPr lang="en-US" dirty="0"/>
+              <a:t> </a:t>
+            </a:r>
+            <a:r>
+              <a:rPr lang="en-US" dirty="0" err="1"/>
+              <a:t>koristi</a:t>
+            </a:r>
+            <a:r>
+              <a:rPr lang="en-US" dirty="0"/>
+              <a:t> </a:t>
+            </a:r>
+            <a:r>
+              <a:rPr lang="en-US" dirty="0" err="1"/>
+              <a:t>loš</a:t>
+            </a:r>
+            <a:r>
+              <a:rPr lang="en-US" dirty="0"/>
+              <a:t> </a:t>
+            </a:r>
+            <a:r>
+              <a:rPr lang="en-US" dirty="0" err="1"/>
+              <a:t>indeks</a:t>
+            </a:r>
+            <a:r>
+              <a:rPr lang="en-US" dirty="0"/>
+              <a:t> </a:t>
+            </a:r>
+            <a:r>
+              <a:rPr lang="en-US" dirty="0" err="1"/>
+              <a:t>umesto</a:t>
+            </a:r>
+            <a:r>
+              <a:rPr lang="en-US" dirty="0"/>
+              <a:t> da ga </a:t>
+            </a:r>
+            <a:r>
+              <a:rPr lang="en-US" dirty="0" err="1"/>
+              <a:t>ignoriše</a:t>
+            </a:r>
+            <a:r>
+              <a:rPr lang="en-US" dirty="0"/>
+              <a:t>.</a:t>
+            </a:r>
+            <a:r>
+              <a:rPr lang="sr-Latn-RS" dirty="0"/>
+              <a:t> </a:t>
+            </a:r>
+            <a:r>
+              <a:rPr lang="en-US" dirty="0" err="1"/>
+              <a:t>Rešenje</a:t>
+            </a:r>
+            <a:r>
+              <a:rPr lang="en-US" dirty="0"/>
+              <a:t> je </a:t>
+            </a:r>
+            <a:r>
+              <a:rPr lang="en-US" dirty="0" err="1"/>
+              <a:t>redovno</a:t>
+            </a:r>
+            <a:r>
+              <a:rPr lang="en-US" dirty="0"/>
+              <a:t> </a:t>
+            </a:r>
+            <a:r>
+              <a:rPr lang="en-US" dirty="0" err="1"/>
+              <a:t>pokretanje</a:t>
+            </a:r>
+            <a:r>
+              <a:rPr lang="en-US" dirty="0"/>
+              <a:t> </a:t>
+            </a:r>
+            <a:r>
+              <a:rPr lang="en-US" dirty="0" err="1"/>
+              <a:t>komande</a:t>
+            </a:r>
+            <a:r>
+              <a:rPr lang="en-US" dirty="0"/>
+              <a:t> SET STATISTICS INDEX, </a:t>
+            </a:r>
+            <a:r>
+              <a:rPr lang="en-US" dirty="0" err="1"/>
+              <a:t>koja</a:t>
+            </a:r>
+            <a:r>
+              <a:rPr lang="en-US" dirty="0"/>
+              <a:t> </a:t>
+            </a:r>
+            <a:r>
+              <a:rPr lang="en-US" dirty="0" err="1"/>
+              <a:t>prolazi</a:t>
+            </a:r>
+            <a:r>
+              <a:rPr lang="en-US" dirty="0"/>
+              <a:t> </a:t>
+            </a:r>
+            <a:r>
+              <a:rPr lang="en-US" dirty="0" err="1"/>
+              <a:t>kroz</a:t>
+            </a:r>
+            <a:r>
+              <a:rPr lang="en-US" dirty="0"/>
+              <a:t> </a:t>
+            </a:r>
+            <a:r>
+              <a:rPr lang="en-US" dirty="0" err="1"/>
+              <a:t>celokupno</a:t>
+            </a:r>
+            <a:r>
+              <a:rPr lang="en-US" dirty="0"/>
+              <a:t> B+ </a:t>
+            </a:r>
+            <a:r>
+              <a:rPr lang="en-US" dirty="0" err="1"/>
+              <a:t>stablo</a:t>
+            </a:r>
+            <a:r>
+              <a:rPr lang="en-US" dirty="0"/>
+              <a:t>, </a:t>
+            </a:r>
+            <a:r>
+              <a:rPr lang="en-US" dirty="0" err="1"/>
+              <a:t>prebroji</a:t>
+            </a:r>
+            <a:r>
+              <a:rPr lang="en-US" dirty="0"/>
+              <a:t> </a:t>
+            </a:r>
+            <a:r>
+              <a:rPr lang="en-US" dirty="0" err="1"/>
+              <a:t>unikatne</a:t>
+            </a:r>
+            <a:r>
+              <a:rPr lang="en-US" dirty="0"/>
+              <a:t> </a:t>
+            </a:r>
+            <a:r>
+              <a:rPr lang="en-US" dirty="0" err="1"/>
+              <a:t>ključeve</a:t>
+            </a:r>
+            <a:r>
+              <a:rPr lang="en-US" dirty="0"/>
+              <a:t> </a:t>
+            </a:r>
+            <a:r>
+              <a:rPr lang="en-US" dirty="0" err="1"/>
+              <a:t>i</a:t>
+            </a:r>
+            <a:r>
+              <a:rPr lang="en-US" dirty="0"/>
+              <a:t> </a:t>
+            </a:r>
+            <a:r>
+              <a:rPr lang="en-US" dirty="0" err="1"/>
+              <a:t>upiše</a:t>
+            </a:r>
+            <a:r>
+              <a:rPr lang="en-US" dirty="0"/>
+              <a:t> </a:t>
+            </a:r>
+            <a:r>
+              <a:rPr lang="en-US" dirty="0" err="1"/>
+              <a:t>osveženu</a:t>
+            </a:r>
+            <a:r>
+              <a:rPr lang="en-US" dirty="0"/>
+              <a:t> </a:t>
+            </a:r>
+            <a:r>
+              <a:rPr lang="en-US" dirty="0" err="1"/>
+              <a:t>vrednost</a:t>
+            </a:r>
+            <a:r>
+              <a:rPr lang="en-US" dirty="0"/>
+              <a:t> </a:t>
+            </a:r>
+            <a:r>
+              <a:rPr lang="en-US" dirty="0" err="1"/>
+              <a:t>selektivnosti</a:t>
+            </a:r>
+            <a:r>
+              <a:rPr lang="en-US" dirty="0"/>
+              <a:t>. </a:t>
+            </a:r>
+          </a:p>
+          <a:p>
             <a:endParaRPr lang="en-US" dirty="0"/>
           </a:p>
         </p:txBody>
@@ -460,6 +1292,917 @@
           <a:bodyPr/>
           <a:lstStyle/>
           <a:p>
+            <a:r>
+              <a:rPr lang="en-US" dirty="0"/>
+              <a:t>Firebird optimizer </a:t>
+            </a:r>
+            <a:r>
+              <a:rPr lang="en-US" dirty="0" err="1"/>
+              <a:t>generiše</a:t>
+            </a:r>
+            <a:r>
+              <a:rPr lang="en-US" dirty="0"/>
+              <a:t> plan </a:t>
+            </a:r>
+            <a:r>
+              <a:rPr lang="en-US" dirty="0" err="1"/>
+              <a:t>izvršavanja</a:t>
+            </a:r>
+            <a:r>
+              <a:rPr lang="en-US" dirty="0"/>
+              <a:t> za </a:t>
+            </a:r>
+            <a:r>
+              <a:rPr lang="en-US" dirty="0" err="1"/>
+              <a:t>svaki</a:t>
+            </a:r>
+            <a:r>
+              <a:rPr lang="en-US" dirty="0"/>
+              <a:t> SQL </a:t>
+            </a:r>
+            <a:r>
+              <a:rPr lang="en-US" dirty="0" err="1"/>
+              <a:t>upit</a:t>
+            </a:r>
+            <a:r>
+              <a:rPr lang="en-US" dirty="0"/>
+              <a:t> — taj plan </a:t>
+            </a:r>
+            <a:r>
+              <a:rPr lang="en-US" dirty="0" err="1"/>
+              <a:t>nam</a:t>
+            </a:r>
+            <a:r>
+              <a:rPr lang="en-US" dirty="0"/>
+              <a:t> </a:t>
+            </a:r>
+            <a:r>
+              <a:rPr lang="en-US" dirty="0" err="1"/>
+              <a:t>tačno</a:t>
+            </a:r>
+            <a:r>
+              <a:rPr lang="en-US" dirty="0"/>
+              <a:t> </a:t>
+            </a:r>
+            <a:r>
+              <a:rPr lang="en-US" dirty="0" err="1"/>
+              <a:t>govori</a:t>
+            </a:r>
+            <a:r>
+              <a:rPr lang="en-US" dirty="0"/>
+              <a:t> </a:t>
+            </a:r>
+            <a:r>
+              <a:rPr lang="en-US" dirty="0" err="1"/>
+              <a:t>koju</a:t>
+            </a:r>
+            <a:r>
+              <a:rPr lang="en-US" dirty="0"/>
+              <a:t> </a:t>
+            </a:r>
+            <a:r>
+              <a:rPr lang="en-US" dirty="0" err="1"/>
+              <a:t>strategiju</a:t>
+            </a:r>
+            <a:r>
+              <a:rPr lang="en-US" dirty="0"/>
+              <a:t> </a:t>
+            </a:r>
+            <a:r>
+              <a:rPr lang="en-US" dirty="0" err="1"/>
+              <a:t>pristupa</a:t>
+            </a:r>
+            <a:r>
+              <a:rPr lang="en-US" dirty="0"/>
+              <a:t> </a:t>
+            </a:r>
+            <a:r>
+              <a:rPr lang="en-US" dirty="0" err="1"/>
+              <a:t>podacima</a:t>
+            </a:r>
+            <a:r>
+              <a:rPr lang="en-US" dirty="0"/>
+              <a:t> je optimizer </a:t>
+            </a:r>
+            <a:r>
+              <a:rPr lang="en-US" dirty="0" err="1"/>
+              <a:t>izabrao</a:t>
+            </a:r>
+            <a:r>
+              <a:rPr lang="en-US" dirty="0"/>
+              <a:t>.</a:t>
+            </a:r>
+          </a:p>
+          <a:p>
+            <a:r>
+              <a:rPr lang="en-US" b="1" dirty="0"/>
+              <a:t>Index Seek</a:t>
+            </a:r>
+            <a:r>
+              <a:rPr lang="en-US" dirty="0"/>
+              <a:t> je </a:t>
+            </a:r>
+            <a:r>
+              <a:rPr lang="en-US" dirty="0" err="1"/>
+              <a:t>najbrža</a:t>
+            </a:r>
+            <a:r>
+              <a:rPr lang="en-US" dirty="0"/>
+              <a:t> </a:t>
+            </a:r>
+            <a:r>
+              <a:rPr lang="en-US" dirty="0" err="1"/>
+              <a:t>strategija</a:t>
+            </a:r>
+            <a:r>
+              <a:rPr lang="en-US" dirty="0"/>
+              <a:t> — </a:t>
+            </a:r>
+            <a:r>
+              <a:rPr lang="en-US" dirty="0" err="1"/>
+              <a:t>koristi</a:t>
+            </a:r>
+            <a:r>
+              <a:rPr lang="en-US" dirty="0"/>
+              <a:t> se </a:t>
+            </a:r>
+            <a:r>
+              <a:rPr lang="en-US" dirty="0" err="1"/>
+              <a:t>kada</a:t>
+            </a:r>
+            <a:r>
+              <a:rPr lang="en-US" dirty="0"/>
+              <a:t> </a:t>
+            </a:r>
+            <a:r>
+              <a:rPr lang="en-US" dirty="0" err="1"/>
+              <a:t>upit</a:t>
+            </a:r>
+            <a:r>
+              <a:rPr lang="en-US" dirty="0"/>
+              <a:t> </a:t>
+            </a:r>
+            <a:r>
+              <a:rPr lang="en-US" dirty="0" err="1"/>
+              <a:t>traži</a:t>
+            </a:r>
+            <a:r>
+              <a:rPr lang="en-US" dirty="0"/>
+              <a:t> </a:t>
+            </a:r>
+            <a:r>
+              <a:rPr lang="en-US" dirty="0" err="1"/>
+              <a:t>konkretnu</a:t>
+            </a:r>
+            <a:r>
+              <a:rPr lang="en-US" dirty="0"/>
+              <a:t>, </a:t>
+            </a:r>
+            <a:r>
+              <a:rPr lang="en-US" dirty="0" err="1"/>
+              <a:t>unikatnu</a:t>
+            </a:r>
+            <a:r>
+              <a:rPr lang="en-US" dirty="0"/>
+              <a:t> </a:t>
+            </a:r>
+            <a:r>
+              <a:rPr lang="en-US" dirty="0" err="1"/>
+              <a:t>vrednost</a:t>
+            </a:r>
+            <a:r>
+              <a:rPr lang="en-US" dirty="0"/>
+              <a:t> </a:t>
+            </a:r>
+            <a:r>
+              <a:rPr lang="en-US" dirty="0" err="1"/>
+              <a:t>poput</a:t>
+            </a:r>
+            <a:r>
+              <a:rPr lang="en-US" dirty="0"/>
+              <a:t> </a:t>
+            </a:r>
+            <a:r>
+              <a:rPr lang="en-US" dirty="0" err="1"/>
+              <a:t>primarnog</a:t>
+            </a:r>
+            <a:r>
+              <a:rPr lang="en-US" dirty="0"/>
+              <a:t> </a:t>
+            </a:r>
+            <a:r>
+              <a:rPr lang="en-US" dirty="0" err="1"/>
+              <a:t>ključa</a:t>
+            </a:r>
+            <a:r>
+              <a:rPr lang="en-US" dirty="0"/>
+              <a:t>. Engine </a:t>
+            </a:r>
+            <a:r>
+              <a:rPr lang="en-US" dirty="0" err="1"/>
+              <a:t>vertikalno</a:t>
+            </a:r>
+            <a:r>
+              <a:rPr lang="en-US" dirty="0"/>
+              <a:t> </a:t>
+            </a:r>
+            <a:r>
+              <a:rPr lang="en-US" dirty="0" err="1"/>
+              <a:t>navigira</a:t>
+            </a:r>
+            <a:r>
+              <a:rPr lang="en-US" dirty="0"/>
+              <a:t> </a:t>
+            </a:r>
+            <a:r>
+              <a:rPr lang="en-US" dirty="0" err="1"/>
+              <a:t>kroz</a:t>
+            </a:r>
+            <a:r>
+              <a:rPr lang="en-US" dirty="0"/>
+              <a:t> B+ </a:t>
+            </a:r>
+            <a:r>
+              <a:rPr lang="en-US" dirty="0" err="1"/>
+              <a:t>stablo</a:t>
+            </a:r>
+            <a:r>
+              <a:rPr lang="en-US" dirty="0"/>
+              <a:t> od </a:t>
+            </a:r>
+            <a:r>
+              <a:rPr lang="en-US" dirty="0" err="1"/>
+              <a:t>korena</a:t>
+            </a:r>
+            <a:r>
+              <a:rPr lang="en-US" dirty="0"/>
+              <a:t> do </a:t>
+            </a:r>
+            <a:r>
+              <a:rPr lang="en-US" dirty="0" err="1"/>
+              <a:t>lista</a:t>
+            </a:r>
+            <a:r>
+              <a:rPr lang="en-US" dirty="0"/>
+              <a:t> </a:t>
+            </a:r>
+            <a:r>
+              <a:rPr lang="en-US" dirty="0" err="1"/>
+              <a:t>i</a:t>
+            </a:r>
+            <a:r>
+              <a:rPr lang="en-US" dirty="0"/>
+              <a:t> </a:t>
+            </a:r>
+            <a:r>
+              <a:rPr lang="en-US" dirty="0" err="1"/>
+              <a:t>direktno</a:t>
+            </a:r>
+            <a:r>
+              <a:rPr lang="en-US" dirty="0"/>
+              <a:t> </a:t>
+            </a:r>
+            <a:r>
+              <a:rPr lang="en-US" dirty="0" err="1"/>
+              <a:t>pristupa</a:t>
+            </a:r>
+            <a:r>
+              <a:rPr lang="en-US" dirty="0"/>
+              <a:t> </a:t>
+            </a:r>
+            <a:r>
+              <a:rPr lang="en-US" dirty="0" err="1"/>
+              <a:t>tačno</a:t>
+            </a:r>
+            <a:r>
+              <a:rPr lang="en-US" dirty="0"/>
+              <a:t> </a:t>
+            </a:r>
+            <a:r>
+              <a:rPr lang="en-US" dirty="0" err="1"/>
+              <a:t>jednom</a:t>
+            </a:r>
+            <a:r>
+              <a:rPr lang="en-US" dirty="0"/>
+              <a:t> </a:t>
+            </a:r>
+            <a:r>
+              <a:rPr lang="en-US" dirty="0" err="1"/>
+              <a:t>zapisu</a:t>
+            </a:r>
+            <a:r>
+              <a:rPr lang="en-US" dirty="0"/>
+              <a:t>, </a:t>
+            </a:r>
+            <a:r>
+              <a:rPr lang="en-US" dirty="0" err="1"/>
+              <a:t>sa</a:t>
+            </a:r>
+            <a:r>
+              <a:rPr lang="en-US" dirty="0"/>
+              <a:t> </a:t>
+            </a:r>
+            <a:r>
+              <a:rPr lang="en-US" dirty="0" err="1"/>
+              <a:t>logaritamskom</a:t>
+            </a:r>
+            <a:r>
+              <a:rPr lang="en-US" dirty="0"/>
+              <a:t> </a:t>
+            </a:r>
+            <a:r>
+              <a:rPr lang="en-US" dirty="0" err="1"/>
+              <a:t>brzinom</a:t>
+            </a:r>
+            <a:r>
+              <a:rPr lang="en-US" dirty="0"/>
+              <a:t> O(log n).</a:t>
+            </a:r>
+          </a:p>
+          <a:p>
+            <a:r>
+              <a:rPr lang="en-US" b="1" dirty="0"/>
+              <a:t>Index Scan</a:t>
+            </a:r>
+            <a:r>
+              <a:rPr lang="en-US" dirty="0"/>
+              <a:t> se </a:t>
+            </a:r>
+            <a:r>
+              <a:rPr lang="en-US" dirty="0" err="1"/>
+              <a:t>koristi</a:t>
+            </a:r>
+            <a:r>
+              <a:rPr lang="en-US" dirty="0"/>
+              <a:t> </a:t>
+            </a:r>
+            <a:r>
+              <a:rPr lang="en-US" dirty="0" err="1"/>
+              <a:t>kada</a:t>
+            </a:r>
+            <a:r>
+              <a:rPr lang="en-US" dirty="0"/>
+              <a:t> </a:t>
+            </a:r>
+            <a:r>
+              <a:rPr lang="en-US" dirty="0" err="1"/>
+              <a:t>upit</a:t>
+            </a:r>
+            <a:r>
+              <a:rPr lang="en-US" dirty="0"/>
+              <a:t> </a:t>
+            </a:r>
+            <a:r>
+              <a:rPr lang="en-US" dirty="0" err="1"/>
+              <a:t>traži</a:t>
+            </a:r>
+            <a:r>
+              <a:rPr lang="en-US" dirty="0"/>
+              <a:t> </a:t>
+            </a:r>
+            <a:r>
+              <a:rPr lang="en-US" dirty="0" err="1"/>
+              <a:t>opseg</a:t>
+            </a:r>
+            <a:r>
+              <a:rPr lang="en-US" dirty="0"/>
+              <a:t> </a:t>
+            </a:r>
+            <a:r>
+              <a:rPr lang="en-US" dirty="0" err="1"/>
+              <a:t>vrednosti</a:t>
+            </a:r>
+            <a:r>
+              <a:rPr lang="en-US" dirty="0"/>
+              <a:t> — engine </a:t>
+            </a:r>
+            <a:r>
+              <a:rPr lang="en-US" dirty="0" err="1"/>
+              <a:t>pronađe</a:t>
+            </a:r>
+            <a:r>
+              <a:rPr lang="en-US" dirty="0"/>
+              <a:t> </a:t>
+            </a:r>
+            <a:r>
+              <a:rPr lang="en-US" dirty="0" err="1"/>
+              <a:t>prvi</a:t>
+            </a:r>
+            <a:r>
+              <a:rPr lang="en-US" dirty="0"/>
+              <a:t> </a:t>
+            </a:r>
+            <a:r>
+              <a:rPr lang="en-US" dirty="0" err="1"/>
+              <a:t>ključ</a:t>
+            </a:r>
+            <a:r>
+              <a:rPr lang="en-US" dirty="0"/>
+              <a:t> u </a:t>
+            </a:r>
+            <a:r>
+              <a:rPr lang="en-US" dirty="0" err="1"/>
+              <a:t>opsegu</a:t>
+            </a:r>
+            <a:r>
+              <a:rPr lang="en-US" dirty="0"/>
+              <a:t>, a </a:t>
+            </a:r>
+            <a:r>
+              <a:rPr lang="en-US" dirty="0" err="1"/>
+              <a:t>zatim</a:t>
+            </a:r>
+            <a:r>
+              <a:rPr lang="en-US" dirty="0"/>
+              <a:t> </a:t>
+            </a:r>
+            <a:r>
+              <a:rPr lang="en-US" dirty="0" err="1"/>
+              <a:t>horizontalno</a:t>
+            </a:r>
+            <a:r>
+              <a:rPr lang="en-US" dirty="0"/>
+              <a:t> </a:t>
+            </a:r>
+            <a:r>
+              <a:rPr lang="en-US" dirty="0" err="1"/>
+              <a:t>čita</a:t>
+            </a:r>
+            <a:r>
+              <a:rPr lang="en-US" dirty="0"/>
+              <a:t> </a:t>
+            </a:r>
+            <a:r>
+              <a:rPr lang="en-US" dirty="0" err="1"/>
+              <a:t>susedne</a:t>
+            </a:r>
+            <a:r>
+              <a:rPr lang="en-US" dirty="0"/>
+              <a:t> </a:t>
+            </a:r>
+            <a:r>
+              <a:rPr lang="en-US" dirty="0" err="1"/>
+              <a:t>listove</a:t>
+            </a:r>
+            <a:r>
+              <a:rPr lang="en-US" dirty="0"/>
+              <a:t> B+ </a:t>
+            </a:r>
+            <a:r>
+              <a:rPr lang="en-US" dirty="0" err="1"/>
+              <a:t>stabla</a:t>
+            </a:r>
+            <a:r>
+              <a:rPr lang="en-US" dirty="0"/>
+              <a:t> </a:t>
+            </a:r>
+            <a:r>
+              <a:rPr lang="en-US" dirty="0" err="1"/>
+              <a:t>dok</a:t>
+            </a:r>
+            <a:r>
+              <a:rPr lang="en-US" dirty="0"/>
+              <a:t> ne </a:t>
+            </a:r>
+            <a:r>
+              <a:rPr lang="en-US" dirty="0" err="1"/>
+              <a:t>dođe</a:t>
+            </a:r>
+            <a:r>
+              <a:rPr lang="en-US" dirty="0"/>
+              <a:t> do </a:t>
+            </a:r>
+            <a:r>
+              <a:rPr lang="en-US" dirty="0" err="1"/>
+              <a:t>kraja</a:t>
+            </a:r>
+            <a:r>
+              <a:rPr lang="en-US" dirty="0"/>
+              <a:t> </a:t>
+            </a:r>
+            <a:r>
+              <a:rPr lang="en-US" dirty="0" err="1"/>
+              <a:t>opsega</a:t>
+            </a:r>
+            <a:r>
+              <a:rPr lang="en-US" dirty="0"/>
+              <a:t>, bez </a:t>
+            </a:r>
+            <a:r>
+              <a:rPr lang="en-US" dirty="0" err="1"/>
+              <a:t>ponovnog</a:t>
+            </a:r>
+            <a:r>
+              <a:rPr lang="en-US" dirty="0"/>
+              <a:t> </a:t>
+            </a:r>
+            <a:r>
+              <a:rPr lang="en-US" dirty="0" err="1"/>
+              <a:t>obilaska</a:t>
+            </a:r>
+            <a:r>
+              <a:rPr lang="en-US" dirty="0"/>
+              <a:t> od </a:t>
+            </a:r>
+            <a:r>
+              <a:rPr lang="en-US" dirty="0" err="1"/>
+              <a:t>korena</a:t>
+            </a:r>
+            <a:r>
+              <a:rPr lang="en-US" dirty="0"/>
+              <a:t>.</a:t>
+            </a:r>
+          </a:p>
+          <a:p>
+            <a:r>
+              <a:rPr lang="en-US" b="1" dirty="0"/>
+              <a:t>NATURAL</a:t>
+            </a:r>
+            <a:r>
+              <a:rPr lang="en-US" dirty="0"/>
+              <a:t> </a:t>
+            </a:r>
+            <a:r>
+              <a:rPr lang="en-US" dirty="0" err="1"/>
+              <a:t>znači</a:t>
+            </a:r>
+            <a:r>
+              <a:rPr lang="en-US" dirty="0"/>
+              <a:t> da optimizer </a:t>
+            </a:r>
+            <a:r>
+              <a:rPr lang="en-US" dirty="0" err="1"/>
+              <a:t>nije</a:t>
+            </a:r>
+            <a:r>
+              <a:rPr lang="en-US" dirty="0"/>
+              <a:t> </a:t>
+            </a:r>
+            <a:r>
+              <a:rPr lang="en-US" dirty="0" err="1"/>
+              <a:t>pronašao</a:t>
+            </a:r>
+            <a:r>
+              <a:rPr lang="en-US" dirty="0"/>
+              <a:t> </a:t>
+            </a:r>
+            <a:r>
+              <a:rPr lang="en-US" dirty="0" err="1"/>
+              <a:t>adekvatan</a:t>
+            </a:r>
+            <a:r>
+              <a:rPr lang="en-US" dirty="0"/>
+              <a:t> </a:t>
+            </a:r>
+            <a:r>
+              <a:rPr lang="en-US" dirty="0" err="1"/>
+              <a:t>indeks</a:t>
+            </a:r>
+            <a:r>
+              <a:rPr lang="en-US" dirty="0"/>
+              <a:t> </a:t>
+            </a:r>
+            <a:r>
+              <a:rPr lang="en-US" dirty="0" err="1"/>
+              <a:t>ili</a:t>
+            </a:r>
+            <a:r>
+              <a:rPr lang="en-US" dirty="0"/>
+              <a:t> je </a:t>
+            </a:r>
+            <a:r>
+              <a:rPr lang="en-US" dirty="0" err="1"/>
+              <a:t>selektivnost</a:t>
+            </a:r>
+            <a:r>
+              <a:rPr lang="en-US" dirty="0"/>
+              <a:t> </a:t>
+            </a:r>
+            <a:r>
+              <a:rPr lang="en-US" dirty="0" err="1"/>
+              <a:t>toliko</a:t>
+            </a:r>
+            <a:r>
+              <a:rPr lang="en-US" dirty="0"/>
+              <a:t> </a:t>
+            </a:r>
+            <a:r>
+              <a:rPr lang="en-US" dirty="0" err="1"/>
+              <a:t>loša</a:t>
+            </a:r>
+            <a:r>
+              <a:rPr lang="en-US" dirty="0"/>
+              <a:t> da je </a:t>
+            </a:r>
+            <a:r>
+              <a:rPr lang="en-US" dirty="0" err="1"/>
+              <a:t>procenio</a:t>
+            </a:r>
+            <a:r>
+              <a:rPr lang="en-US" dirty="0"/>
+              <a:t> </a:t>
+            </a:r>
+            <a:r>
+              <a:rPr lang="en-US" dirty="0" err="1"/>
+              <a:t>kako</a:t>
+            </a:r>
+            <a:r>
+              <a:rPr lang="en-US" dirty="0"/>
+              <a:t> je </a:t>
+            </a:r>
+            <a:r>
+              <a:rPr lang="en-US" dirty="0" err="1"/>
+              <a:t>brže</a:t>
+            </a:r>
+            <a:r>
+              <a:rPr lang="en-US" dirty="0"/>
+              <a:t> </a:t>
+            </a:r>
+            <a:r>
+              <a:rPr lang="en-US" dirty="0" err="1"/>
+              <a:t>čitati</a:t>
+            </a:r>
+            <a:r>
+              <a:rPr lang="en-US" dirty="0"/>
+              <a:t> </a:t>
+            </a:r>
+            <a:r>
+              <a:rPr lang="en-US" dirty="0" err="1"/>
+              <a:t>celu</a:t>
+            </a:r>
+            <a:r>
+              <a:rPr lang="en-US" dirty="0"/>
+              <a:t> </a:t>
+            </a:r>
+            <a:r>
+              <a:rPr lang="en-US" dirty="0" err="1"/>
+              <a:t>tabelu</a:t>
+            </a:r>
+            <a:r>
+              <a:rPr lang="en-US" dirty="0"/>
+              <a:t> — engine </a:t>
+            </a:r>
+            <a:r>
+              <a:rPr lang="en-US" dirty="0" err="1"/>
+              <a:t>učitava</a:t>
+            </a:r>
+            <a:r>
+              <a:rPr lang="en-US" dirty="0"/>
+              <a:t> </a:t>
+            </a:r>
+            <a:r>
+              <a:rPr lang="en-US" dirty="0" err="1"/>
+              <a:t>svaku</a:t>
+            </a:r>
+            <a:r>
+              <a:rPr lang="en-US" dirty="0"/>
+              <a:t> </a:t>
+            </a:r>
+            <a:r>
+              <a:rPr lang="en-US" dirty="0" err="1"/>
+              <a:t>stranicu</a:t>
+            </a:r>
+            <a:r>
+              <a:rPr lang="en-US" dirty="0"/>
+              <a:t> </a:t>
+            </a:r>
+            <a:r>
+              <a:rPr lang="en-US" dirty="0" err="1"/>
+              <a:t>tabele</a:t>
+            </a:r>
+            <a:r>
+              <a:rPr lang="en-US" dirty="0"/>
+              <a:t> </a:t>
+            </a:r>
+            <a:r>
+              <a:rPr lang="en-US" dirty="0" err="1"/>
+              <a:t>redom</a:t>
+            </a:r>
+            <a:r>
+              <a:rPr lang="en-US" dirty="0"/>
+              <a:t> </a:t>
+            </a:r>
+            <a:r>
+              <a:rPr lang="en-US" dirty="0" err="1"/>
+              <a:t>i</a:t>
+            </a:r>
+            <a:r>
+              <a:rPr lang="en-US" dirty="0"/>
+              <a:t> </a:t>
+            </a:r>
+            <a:r>
+              <a:rPr lang="en-US" dirty="0" err="1"/>
+              <a:t>proverava</a:t>
+            </a:r>
+            <a:r>
+              <a:rPr lang="en-US" dirty="0"/>
+              <a:t> </a:t>
+            </a:r>
+            <a:r>
+              <a:rPr lang="en-US" dirty="0" err="1"/>
+              <a:t>svaki</a:t>
+            </a:r>
+            <a:r>
+              <a:rPr lang="en-US" dirty="0"/>
+              <a:t> red, </a:t>
+            </a:r>
+            <a:r>
+              <a:rPr lang="en-US" dirty="0" err="1"/>
+              <a:t>što</a:t>
+            </a:r>
+            <a:r>
+              <a:rPr lang="en-US" dirty="0"/>
+              <a:t> je </a:t>
+            </a:r>
+            <a:r>
+              <a:rPr lang="en-US" dirty="0" err="1"/>
+              <a:t>linearna</a:t>
+            </a:r>
+            <a:r>
+              <a:rPr lang="en-US" dirty="0"/>
+              <a:t> </a:t>
+            </a:r>
+            <a:r>
+              <a:rPr lang="en-US" dirty="0" err="1"/>
+              <a:t>složenost</a:t>
+            </a:r>
+            <a:r>
+              <a:rPr lang="en-US" dirty="0"/>
+              <a:t> O(n).</a:t>
+            </a:r>
+          </a:p>
+          <a:p>
+            <a:r>
+              <a:rPr lang="en-US" dirty="0"/>
+              <a:t>Na </a:t>
+            </a:r>
+            <a:r>
+              <a:rPr lang="en-US" dirty="0" err="1"/>
+              <a:t>malim</a:t>
+            </a:r>
+            <a:r>
+              <a:rPr lang="en-US" dirty="0"/>
+              <a:t> </a:t>
+            </a:r>
+            <a:r>
+              <a:rPr lang="en-US" dirty="0" err="1"/>
+              <a:t>tabelama</a:t>
+            </a:r>
+            <a:r>
+              <a:rPr lang="en-US" dirty="0"/>
+              <a:t> NATURAL </a:t>
+            </a:r>
+            <a:r>
+              <a:rPr lang="en-US" dirty="0" err="1"/>
+              <a:t>nije</a:t>
+            </a:r>
+            <a:r>
+              <a:rPr lang="en-US" dirty="0"/>
+              <a:t> problem, </a:t>
+            </a:r>
+            <a:r>
+              <a:rPr lang="en-US" dirty="0" err="1"/>
+              <a:t>ali</a:t>
+            </a:r>
+            <a:r>
+              <a:rPr lang="en-US" dirty="0"/>
+              <a:t> </a:t>
+            </a:r>
+            <a:r>
+              <a:rPr lang="en-US" dirty="0" err="1"/>
+              <a:t>na</a:t>
+            </a:r>
+            <a:r>
+              <a:rPr lang="en-US" dirty="0"/>
+              <a:t> </a:t>
+            </a:r>
+            <a:r>
+              <a:rPr lang="en-US" dirty="0" err="1"/>
+              <a:t>tabelama</a:t>
+            </a:r>
+            <a:r>
+              <a:rPr lang="en-US" dirty="0"/>
+              <a:t> </a:t>
+            </a:r>
+            <a:r>
+              <a:rPr lang="en-US" dirty="0" err="1"/>
+              <a:t>sa</a:t>
+            </a:r>
+            <a:r>
+              <a:rPr lang="en-US" dirty="0"/>
+              <a:t> </a:t>
+            </a:r>
+            <a:r>
+              <a:rPr lang="en-US" dirty="0" err="1"/>
+              <a:t>milionima</a:t>
+            </a:r>
+            <a:r>
+              <a:rPr lang="en-US" dirty="0"/>
+              <a:t> </a:t>
+            </a:r>
+            <a:r>
+              <a:rPr lang="en-US" dirty="0" err="1"/>
+              <a:t>redova</a:t>
+            </a:r>
+            <a:r>
+              <a:rPr lang="en-US" dirty="0"/>
+              <a:t> </a:t>
+            </a:r>
+            <a:r>
+              <a:rPr lang="en-US" dirty="0" err="1"/>
+              <a:t>predstavlja</a:t>
+            </a:r>
+            <a:r>
+              <a:rPr lang="en-US" dirty="0"/>
+              <a:t> </a:t>
+            </a:r>
+            <a:r>
+              <a:rPr lang="en-US" dirty="0" err="1"/>
+              <a:t>glavni</a:t>
+            </a:r>
+            <a:r>
+              <a:rPr lang="en-US" dirty="0"/>
+              <a:t> </a:t>
+            </a:r>
+            <a:r>
+              <a:rPr lang="en-US" dirty="0" err="1"/>
+              <a:t>uzrok</a:t>
+            </a:r>
+            <a:r>
+              <a:rPr lang="en-US" dirty="0"/>
+              <a:t> </a:t>
+            </a:r>
+            <a:r>
+              <a:rPr lang="en-US" dirty="0" err="1"/>
+              <a:t>zagušenja</a:t>
+            </a:r>
+            <a:r>
+              <a:rPr lang="en-US" dirty="0"/>
+              <a:t> </a:t>
+            </a:r>
+            <a:r>
+              <a:rPr lang="en-US" dirty="0" err="1"/>
+              <a:t>sistema</a:t>
+            </a:r>
+            <a:r>
+              <a:rPr lang="en-US" dirty="0"/>
+              <a:t> — </a:t>
+            </a:r>
+            <a:r>
+              <a:rPr lang="en-US" dirty="0" err="1"/>
+              <a:t>svaki</a:t>
+            </a:r>
+            <a:r>
+              <a:rPr lang="en-US" dirty="0"/>
+              <a:t> red se </a:t>
+            </a:r>
+            <a:r>
+              <a:rPr lang="en-US" dirty="0" err="1"/>
+              <a:t>proverava</a:t>
+            </a:r>
+            <a:r>
+              <a:rPr lang="en-US" dirty="0"/>
+              <a:t> bez </a:t>
+            </a:r>
+            <a:r>
+              <a:rPr lang="en-US" dirty="0" err="1"/>
+              <a:t>obzira</a:t>
+            </a:r>
+            <a:r>
+              <a:rPr lang="en-US" dirty="0"/>
+              <a:t> </a:t>
+            </a:r>
+            <a:r>
+              <a:rPr lang="en-US" dirty="0" err="1"/>
+              <a:t>na</a:t>
+            </a:r>
+            <a:r>
+              <a:rPr lang="en-US" dirty="0"/>
+              <a:t> to da li </a:t>
+            </a:r>
+            <a:r>
+              <a:rPr lang="en-US" dirty="0" err="1"/>
+              <a:t>zadovoljava</a:t>
+            </a:r>
+            <a:r>
+              <a:rPr lang="en-US" dirty="0"/>
+              <a:t> </a:t>
+            </a:r>
+            <a:r>
+              <a:rPr lang="en-US" dirty="0" err="1"/>
+              <a:t>uslov</a:t>
+            </a:r>
+            <a:r>
+              <a:rPr lang="en-US" dirty="0"/>
+              <a:t> </a:t>
+            </a:r>
+            <a:r>
+              <a:rPr lang="en-US" dirty="0" err="1"/>
+              <a:t>upita</a:t>
+            </a:r>
+            <a:endParaRPr lang="en-US" dirty="0"/>
+          </a:p>
+          <a:p>
             <a:endParaRPr lang="en-US" dirty="0"/>
           </a:p>
         </p:txBody>
@@ -544,6 +2287,880 @@
           <a:bodyPr/>
           <a:lstStyle/>
           <a:p>
+            <a:r>
+              <a:rPr lang="en-US" dirty="0"/>
+              <a:t>Firebird </a:t>
+            </a:r>
+            <a:r>
+              <a:rPr lang="en-US" dirty="0" err="1"/>
+              <a:t>indeksi</a:t>
+            </a:r>
+            <a:r>
+              <a:rPr lang="en-US" dirty="0"/>
+              <a:t> </a:t>
+            </a:r>
+            <a:r>
+              <a:rPr lang="en-US" dirty="0" err="1"/>
+              <a:t>su</a:t>
+            </a:r>
+            <a:r>
+              <a:rPr lang="en-US" dirty="0"/>
+              <a:t> </a:t>
+            </a:r>
+            <a:r>
+              <a:rPr lang="en-US" dirty="0" err="1"/>
+              <a:t>implementirani</a:t>
+            </a:r>
+            <a:r>
+              <a:rPr lang="en-US" dirty="0"/>
+              <a:t> </a:t>
+            </a:r>
+            <a:r>
+              <a:rPr lang="en-US" dirty="0" err="1"/>
+              <a:t>kao</a:t>
+            </a:r>
+            <a:r>
+              <a:rPr lang="en-US" dirty="0"/>
+              <a:t> B+ </a:t>
+            </a:r>
+            <a:r>
+              <a:rPr lang="en-US" dirty="0" err="1"/>
+              <a:t>stabla</a:t>
+            </a:r>
+            <a:r>
+              <a:rPr lang="en-US" dirty="0"/>
+              <a:t> </a:t>
+            </a:r>
+            <a:r>
+              <a:rPr lang="en-US" dirty="0" err="1"/>
+              <a:t>čija</a:t>
+            </a:r>
+            <a:r>
+              <a:rPr lang="en-US" dirty="0"/>
+              <a:t> </a:t>
+            </a:r>
+            <a:r>
+              <a:rPr lang="en-US" dirty="0" err="1"/>
+              <a:t>dubina</a:t>
+            </a:r>
+            <a:r>
+              <a:rPr lang="en-US" dirty="0"/>
+              <a:t> </a:t>
+            </a:r>
+            <a:r>
+              <a:rPr lang="en-US" dirty="0" err="1"/>
+              <a:t>direktno</a:t>
+            </a:r>
+            <a:r>
+              <a:rPr lang="en-US" dirty="0"/>
+              <a:t> </a:t>
+            </a:r>
+            <a:r>
+              <a:rPr lang="en-US" dirty="0" err="1"/>
+              <a:t>određuje</a:t>
+            </a:r>
+            <a:r>
+              <a:rPr lang="en-US" dirty="0"/>
+              <a:t> </a:t>
+            </a:r>
+            <a:r>
+              <a:rPr lang="en-US" dirty="0" err="1"/>
+              <a:t>broj</a:t>
+            </a:r>
+            <a:r>
+              <a:rPr lang="en-US" dirty="0"/>
+              <a:t> I/O </a:t>
+            </a:r>
+            <a:r>
+              <a:rPr lang="en-US" dirty="0" err="1"/>
+              <a:t>operacija</a:t>
+            </a:r>
+            <a:r>
+              <a:rPr lang="en-US" dirty="0"/>
+              <a:t> — </a:t>
+            </a:r>
+            <a:r>
+              <a:rPr lang="en-US" dirty="0" err="1"/>
+              <a:t>što</a:t>
+            </a:r>
+            <a:r>
+              <a:rPr lang="en-US" dirty="0"/>
+              <a:t> je </a:t>
+            </a:r>
+            <a:r>
+              <a:rPr lang="en-US" dirty="0" err="1"/>
+              <a:t>stablo</a:t>
+            </a:r>
+            <a:r>
+              <a:rPr lang="en-US" dirty="0"/>
+              <a:t> </a:t>
+            </a:r>
+            <a:r>
+              <a:rPr lang="en-US" dirty="0" err="1"/>
+              <a:t>pliće</a:t>
+            </a:r>
+            <a:r>
+              <a:rPr lang="en-US" dirty="0"/>
+              <a:t>, to je </a:t>
+            </a:r>
+            <a:r>
+              <a:rPr lang="en-US" dirty="0" err="1"/>
+              <a:t>pretraga</a:t>
+            </a:r>
+            <a:r>
+              <a:rPr lang="en-US" dirty="0"/>
+              <a:t> </a:t>
+            </a:r>
+            <a:r>
+              <a:rPr lang="en-US" dirty="0" err="1"/>
+              <a:t>brža</a:t>
+            </a:r>
+            <a:r>
+              <a:rPr lang="en-US" dirty="0"/>
+              <a:t>, bez </a:t>
+            </a:r>
+            <a:r>
+              <a:rPr lang="en-US" dirty="0" err="1"/>
+              <a:t>obzira</a:t>
+            </a:r>
+            <a:r>
+              <a:rPr lang="en-US" dirty="0"/>
+              <a:t> </a:t>
+            </a:r>
+            <a:r>
+              <a:rPr lang="en-US" dirty="0" err="1"/>
+              <a:t>na</a:t>
+            </a:r>
+            <a:r>
+              <a:rPr lang="en-US" dirty="0"/>
+              <a:t> </a:t>
+            </a:r>
+            <a:r>
+              <a:rPr lang="en-US" dirty="0" err="1"/>
+              <a:t>veličinu</a:t>
+            </a:r>
+            <a:r>
+              <a:rPr lang="en-US" dirty="0"/>
+              <a:t> </a:t>
+            </a:r>
+            <a:r>
+              <a:rPr lang="en-US" dirty="0" err="1"/>
+              <a:t>tabele</a:t>
+            </a:r>
+            <a:r>
+              <a:rPr lang="en-US" dirty="0"/>
+              <a:t>.</a:t>
+            </a:r>
+          </a:p>
+          <a:p>
+            <a:r>
+              <a:rPr lang="en-US" dirty="0"/>
+              <a:t>MGA </a:t>
+            </a:r>
+            <a:r>
+              <a:rPr lang="en-US" dirty="0" err="1"/>
+              <a:t>arhitektura</a:t>
+            </a:r>
+            <a:r>
+              <a:rPr lang="en-US" dirty="0"/>
+              <a:t>, </a:t>
+            </a:r>
+            <a:r>
+              <a:rPr lang="en-US" dirty="0" err="1"/>
+              <a:t>iako</a:t>
+            </a:r>
+            <a:r>
+              <a:rPr lang="en-US" dirty="0"/>
+              <a:t> </a:t>
+            </a:r>
+            <a:r>
+              <a:rPr lang="en-US" dirty="0" err="1"/>
+              <a:t>omogućava</a:t>
+            </a:r>
+            <a:r>
+              <a:rPr lang="en-US" dirty="0"/>
+              <a:t> </a:t>
+            </a:r>
+            <a:r>
+              <a:rPr lang="en-US" dirty="0" err="1"/>
+              <a:t>istovremeni</a:t>
+            </a:r>
+            <a:r>
+              <a:rPr lang="en-US" dirty="0"/>
+              <a:t> rad </a:t>
+            </a:r>
+            <a:r>
+              <a:rPr lang="en-US" dirty="0" err="1"/>
+              <a:t>više</a:t>
+            </a:r>
+            <a:r>
+              <a:rPr lang="en-US" dirty="0"/>
+              <a:t> </a:t>
+            </a:r>
+            <a:r>
+              <a:rPr lang="en-US" dirty="0" err="1"/>
+              <a:t>korisnika</a:t>
+            </a:r>
+            <a:r>
+              <a:rPr lang="en-US" dirty="0"/>
+              <a:t> bez </a:t>
+            </a:r>
+            <a:r>
+              <a:rPr lang="en-US" dirty="0" err="1"/>
+              <a:t>zaključavanja</a:t>
+            </a:r>
+            <a:r>
+              <a:rPr lang="en-US" dirty="0"/>
+              <a:t>, </a:t>
+            </a:r>
+            <a:r>
+              <a:rPr lang="en-US" dirty="0" err="1"/>
+              <a:t>ima</a:t>
+            </a:r>
+            <a:r>
+              <a:rPr lang="en-US" dirty="0"/>
+              <a:t> </a:t>
+            </a:r>
+            <a:r>
+              <a:rPr lang="en-US" dirty="0" err="1"/>
+              <a:t>svoju</a:t>
+            </a:r>
+            <a:r>
+              <a:rPr lang="en-US" dirty="0"/>
+              <a:t> </a:t>
+            </a:r>
+            <a:r>
+              <a:rPr lang="en-US" dirty="0" err="1"/>
+              <a:t>cenu</a:t>
+            </a:r>
+            <a:r>
+              <a:rPr lang="en-US" dirty="0"/>
+              <a:t> — </a:t>
+            </a:r>
+            <a:r>
+              <a:rPr lang="en-US" dirty="0" err="1"/>
+              <a:t>svaki</a:t>
+            </a:r>
+            <a:r>
+              <a:rPr lang="en-US" dirty="0"/>
+              <a:t> UPDATE </a:t>
+            </a:r>
+            <a:r>
+              <a:rPr lang="en-US" dirty="0" err="1"/>
+              <a:t>kreira</a:t>
+            </a:r>
+            <a:r>
+              <a:rPr lang="en-US" dirty="0"/>
+              <a:t> </a:t>
+            </a:r>
+            <a:r>
+              <a:rPr lang="en-US" dirty="0" err="1"/>
+              <a:t>novu</a:t>
+            </a:r>
+            <a:r>
+              <a:rPr lang="en-US" dirty="0"/>
+              <a:t> </a:t>
+            </a:r>
+            <a:r>
+              <a:rPr lang="en-US" dirty="0" err="1"/>
+              <a:t>verziju</a:t>
+            </a:r>
+            <a:r>
+              <a:rPr lang="en-US" dirty="0"/>
+              <a:t> </a:t>
+            </a:r>
+            <a:r>
+              <a:rPr lang="en-US" dirty="0" err="1"/>
+              <a:t>zapisa</a:t>
+            </a:r>
+            <a:r>
+              <a:rPr lang="en-US" dirty="0"/>
+              <a:t>, </a:t>
+            </a:r>
+            <a:r>
+              <a:rPr lang="en-US" dirty="0" err="1"/>
+              <a:t>što</a:t>
+            </a:r>
+            <a:r>
+              <a:rPr lang="en-US" dirty="0"/>
+              <a:t> </a:t>
+            </a:r>
+            <a:r>
+              <a:rPr lang="en-US" dirty="0" err="1"/>
+              <a:t>tokom</a:t>
+            </a:r>
+            <a:r>
+              <a:rPr lang="en-US" dirty="0"/>
+              <a:t> </a:t>
+            </a:r>
+            <a:r>
+              <a:rPr lang="en-US" dirty="0" err="1"/>
+              <a:t>vremena</a:t>
+            </a:r>
+            <a:r>
+              <a:rPr lang="en-US" dirty="0"/>
+              <a:t> </a:t>
+            </a:r>
+            <a:r>
+              <a:rPr lang="en-US" dirty="0" err="1"/>
+              <a:t>dovodi</a:t>
+            </a:r>
+            <a:r>
+              <a:rPr lang="en-US" dirty="0"/>
+              <a:t> do Index Bloat-a </a:t>
+            </a:r>
+            <a:r>
+              <a:rPr lang="en-US" dirty="0" err="1"/>
+              <a:t>i</a:t>
+            </a:r>
+            <a:r>
+              <a:rPr lang="en-US" dirty="0"/>
+              <a:t> </a:t>
+            </a:r>
+            <a:r>
+              <a:rPr lang="en-US" dirty="0" err="1"/>
+              <a:t>degradacije</a:t>
+            </a:r>
+            <a:r>
+              <a:rPr lang="en-US" dirty="0"/>
+              <a:t> </a:t>
+            </a:r>
+            <a:r>
+              <a:rPr lang="en-US" dirty="0" err="1"/>
+              <a:t>performansi</a:t>
+            </a:r>
+            <a:r>
+              <a:rPr lang="en-US" dirty="0"/>
+              <a:t>.</a:t>
+            </a:r>
+          </a:p>
+          <a:p>
+            <a:r>
+              <a:rPr lang="en-US" dirty="0"/>
+              <a:t>Garbage Collector </a:t>
+            </a:r>
+            <a:r>
+              <a:rPr lang="en-US" dirty="0" err="1"/>
+              <a:t>čisti</a:t>
+            </a:r>
+            <a:r>
+              <a:rPr lang="en-US" dirty="0"/>
+              <a:t> </a:t>
+            </a:r>
+            <a:r>
+              <a:rPr lang="en-US" dirty="0" err="1"/>
+              <a:t>zastarele</a:t>
+            </a:r>
+            <a:r>
+              <a:rPr lang="en-US" dirty="0"/>
+              <a:t> </a:t>
+            </a:r>
+            <a:r>
+              <a:rPr lang="en-US" dirty="0" err="1"/>
+              <a:t>verzije</a:t>
+            </a:r>
+            <a:r>
+              <a:rPr lang="en-US" dirty="0"/>
+              <a:t>, </a:t>
+            </a:r>
+            <a:r>
+              <a:rPr lang="en-US" dirty="0" err="1"/>
+              <a:t>ali</a:t>
+            </a:r>
+            <a:r>
+              <a:rPr lang="en-US" dirty="0"/>
+              <a:t> ga </a:t>
+            </a:r>
+            <a:r>
+              <a:rPr lang="en-US" dirty="0" err="1"/>
+              <a:t>blokira</a:t>
+            </a:r>
+            <a:r>
+              <a:rPr lang="en-US" dirty="0"/>
+              <a:t> OAT (Oldest Active Transaction) — </a:t>
+            </a:r>
+            <a:r>
+              <a:rPr lang="en-US" dirty="0" err="1"/>
+              <a:t>dugačke</a:t>
+            </a:r>
+            <a:r>
+              <a:rPr lang="en-US" dirty="0"/>
+              <a:t> </a:t>
+            </a:r>
+            <a:r>
+              <a:rPr lang="en-US" dirty="0" err="1"/>
+              <a:t>otvorene</a:t>
+            </a:r>
+            <a:r>
+              <a:rPr lang="en-US" dirty="0"/>
+              <a:t> </a:t>
+            </a:r>
+            <a:r>
+              <a:rPr lang="en-US" dirty="0" err="1"/>
+              <a:t>transakcije</a:t>
+            </a:r>
+            <a:r>
+              <a:rPr lang="en-US" dirty="0"/>
+              <a:t> </a:t>
+            </a:r>
+            <a:r>
+              <a:rPr lang="en-US" dirty="0" err="1"/>
+              <a:t>su</a:t>
+            </a:r>
+            <a:r>
+              <a:rPr lang="en-US" dirty="0"/>
+              <a:t> </a:t>
+            </a:r>
+            <a:r>
+              <a:rPr lang="en-US" dirty="0" err="1"/>
+              <a:t>najveći</a:t>
+            </a:r>
+            <a:r>
+              <a:rPr lang="en-US" dirty="0"/>
+              <a:t> </a:t>
+            </a:r>
+            <a:r>
+              <a:rPr lang="en-US" dirty="0" err="1"/>
+              <a:t>neprijatelj</a:t>
+            </a:r>
+            <a:r>
+              <a:rPr lang="en-US" dirty="0"/>
+              <a:t> </a:t>
+            </a:r>
+            <a:r>
+              <a:rPr lang="en-US" dirty="0" err="1"/>
+              <a:t>performansi</a:t>
+            </a:r>
+            <a:r>
+              <a:rPr lang="en-US" dirty="0"/>
+              <a:t> </a:t>
+            </a:r>
+            <a:r>
+              <a:rPr lang="en-US" dirty="0" err="1"/>
+              <a:t>jer</a:t>
+            </a:r>
+            <a:r>
+              <a:rPr lang="en-US" dirty="0"/>
+              <a:t> </a:t>
+            </a:r>
+            <a:r>
+              <a:rPr lang="en-US" dirty="0" err="1"/>
+              <a:t>sprečavaju</a:t>
+            </a:r>
+            <a:r>
+              <a:rPr lang="en-US" dirty="0"/>
+              <a:t> </a:t>
+            </a:r>
+            <a:r>
+              <a:rPr lang="en-US" dirty="0" err="1"/>
+              <a:t>čišćenje</a:t>
+            </a:r>
+            <a:r>
+              <a:rPr lang="en-US" dirty="0"/>
+              <a:t> </a:t>
+            </a:r>
+            <a:r>
+              <a:rPr lang="en-US" dirty="0" err="1"/>
+              <a:t>i</a:t>
+            </a:r>
+            <a:r>
+              <a:rPr lang="en-US" dirty="0"/>
+              <a:t> </a:t>
+            </a:r>
+            <a:r>
+              <a:rPr lang="en-US" dirty="0" err="1"/>
+              <a:t>dozvoljavaju</a:t>
+            </a:r>
+            <a:r>
+              <a:rPr lang="en-US" dirty="0"/>
+              <a:t> </a:t>
+            </a:r>
+            <a:r>
+              <a:rPr lang="en-US" dirty="0" err="1"/>
+              <a:t>nekontrolisano</a:t>
+            </a:r>
+            <a:r>
+              <a:rPr lang="en-US" dirty="0"/>
+              <a:t> </a:t>
+            </a:r>
+            <a:r>
+              <a:rPr lang="en-US" dirty="0" err="1"/>
+              <a:t>rast</a:t>
+            </a:r>
+            <a:r>
+              <a:rPr lang="en-US" dirty="0"/>
+              <a:t> </a:t>
+            </a:r>
+            <a:r>
+              <a:rPr lang="en-US" dirty="0" err="1"/>
+              <a:t>lanca</a:t>
+            </a:r>
+            <a:r>
+              <a:rPr lang="en-US" dirty="0"/>
+              <a:t> </a:t>
+            </a:r>
+            <a:r>
+              <a:rPr lang="en-US" dirty="0" err="1"/>
+              <a:t>verzija</a:t>
+            </a:r>
+            <a:r>
+              <a:rPr lang="en-US" dirty="0"/>
+              <a:t>.</a:t>
+            </a:r>
+          </a:p>
+          <a:p>
+            <a:r>
+              <a:rPr lang="en-US" dirty="0" err="1"/>
+              <a:t>Selektivnost</a:t>
+            </a:r>
+            <a:r>
+              <a:rPr lang="en-US" dirty="0"/>
+              <a:t> je </a:t>
+            </a:r>
+            <a:r>
+              <a:rPr lang="en-US" dirty="0" err="1"/>
+              <a:t>parametar</a:t>
+            </a:r>
+            <a:r>
+              <a:rPr lang="en-US" dirty="0"/>
+              <a:t> koji optimizer </a:t>
+            </a:r>
+            <a:r>
+              <a:rPr lang="en-US" dirty="0" err="1"/>
+              <a:t>koristi</a:t>
+            </a:r>
+            <a:r>
+              <a:rPr lang="en-US" dirty="0"/>
+              <a:t> za </a:t>
+            </a:r>
+            <a:r>
+              <a:rPr lang="en-US" dirty="0" err="1"/>
+              <a:t>donošenje</a:t>
+            </a:r>
+            <a:r>
+              <a:rPr lang="en-US" dirty="0"/>
+              <a:t> </a:t>
+            </a:r>
+            <a:r>
+              <a:rPr lang="en-US" dirty="0" err="1"/>
+              <a:t>odluka</a:t>
+            </a:r>
+            <a:r>
+              <a:rPr lang="en-US" dirty="0"/>
+              <a:t>, </a:t>
+            </a:r>
+            <a:r>
+              <a:rPr lang="en-US" dirty="0" err="1"/>
+              <a:t>ali</a:t>
+            </a:r>
+            <a:r>
+              <a:rPr lang="en-US" dirty="0"/>
+              <a:t> </a:t>
+            </a:r>
+            <a:r>
+              <a:rPr lang="en-US" dirty="0" err="1"/>
+              <a:t>kako</a:t>
+            </a:r>
+            <a:r>
+              <a:rPr lang="en-US" dirty="0"/>
+              <a:t> se ne </a:t>
+            </a:r>
+            <a:r>
+              <a:rPr lang="en-US" dirty="0" err="1"/>
+              <a:t>ažurira</a:t>
+            </a:r>
+            <a:r>
+              <a:rPr lang="en-US" dirty="0"/>
+              <a:t> </a:t>
+            </a:r>
+            <a:r>
+              <a:rPr lang="en-US" dirty="0" err="1"/>
+              <a:t>automatski</a:t>
+            </a:r>
+            <a:r>
+              <a:rPr lang="en-US" dirty="0"/>
+              <a:t>, </a:t>
+            </a:r>
+            <a:r>
+              <a:rPr lang="en-US" dirty="0" err="1"/>
+              <a:t>zastarela</a:t>
+            </a:r>
+            <a:r>
+              <a:rPr lang="en-US" dirty="0"/>
+              <a:t> </a:t>
+            </a:r>
+            <a:r>
+              <a:rPr lang="en-US" dirty="0" err="1"/>
+              <a:t>statistika</a:t>
+            </a:r>
+            <a:r>
+              <a:rPr lang="en-US" dirty="0"/>
+              <a:t> </a:t>
+            </a:r>
+            <a:r>
+              <a:rPr lang="en-US" dirty="0" err="1"/>
+              <a:t>vodi</a:t>
+            </a:r>
+            <a:r>
+              <a:rPr lang="en-US" dirty="0"/>
+              <a:t> do </a:t>
+            </a:r>
+            <a:r>
+              <a:rPr lang="en-US" dirty="0" err="1"/>
+              <a:t>pogrešnih</a:t>
+            </a:r>
+            <a:r>
+              <a:rPr lang="en-US" dirty="0"/>
+              <a:t> </a:t>
+            </a:r>
+            <a:r>
+              <a:rPr lang="en-US" dirty="0" err="1"/>
+              <a:t>planova</a:t>
+            </a:r>
+            <a:r>
+              <a:rPr lang="en-US" dirty="0"/>
+              <a:t> </a:t>
+            </a:r>
+            <a:r>
+              <a:rPr lang="en-US" dirty="0" err="1"/>
+              <a:t>izvršavanja</a:t>
+            </a:r>
+            <a:r>
+              <a:rPr lang="en-US" dirty="0"/>
+              <a:t> — </a:t>
+            </a:r>
+            <a:r>
+              <a:rPr lang="en-US" dirty="0" err="1"/>
+              <a:t>redovno</a:t>
+            </a:r>
+            <a:r>
+              <a:rPr lang="en-US" dirty="0"/>
+              <a:t> </a:t>
+            </a:r>
+            <a:r>
+              <a:rPr lang="en-US" dirty="0" err="1"/>
+              <a:t>pokretanje</a:t>
+            </a:r>
+            <a:r>
+              <a:rPr lang="en-US" dirty="0"/>
+              <a:t> SET STATISTICS INDEX je </a:t>
+            </a:r>
+            <a:r>
+              <a:rPr lang="en-US" dirty="0" err="1"/>
+              <a:t>obaveza</a:t>
+            </a:r>
+            <a:r>
+              <a:rPr lang="en-US" dirty="0"/>
+              <a:t> </a:t>
+            </a:r>
+            <a:r>
+              <a:rPr lang="en-US" dirty="0" err="1"/>
+              <a:t>svakog</a:t>
+            </a:r>
+            <a:r>
+              <a:rPr lang="en-US" dirty="0"/>
+              <a:t> </a:t>
+            </a:r>
+            <a:r>
+              <a:rPr lang="en-US" dirty="0" err="1"/>
+              <a:t>administratora</a:t>
+            </a:r>
+            <a:r>
+              <a:rPr lang="en-US" dirty="0"/>
+              <a:t>.</a:t>
+            </a:r>
+          </a:p>
+          <a:p>
+            <a:r>
+              <a:rPr lang="en-US" dirty="0"/>
+              <a:t>Expression </a:t>
+            </a:r>
+            <a:r>
+              <a:rPr lang="en-US" dirty="0" err="1"/>
+              <a:t>indeksi</a:t>
+            </a:r>
+            <a:r>
+              <a:rPr lang="en-US" dirty="0"/>
+              <a:t> </a:t>
+            </a:r>
+            <a:r>
+              <a:rPr lang="en-US" dirty="0" err="1"/>
+              <a:t>su</a:t>
+            </a:r>
+            <a:r>
+              <a:rPr lang="en-US" dirty="0"/>
+              <a:t> </a:t>
+            </a:r>
+            <a:r>
+              <a:rPr lang="en-US" dirty="0" err="1"/>
+              <a:t>moćan</a:t>
+            </a:r>
+            <a:r>
+              <a:rPr lang="en-US" dirty="0"/>
+              <a:t> </a:t>
+            </a:r>
+            <a:r>
+              <a:rPr lang="en-US" dirty="0" err="1"/>
+              <a:t>alat</a:t>
+            </a:r>
+            <a:r>
+              <a:rPr lang="en-US" dirty="0"/>
+              <a:t> </a:t>
+            </a:r>
+            <a:r>
+              <a:rPr lang="en-US" dirty="0" err="1"/>
+              <a:t>jer</a:t>
+            </a:r>
+            <a:r>
+              <a:rPr lang="en-US" dirty="0"/>
+              <a:t> se </a:t>
+            </a:r>
+            <a:r>
+              <a:rPr lang="en-US" dirty="0" err="1"/>
+              <a:t>izraz</a:t>
+            </a:r>
+            <a:r>
+              <a:rPr lang="en-US" dirty="0"/>
+              <a:t> </a:t>
+            </a:r>
+            <a:r>
+              <a:rPr lang="en-US" dirty="0" err="1"/>
+              <a:t>izračunava</a:t>
+            </a:r>
+            <a:r>
+              <a:rPr lang="en-US" dirty="0"/>
+              <a:t> </a:t>
+            </a:r>
+            <a:r>
+              <a:rPr lang="en-US" dirty="0" err="1"/>
+              <a:t>jednom</a:t>
+            </a:r>
+            <a:r>
+              <a:rPr lang="en-US" dirty="0"/>
+              <a:t> </a:t>
+            </a:r>
+            <a:r>
+              <a:rPr lang="en-US" dirty="0" err="1"/>
+              <a:t>pri</a:t>
+            </a:r>
+            <a:r>
+              <a:rPr lang="en-US" dirty="0"/>
+              <a:t> </a:t>
+            </a:r>
+            <a:r>
+              <a:rPr lang="en-US" dirty="0" err="1"/>
+              <a:t>upisu</a:t>
+            </a:r>
+            <a:r>
+              <a:rPr lang="en-US" dirty="0"/>
+              <a:t> </a:t>
+            </a:r>
+            <a:r>
+              <a:rPr lang="en-US" dirty="0" err="1"/>
+              <a:t>i</a:t>
+            </a:r>
+            <a:r>
+              <a:rPr lang="en-US" dirty="0"/>
+              <a:t> </a:t>
+            </a:r>
+            <a:r>
+              <a:rPr lang="en-US" dirty="0" err="1"/>
+              <a:t>trajno</a:t>
+            </a:r>
+            <a:r>
+              <a:rPr lang="en-US" dirty="0"/>
+              <a:t> </a:t>
+            </a:r>
+            <a:r>
+              <a:rPr lang="en-US" dirty="0" err="1"/>
+              <a:t>čuva</a:t>
+            </a:r>
+            <a:r>
+              <a:rPr lang="en-US" dirty="0"/>
+              <a:t> u B+ </a:t>
+            </a:r>
+            <a:r>
+              <a:rPr lang="en-US" dirty="0" err="1"/>
+              <a:t>stablu</a:t>
+            </a:r>
+            <a:r>
+              <a:rPr lang="en-US" dirty="0"/>
+              <a:t>, </a:t>
+            </a:r>
+            <a:r>
+              <a:rPr lang="en-US" dirty="0" err="1"/>
+              <a:t>čime</a:t>
+            </a:r>
+            <a:r>
+              <a:rPr lang="en-US" dirty="0"/>
+              <a:t> se </a:t>
+            </a:r>
+            <a:r>
+              <a:rPr lang="en-US" dirty="0" err="1"/>
+              <a:t>pri</a:t>
+            </a:r>
+            <a:r>
+              <a:rPr lang="en-US" dirty="0"/>
+              <a:t> </a:t>
+            </a:r>
+            <a:r>
+              <a:rPr lang="en-US" dirty="0" err="1"/>
+              <a:t>pretrazi</a:t>
+            </a:r>
+            <a:r>
+              <a:rPr lang="en-US" dirty="0"/>
+              <a:t> </a:t>
+            </a:r>
+            <a:r>
+              <a:rPr lang="en-US" dirty="0" err="1"/>
+              <a:t>potpuno</a:t>
+            </a:r>
+            <a:r>
+              <a:rPr lang="en-US" dirty="0"/>
+              <a:t> </a:t>
+            </a:r>
+            <a:r>
+              <a:rPr lang="en-US" dirty="0" err="1"/>
+              <a:t>eliminiše</a:t>
+            </a:r>
+            <a:r>
+              <a:rPr lang="en-US" dirty="0"/>
+              <a:t> </a:t>
+            </a:r>
+            <a:r>
+              <a:rPr lang="en-US" dirty="0" err="1"/>
+              <a:t>potreba</a:t>
+            </a:r>
+            <a:r>
+              <a:rPr lang="en-US" dirty="0"/>
+              <a:t> za </a:t>
+            </a:r>
+            <a:r>
+              <a:rPr lang="en-US" dirty="0" err="1"/>
+              <a:t>ponovnim</a:t>
+            </a:r>
+            <a:r>
+              <a:rPr lang="en-US" dirty="0"/>
+              <a:t> </a:t>
+            </a:r>
+            <a:r>
+              <a:rPr lang="en-US" dirty="0" err="1"/>
+              <a:t>izračunavanjem</a:t>
+            </a:r>
+            <a:r>
+              <a:rPr lang="en-US" dirty="0"/>
+              <a:t> </a:t>
+            </a:r>
+            <a:r>
+              <a:rPr lang="en-US" dirty="0" err="1"/>
+              <a:t>i</a:t>
+            </a:r>
+            <a:r>
+              <a:rPr lang="en-US" dirty="0"/>
+              <a:t> Full Table Scan-om</a:t>
+            </a:r>
+          </a:p>
+          <a:p>
             <a:endParaRPr lang="en-US" dirty="0"/>
           </a:p>
         </p:txBody>
@@ -628,6 +3245,10 @@
           <a:bodyPr/>
           <a:lstStyle/>
           <a:p>
+            <a:r>
+              <a:rPr lang="sr-Latn-RS" dirty="0"/>
+              <a:t>U toku svog izlaganja pričaću o kontekstu i motivaciji, odnosno zašto su indeksi bitan faktor za skalabinost sistema. Dalje, kratko ću vam ispričati o fizičkoj organizaciji indeksa. Polse toga će biti reči o MGA i verzionisanju zapisa, B+ stablima, kompresiji i optimizaciji, kao i o tipovima indeksa i statistici. Na samom kraju, prodiskutovaćemo o execution planovima kroz praktične primere. </a:t>
+            </a:r>
             <a:endParaRPr lang="en-US" dirty="0"/>
           </a:p>
         </p:txBody>
@@ -712,6 +3333,72 @@
           <a:bodyPr/>
           <a:lstStyle/>
           <a:p>
+            <a:r>
+              <a:rPr lang="sr-Latn-RS" dirty="0"/>
+              <a:t>U današnjem radu sa bazama podataka, brzina pronalaženja informacija je postao osnovni parametar skalabilnosti sistema usled rasta količine uskladištenih podataka. Sekvencijalni pristup je prosto neprihvatljiv kada pričamo o tabelama sa desetinama hiljada podataka jer je složenost linearna. </a:t>
+            </a:r>
+            <a:r>
+              <a:rPr lang="en-US" dirty="0" err="1"/>
+              <a:t>Iz</a:t>
+            </a:r>
+            <a:r>
+              <a:rPr lang="en-US" dirty="0"/>
+              <a:t> tog </a:t>
+            </a:r>
+            <a:r>
+              <a:rPr lang="en-US" dirty="0" err="1"/>
+              <a:t>razloga</a:t>
+            </a:r>
+            <a:r>
+              <a:rPr lang="en-US" dirty="0"/>
+              <a:t> </a:t>
+            </a:r>
+            <a:r>
+              <a:rPr lang="en-US" dirty="0" err="1"/>
+              <a:t>su</a:t>
+            </a:r>
+            <a:r>
+              <a:rPr lang="en-US" dirty="0"/>
+              <a:t> </a:t>
+            </a:r>
+            <a:r>
+              <a:rPr lang="en-US" dirty="0" err="1"/>
+              <a:t>bitni</a:t>
+            </a:r>
+            <a:r>
+              <a:rPr lang="en-US" dirty="0"/>
+              <a:t> </a:t>
+            </a:r>
+            <a:r>
+              <a:rPr lang="en-US" dirty="0" err="1"/>
+              <a:t>indeksi</a:t>
+            </a:r>
+            <a:r>
+              <a:rPr lang="en-US" dirty="0"/>
+              <a:t> koji </a:t>
+            </a:r>
+            <a:r>
+              <a:rPr lang="en-US" dirty="0" err="1"/>
+              <a:t>predstavljaju</a:t>
+            </a:r>
+            <a:r>
+              <a:rPr lang="en-US" dirty="0"/>
+              <a:t> </a:t>
+            </a:r>
+            <a:r>
+              <a:rPr lang="en-US" dirty="0" err="1"/>
+              <a:t>pomo</a:t>
+            </a:r>
+            <a:r>
+              <a:rPr lang="sr-Latn-RS" dirty="0"/>
+              <a:t>ćne strukture organizovane tako da se brže dođe do podataka. Kod njih je složenost logaritamska Međutim, indeksi nisu besplatan resurs – oni koštaju u vidu prostora, I/O operacija pri izmeni podataka (dodavanje, brisanje i izmeni). Zato je bitno napraviti dobar trade-off, tj. izbalansirati između brzine čitanja i cene upisa. Konkretno, u Firebirdu su indeksi implementirani uz pomoć MGA i B+ stabala. </a:t>
+            </a:r>
+          </a:p>
+          <a:p>
+            <a:r>
+              <a:rPr lang="sr-Latn-RS" dirty="0"/>
+              <a:t>MGA tj. Multi Generational Architecture je zadužen za verzionisanje – svaka izmena je nova verzija umesto da se radi direktno prepisivanje. Indeksi moraju da prate ove verzije što dovodi do pojave Index Bloat, pa je razumevanje fizičke strukture indeksa preduslov za optimizaciju. </a:t>
+            </a:r>
             <a:endParaRPr lang="en-US" dirty="0"/>
           </a:p>
         </p:txBody>
@@ -796,6 +3483,10 @@
           <a:bodyPr/>
           <a:lstStyle/>
           <a:p>
+            <a:r>
+              <a:rPr lang="sr-Latn-RS" dirty="0"/>
+              <a:t>Fizički integritet i logika smeštanja podataka u Firebird-u su definisani kroz koncept On-Dist Structure. ODS je binarni protokol koji definiše organizaciju bajtova na medijumu, gde su smešteni metapodaci, a gde pravi podaci i njihovi pripadajući indeksi. Za indeksiranje je ključno da stranice imaju fiksno mesto, svoj identifikacioni broj i da su fiksne veličine. Postoji više različitih vrsta stranica, ali su nama u ovom trenutku najbitnije ove četiri na slajdu. Svaka od njih ima kod na osnovu kog sistem zna kako da razlikuje metapodatke od stvarnog sadržaja. Header Page je prva stranica koja čuva ifnromacije o ODS verziji, veličini stranice i ID poslednje transakcije. U Date page se čuvaju stvarni podaci. U Index Root Page se čuva lista svih indeksa za određenu tabelu. I na kraju imamo Index B-tree Page gde se čuvaju indeksi u sortiranom redosledu</a:t>
+            </a:r>
             <a:endParaRPr lang="en-US" dirty="0"/>
           </a:p>
         </p:txBody>
@@ -880,6 +3571,94 @@
           <a:bodyPr/>
           <a:lstStyle/>
           <a:p>
+            <a:r>
+              <a:rPr lang="sr-Latn-RS" dirty="0"/>
+              <a:t>Da bismo razumeli šta je RDB$</a:t>
+            </a:r>
+            <a:r>
+              <a:rPr lang="en-US" dirty="0"/>
+              <a:t>KEY</a:t>
+            </a:r>
+            <a:r>
+              <a:rPr lang="sr-Latn-RS" dirty="0"/>
+              <a:t>, prvo ću vam objasniti strukturu stranice. Na početku stranice se nalaz</a:t>
+            </a:r>
+            <a:r>
+              <a:rPr lang="en-US" dirty="0"/>
+              <a:t>e </a:t>
+            </a:r>
+            <a:r>
+              <a:rPr lang="en-US" dirty="0" err="1"/>
+              <a:t>podaci</a:t>
+            </a:r>
+            <a:r>
+              <a:rPr lang="en-US" dirty="0"/>
+              <a:t>, </a:t>
+            </a:r>
+            <a:r>
+              <a:rPr lang="en-US" dirty="0" err="1"/>
+              <a:t>dok</a:t>
+            </a:r>
+            <a:r>
+              <a:rPr lang="en-US" dirty="0"/>
+              <a:t> se </a:t>
+            </a:r>
+            <a:r>
+              <a:rPr lang="en-US" dirty="0" err="1"/>
+              <a:t>na</a:t>
+            </a:r>
+            <a:r>
+              <a:rPr lang="en-US" dirty="0"/>
+              <a:t> </a:t>
+            </a:r>
+            <a:r>
+              <a:rPr lang="en-US" dirty="0" err="1"/>
+              <a:t>kraju</a:t>
+            </a:r>
+            <a:r>
+              <a:rPr lang="en-US" dirty="0"/>
+              <a:t> </a:t>
+            </a:r>
+            <a:r>
+              <a:rPr lang="sr-Latn-RS" dirty="0"/>
+              <a:t>pakuje tabela slotova koja se popunjava otpozadi.  Slot se sastoji od offset-a tj. pomeraja od početka stranice do mesta gde se zapis nalazi i ukupne dužine tog zapisa u bajtovima. RDB$KEY je zapravo veza između logičkih upita i fizičke lokacije na disku. To je osmobajtna vrednost gde 4 bajta predstavljaju broj stranice, a drugih 4 predstavlja broj slota podatka. Upravo se oni  čuvaju u listovima stabala indeksa što značajno utiče na ubrzanje izvršavanja upita</a:t>
+            </a:r>
+            <a:r>
+              <a:rPr lang="en-US" dirty="0"/>
+              <a:t> </a:t>
+            </a:r>
+            <a:r>
+              <a:rPr lang="en-US" dirty="0" err="1"/>
+              <a:t>i</a:t>
+            </a:r>
+            <a:r>
+              <a:rPr lang="en-US" dirty="0"/>
+              <a:t> </a:t>
+            </a:r>
+            <a:r>
+              <a:rPr lang="en-US" dirty="0" err="1"/>
+              <a:t>njegova</a:t>
+            </a:r>
+            <a:r>
+              <a:rPr lang="en-US" dirty="0"/>
+              <a:t> </a:t>
+            </a:r>
+            <a:r>
+              <a:rPr lang="en-US" dirty="0" err="1"/>
+              <a:t>uloga</a:t>
+            </a:r>
+            <a:r>
+              <a:rPr lang="en-US" dirty="0"/>
+              <a:t> je </a:t>
+            </a:r>
+            <a:r>
+              <a:rPr lang="en-US" dirty="0" err="1"/>
+              <a:t>isklju</a:t>
+            </a:r>
+            <a:r>
+              <a:rPr lang="sr-Latn-RS" dirty="0"/>
+              <a:t>čivo navigaciona. Ono što je bitno napomenuti je da tabela slotova omogućava da se zapis fizički premesti unutar stranice, a da svi indeksi i dalje ostanu validni iz razloga što se ne menja broj slota već samo offset unutar slota. U suprotnom, ovo bi zahtevali da se svi indeksi ažuriraju odmah. </a:t>
+            </a:r>
             <a:endParaRPr lang="en-US" dirty="0"/>
           </a:p>
         </p:txBody>
@@ -964,7 +3743,949 @@
           <a:bodyPr/>
           <a:lstStyle/>
           <a:p>
-            <a:endParaRPr lang="en-US" dirty="0"/>
+            <a:r>
+              <a:rPr lang="en-US" sz="1000" dirty="0"/>
+              <a:t>Firebird </a:t>
+            </a:r>
+            <a:r>
+              <a:rPr lang="en-US" sz="1000" dirty="0" err="1"/>
+              <a:t>koristi</a:t>
+            </a:r>
+            <a:r>
+              <a:rPr lang="en-US" sz="1000" dirty="0"/>
+              <a:t> MGA </a:t>
+            </a:r>
+            <a:r>
+              <a:rPr lang="en-US" sz="1000" dirty="0" err="1"/>
+              <a:t>arhitekturu</a:t>
+            </a:r>
+            <a:r>
+              <a:rPr lang="sr-Latn-RS" sz="1000" dirty="0"/>
+              <a:t> koji predstavlja specifičnu primenu MVCC kontrole</a:t>
+            </a:r>
+            <a:r>
+              <a:rPr lang="en-US" sz="1000" dirty="0"/>
+              <a:t> u </a:t>
+            </a:r>
+            <a:r>
+              <a:rPr lang="en-US" sz="1000" dirty="0" err="1"/>
+              <a:t>kojoj</a:t>
+            </a:r>
+            <a:r>
+              <a:rPr lang="en-US" sz="1000" dirty="0"/>
+              <a:t> </a:t>
+            </a:r>
+            <a:r>
+              <a:rPr lang="en-US" sz="1000" dirty="0" err="1"/>
+              <a:t>svaki</a:t>
+            </a:r>
+            <a:r>
+              <a:rPr lang="en-US" sz="1000" dirty="0"/>
+              <a:t> UPDATE ne </a:t>
+            </a:r>
+            <a:r>
+              <a:rPr lang="en-US" sz="1000" dirty="0" err="1"/>
+              <a:t>menja</a:t>
+            </a:r>
+            <a:r>
+              <a:rPr lang="en-US" sz="1000" dirty="0"/>
+              <a:t> </a:t>
+            </a:r>
+            <a:r>
+              <a:rPr lang="en-US" sz="1000" dirty="0" err="1"/>
+              <a:t>originalni</a:t>
+            </a:r>
+            <a:r>
+              <a:rPr lang="en-US" sz="1000" dirty="0"/>
+              <a:t> </a:t>
+            </a:r>
+            <a:r>
+              <a:rPr lang="en-US" sz="1000" dirty="0" err="1"/>
+              <a:t>podatak</a:t>
+            </a:r>
+            <a:r>
+              <a:rPr lang="en-US" sz="1000" dirty="0"/>
+              <a:t>, </a:t>
+            </a:r>
+            <a:r>
+              <a:rPr lang="en-US" sz="1000" dirty="0" err="1"/>
+              <a:t>već</a:t>
+            </a:r>
+            <a:r>
+              <a:rPr lang="en-US" sz="1000" dirty="0"/>
+              <a:t> </a:t>
+            </a:r>
+            <a:r>
+              <a:rPr lang="en-US" sz="1000" dirty="0" err="1"/>
+              <a:t>kreira</a:t>
+            </a:r>
+            <a:r>
+              <a:rPr lang="en-US" sz="1000" dirty="0"/>
+              <a:t> </a:t>
+            </a:r>
+            <a:r>
+              <a:rPr lang="en-US" sz="1000" dirty="0" err="1"/>
+              <a:t>novu</a:t>
+            </a:r>
+            <a:r>
+              <a:rPr lang="en-US" sz="1000" dirty="0"/>
+              <a:t> </a:t>
+            </a:r>
+            <a:r>
+              <a:rPr lang="en-US" sz="1000" dirty="0" err="1"/>
+              <a:t>verziju</a:t>
+            </a:r>
+            <a:r>
+              <a:rPr lang="en-US" sz="1000" dirty="0"/>
+              <a:t> </a:t>
+            </a:r>
+            <a:r>
+              <a:rPr lang="en-US" sz="1000" dirty="0" err="1"/>
+              <a:t>zapisa</a:t>
+            </a:r>
+            <a:r>
+              <a:rPr lang="en-US" sz="1000" dirty="0"/>
+              <a:t>, </a:t>
+            </a:r>
+            <a:r>
+              <a:rPr lang="en-US" sz="1000" dirty="0" err="1"/>
+              <a:t>dok</a:t>
+            </a:r>
+            <a:r>
+              <a:rPr lang="en-US" sz="1000" dirty="0"/>
+              <a:t> </a:t>
+            </a:r>
+            <a:r>
+              <a:rPr lang="en-US" sz="1000" dirty="0" err="1"/>
+              <a:t>stara</a:t>
+            </a:r>
+            <a:r>
+              <a:rPr lang="en-US" sz="1000" dirty="0"/>
+              <a:t> </a:t>
+            </a:r>
+            <a:r>
+              <a:rPr lang="en-US" sz="1000" dirty="0" err="1"/>
+              <a:t>ostaje</a:t>
+            </a:r>
+            <a:r>
+              <a:rPr lang="en-US" sz="1000" dirty="0"/>
+              <a:t> </a:t>
+            </a:r>
+            <a:r>
+              <a:rPr lang="en-US" sz="1000" dirty="0" err="1"/>
+              <a:t>sačuvana</a:t>
+            </a:r>
+            <a:r>
+              <a:rPr lang="en-US" sz="1000" dirty="0"/>
+              <a:t> </a:t>
+            </a:r>
+            <a:r>
+              <a:rPr lang="en-US" sz="1000" dirty="0" err="1"/>
+              <a:t>na</a:t>
+            </a:r>
+            <a:r>
+              <a:rPr lang="en-US" sz="1000" dirty="0"/>
+              <a:t> Data Page </a:t>
+            </a:r>
+            <a:r>
+              <a:rPr lang="en-US" sz="1000" dirty="0" err="1"/>
+              <a:t>stranicama</a:t>
+            </a:r>
+            <a:r>
+              <a:rPr lang="en-US" sz="1000" dirty="0"/>
+              <a:t>.</a:t>
+            </a:r>
+            <a:r>
+              <a:rPr lang="sr-Latn-RS" sz="1000" dirty="0"/>
+              <a:t> </a:t>
+            </a:r>
+            <a:r>
+              <a:rPr lang="en-US" sz="1000" dirty="0"/>
+              <a:t>Na taj </a:t>
+            </a:r>
+            <a:r>
+              <a:rPr lang="en-US" sz="1000" dirty="0" err="1"/>
+              <a:t>način</a:t>
+            </a:r>
+            <a:r>
+              <a:rPr lang="en-US" sz="1000" dirty="0"/>
+              <a:t> se </a:t>
+            </a:r>
+            <a:r>
+              <a:rPr lang="en-US" sz="1000" dirty="0" err="1"/>
+              <a:t>formira</a:t>
+            </a:r>
+            <a:r>
+              <a:rPr lang="en-US" sz="1000" dirty="0"/>
+              <a:t> </a:t>
+            </a:r>
+            <a:r>
+              <a:rPr lang="en-US" sz="1000" dirty="0" err="1"/>
+              <a:t>lanac</a:t>
+            </a:r>
+            <a:r>
+              <a:rPr lang="en-US" sz="1000" dirty="0"/>
+              <a:t> </a:t>
+            </a:r>
+            <a:r>
+              <a:rPr lang="en-US" sz="1000" dirty="0" err="1"/>
+              <a:t>verzija</a:t>
+            </a:r>
+            <a:r>
+              <a:rPr lang="en-US" sz="1000" dirty="0"/>
+              <a:t> — INSERT </a:t>
+            </a:r>
+            <a:r>
+              <a:rPr lang="en-US" sz="1000" dirty="0" err="1"/>
+              <a:t>kreira</a:t>
+            </a:r>
+            <a:r>
+              <a:rPr lang="en-US" sz="1000" dirty="0"/>
+              <a:t> original, </a:t>
+            </a:r>
+            <a:r>
+              <a:rPr lang="en-US" sz="1000" dirty="0" err="1"/>
+              <a:t>svaki</a:t>
+            </a:r>
+            <a:r>
+              <a:rPr lang="en-US" sz="1000" dirty="0"/>
+              <a:t> UPDATE </a:t>
+            </a:r>
+            <a:r>
+              <a:rPr lang="en-US" sz="1000" dirty="0" err="1"/>
+              <a:t>dodaje</a:t>
+            </a:r>
+            <a:r>
+              <a:rPr lang="en-US" sz="1000" dirty="0"/>
+              <a:t> </a:t>
+            </a:r>
+            <a:r>
+              <a:rPr lang="en-US" sz="1000" dirty="0" err="1"/>
+              <a:t>novu</a:t>
+            </a:r>
+            <a:r>
+              <a:rPr lang="en-US" sz="1000" dirty="0"/>
+              <a:t> </a:t>
+            </a:r>
+            <a:r>
+              <a:rPr lang="en-US" sz="1000" dirty="0" err="1"/>
+              <a:t>verziju</a:t>
+            </a:r>
+            <a:r>
+              <a:rPr lang="en-US" sz="1000" dirty="0"/>
+              <a:t> </a:t>
+            </a:r>
+            <a:r>
+              <a:rPr lang="en-US" sz="1000" dirty="0" err="1"/>
+              <a:t>na</a:t>
+            </a:r>
+            <a:r>
+              <a:rPr lang="en-US" sz="1000" dirty="0"/>
+              <a:t> </a:t>
+            </a:r>
+            <a:r>
+              <a:rPr lang="en-US" sz="1000" dirty="0" err="1"/>
+              <a:t>kraju</a:t>
+            </a:r>
+            <a:r>
+              <a:rPr lang="en-US" sz="1000" dirty="0"/>
+              <a:t> </a:t>
+            </a:r>
+            <a:r>
+              <a:rPr lang="en-US" sz="1000" dirty="0" err="1"/>
+              <a:t>lanca</a:t>
+            </a:r>
+            <a:r>
+              <a:rPr lang="en-US" sz="1000" dirty="0"/>
+              <a:t>, a engine </a:t>
+            </a:r>
+            <a:r>
+              <a:rPr lang="en-US" sz="1000" dirty="0" err="1"/>
+              <a:t>prolazi</a:t>
+            </a:r>
+            <a:r>
+              <a:rPr lang="en-US" sz="1000" dirty="0"/>
+              <a:t> </a:t>
+            </a:r>
+            <a:r>
+              <a:rPr lang="en-US" sz="1000" dirty="0" err="1"/>
+              <a:t>kroz</a:t>
+            </a:r>
+            <a:r>
+              <a:rPr lang="en-US" sz="1000" dirty="0"/>
+              <a:t> </a:t>
+            </a:r>
+            <a:r>
+              <a:rPr lang="en-US" sz="1000" dirty="0" err="1"/>
+              <a:t>lanac</a:t>
+            </a:r>
+            <a:r>
+              <a:rPr lang="en-US" sz="1000" dirty="0"/>
+              <a:t> </a:t>
+            </a:r>
+            <a:r>
+              <a:rPr lang="en-US" sz="1000" dirty="0" err="1"/>
+              <a:t>dok</a:t>
+            </a:r>
+            <a:r>
+              <a:rPr lang="en-US" sz="1000" dirty="0"/>
+              <a:t> ne </a:t>
+            </a:r>
+            <a:r>
+              <a:rPr lang="en-US" sz="1000" dirty="0" err="1"/>
+              <a:t>pronađe</a:t>
+            </a:r>
+            <a:r>
+              <a:rPr lang="en-US" sz="1000" dirty="0"/>
+              <a:t> </a:t>
+            </a:r>
+            <a:r>
+              <a:rPr lang="en-US" sz="1000" dirty="0" err="1"/>
+              <a:t>verziju</a:t>
+            </a:r>
+            <a:r>
+              <a:rPr lang="en-US" sz="1000" dirty="0"/>
+              <a:t> </a:t>
+            </a:r>
+            <a:r>
+              <a:rPr lang="en-US" sz="1000" dirty="0" err="1"/>
+              <a:t>koju</a:t>
+            </a:r>
+            <a:r>
+              <a:rPr lang="en-US" sz="1000" dirty="0"/>
+              <a:t> </a:t>
+            </a:r>
+            <a:r>
+              <a:rPr lang="en-US" sz="1000" dirty="0" err="1"/>
+              <a:t>konkretna</a:t>
+            </a:r>
+            <a:r>
+              <a:rPr lang="en-US" sz="1000" dirty="0"/>
+              <a:t> </a:t>
+            </a:r>
+            <a:r>
+              <a:rPr lang="en-US" sz="1000" dirty="0" err="1"/>
+              <a:t>transakcija</a:t>
+            </a:r>
+            <a:r>
+              <a:rPr lang="en-US" sz="1000" dirty="0"/>
+              <a:t> </a:t>
+            </a:r>
+            <a:r>
+              <a:rPr lang="en-US" sz="1000" dirty="0" err="1"/>
+              <a:t>sme</a:t>
+            </a:r>
+            <a:r>
+              <a:rPr lang="en-US" sz="1000" dirty="0"/>
+              <a:t> da </a:t>
+            </a:r>
+            <a:r>
+              <a:rPr lang="en-US" sz="1000" dirty="0" err="1"/>
+              <a:t>vidi</a:t>
+            </a:r>
+            <a:r>
+              <a:rPr lang="en-US" sz="1000" dirty="0"/>
+              <a:t>.</a:t>
+            </a:r>
+            <a:r>
+              <a:rPr lang="sr-Latn-RS" sz="1000" dirty="0"/>
+              <a:t> </a:t>
+            </a:r>
+            <a:r>
+              <a:rPr lang="en-US" sz="1000" dirty="0" err="1"/>
+              <a:t>Direktna</a:t>
+            </a:r>
+            <a:r>
+              <a:rPr lang="en-US" sz="1000" dirty="0"/>
+              <a:t> </a:t>
+            </a:r>
+            <a:r>
+              <a:rPr lang="en-US" sz="1000" dirty="0" err="1"/>
+              <a:t>posledica</a:t>
+            </a:r>
+            <a:r>
+              <a:rPr lang="en-US" sz="1000" dirty="0"/>
+              <a:t> </a:t>
+            </a:r>
+            <a:r>
+              <a:rPr lang="en-US" sz="1000" dirty="0" err="1"/>
+              <a:t>ovakvog</a:t>
+            </a:r>
+            <a:r>
+              <a:rPr lang="en-US" sz="1000" dirty="0"/>
+              <a:t> </a:t>
+            </a:r>
+            <a:r>
+              <a:rPr lang="en-US" sz="1000" dirty="0" err="1"/>
+              <a:t>modela</a:t>
+            </a:r>
+            <a:r>
+              <a:rPr lang="en-US" sz="1000" dirty="0"/>
+              <a:t> je </a:t>
+            </a:r>
+            <a:r>
+              <a:rPr lang="en-US" sz="1000" dirty="0" err="1"/>
+              <a:t>fenomen</a:t>
+            </a:r>
+            <a:r>
+              <a:rPr lang="en-US" sz="1000" dirty="0"/>
+              <a:t> </a:t>
+            </a:r>
+            <a:r>
+              <a:rPr lang="en-US" sz="1000" b="1" dirty="0"/>
+              <a:t>Index Bloat</a:t>
+            </a:r>
+            <a:r>
+              <a:rPr lang="en-US" sz="1000" dirty="0"/>
+              <a:t> — </a:t>
+            </a:r>
+            <a:r>
+              <a:rPr lang="en-US" sz="1000" dirty="0" err="1"/>
+              <a:t>indeksne</a:t>
+            </a:r>
+            <a:r>
+              <a:rPr lang="en-US" sz="1000" dirty="0"/>
+              <a:t> </a:t>
+            </a:r>
+            <a:r>
+              <a:rPr lang="en-US" sz="1000" dirty="0" err="1"/>
+              <a:t>stranice</a:t>
+            </a:r>
+            <a:r>
+              <a:rPr lang="en-US" sz="1000" dirty="0"/>
+              <a:t> se </a:t>
+            </a:r>
+            <a:r>
+              <a:rPr lang="en-US" sz="1000" dirty="0" err="1"/>
+              <a:t>pune</a:t>
+            </a:r>
+            <a:r>
+              <a:rPr lang="en-US" sz="1000" dirty="0"/>
+              <a:t> </a:t>
+            </a:r>
+            <a:r>
+              <a:rPr lang="en-US" sz="1000" dirty="0" err="1"/>
+              <a:t>pokazivačima</a:t>
+            </a:r>
+            <a:r>
+              <a:rPr lang="en-US" sz="1000" dirty="0"/>
+              <a:t> </a:t>
+            </a:r>
+            <a:r>
+              <a:rPr lang="en-US" sz="1000" dirty="0" err="1"/>
+              <a:t>na</a:t>
+            </a:r>
+            <a:r>
+              <a:rPr lang="en-US" sz="1000" dirty="0"/>
+              <a:t> stare </a:t>
+            </a:r>
+            <a:r>
+              <a:rPr lang="en-US" sz="1000" dirty="0" err="1"/>
+              <a:t>verzije</a:t>
+            </a:r>
+            <a:r>
+              <a:rPr lang="en-US" sz="1000" dirty="0"/>
+              <a:t> </a:t>
+            </a:r>
+            <a:r>
+              <a:rPr lang="en-US" sz="1000" dirty="0" err="1"/>
+              <a:t>zapisa</a:t>
+            </a:r>
+            <a:r>
+              <a:rPr lang="en-US" sz="1000" dirty="0"/>
+              <a:t>, B+ </a:t>
+            </a:r>
+            <a:r>
+              <a:rPr lang="en-US" sz="1000" dirty="0" err="1"/>
+              <a:t>stablo</a:t>
+            </a:r>
+            <a:r>
+              <a:rPr lang="en-US" sz="1000" dirty="0"/>
+              <a:t> </a:t>
+            </a:r>
+            <a:r>
+              <a:rPr lang="en-US" sz="1000" dirty="0" err="1"/>
+              <a:t>raste</a:t>
+            </a:r>
+            <a:r>
+              <a:rPr lang="en-US" sz="1000" dirty="0"/>
+              <a:t> </a:t>
+            </a:r>
+            <a:r>
+              <a:rPr lang="en-US" sz="1000" dirty="0" err="1"/>
+              <a:t>i</a:t>
+            </a:r>
+            <a:r>
+              <a:rPr lang="en-US" sz="1000" dirty="0"/>
+              <a:t> </a:t>
+            </a:r>
+            <a:r>
+              <a:rPr lang="en-US" sz="1000" dirty="0" err="1"/>
+              <a:t>postaje</a:t>
+            </a:r>
+            <a:r>
+              <a:rPr lang="en-US" sz="1000" dirty="0"/>
+              <a:t> </a:t>
+            </a:r>
+            <a:r>
+              <a:rPr lang="en-US" sz="1000" dirty="0" err="1"/>
+              <a:t>dublje</a:t>
+            </a:r>
+            <a:r>
+              <a:rPr lang="en-US" sz="1000" dirty="0"/>
+              <a:t>, </a:t>
+            </a:r>
+            <a:r>
+              <a:rPr lang="en-US" sz="1000" dirty="0" err="1"/>
+              <a:t>što</a:t>
+            </a:r>
+            <a:r>
+              <a:rPr lang="en-US" sz="1000" dirty="0"/>
+              <a:t> </a:t>
+            </a:r>
+            <a:r>
+              <a:rPr lang="en-US" sz="1000" dirty="0" err="1"/>
+              <a:t>povećava</a:t>
+            </a:r>
+            <a:r>
+              <a:rPr lang="en-US" sz="1000" dirty="0"/>
+              <a:t> </a:t>
+            </a:r>
+            <a:r>
+              <a:rPr lang="en-US" sz="1000" dirty="0" err="1"/>
+              <a:t>broj</a:t>
+            </a:r>
+            <a:r>
+              <a:rPr lang="en-US" sz="1000" dirty="0"/>
+              <a:t> I/O </a:t>
+            </a:r>
+            <a:r>
+              <a:rPr lang="en-US" sz="1000" dirty="0" err="1"/>
+              <a:t>operacija</a:t>
+            </a:r>
+            <a:r>
+              <a:rPr lang="en-US" sz="1000" dirty="0"/>
+              <a:t> </a:t>
+            </a:r>
+            <a:r>
+              <a:rPr lang="en-US" sz="1000" dirty="0" err="1"/>
+              <a:t>i</a:t>
+            </a:r>
+            <a:r>
+              <a:rPr lang="en-US" sz="1000" dirty="0"/>
+              <a:t> </a:t>
+            </a:r>
+            <a:r>
+              <a:rPr lang="en-US" sz="1000" dirty="0" err="1"/>
+              <a:t>usporava</a:t>
+            </a:r>
+            <a:r>
+              <a:rPr lang="en-US" sz="1000" dirty="0"/>
+              <a:t> </a:t>
+            </a:r>
+            <a:r>
+              <a:rPr lang="en-US" sz="1000" dirty="0" err="1"/>
+              <a:t>pretragu</a:t>
+            </a:r>
+            <a:r>
+              <a:rPr lang="en-US" sz="1000" dirty="0"/>
+              <a:t>.</a:t>
+            </a:r>
+            <a:r>
+              <a:rPr lang="sr-Latn-RS" sz="1000" dirty="0"/>
+              <a:t> </a:t>
+            </a:r>
+            <a:r>
+              <a:rPr lang="en-US" sz="1000" dirty="0"/>
+              <a:t>Za </a:t>
+            </a:r>
+            <a:r>
+              <a:rPr lang="en-US" sz="1000" dirty="0" err="1"/>
+              <a:t>čišćenje</a:t>
+            </a:r>
+            <a:r>
+              <a:rPr lang="en-US" sz="1000" dirty="0"/>
+              <a:t> </a:t>
+            </a:r>
+            <a:r>
+              <a:rPr lang="en-US" sz="1000" dirty="0" err="1"/>
+              <a:t>zastarelih</a:t>
+            </a:r>
+            <a:r>
+              <a:rPr lang="en-US" sz="1000" dirty="0"/>
+              <a:t> </a:t>
+            </a:r>
+            <a:r>
+              <a:rPr lang="en-US" sz="1000" dirty="0" err="1"/>
+              <a:t>verzija</a:t>
+            </a:r>
+            <a:r>
+              <a:rPr lang="en-US" sz="1000" dirty="0"/>
+              <a:t> </a:t>
+            </a:r>
+            <a:r>
+              <a:rPr lang="en-US" sz="1000" dirty="0" err="1"/>
+              <a:t>zadužen</a:t>
+            </a:r>
+            <a:r>
+              <a:rPr lang="en-US" sz="1000" dirty="0"/>
+              <a:t> je </a:t>
+            </a:r>
+            <a:r>
+              <a:rPr lang="en-US" sz="1000" b="1" dirty="0"/>
+              <a:t>Garbage Collector (GC)</a:t>
+            </a:r>
+            <a:r>
+              <a:rPr lang="en-US" sz="1000" dirty="0"/>
+              <a:t>, koji </a:t>
+            </a:r>
+            <a:r>
+              <a:rPr lang="en-US" sz="1000" dirty="0" err="1"/>
+              <a:t>postoji</a:t>
+            </a:r>
+            <a:r>
+              <a:rPr lang="en-US" sz="1000" dirty="0"/>
+              <a:t> u tri </a:t>
+            </a:r>
+            <a:r>
+              <a:rPr lang="en-US" sz="1000" dirty="0" err="1"/>
+              <a:t>oblika</a:t>
+            </a:r>
+            <a:r>
+              <a:rPr lang="en-US" sz="1000" dirty="0"/>
+              <a:t>: </a:t>
+            </a:r>
+            <a:r>
+              <a:rPr lang="en-US" sz="1000" dirty="0" err="1"/>
+              <a:t>kooperativni</a:t>
+            </a:r>
+            <a:r>
+              <a:rPr lang="en-US" sz="1000" dirty="0"/>
+              <a:t> GC Background GC </a:t>
+            </a:r>
+            <a:r>
+              <a:rPr lang="en-US" sz="1000" dirty="0" err="1"/>
+              <a:t>i</a:t>
+            </a:r>
+            <a:r>
+              <a:rPr lang="en-US" sz="1000" dirty="0"/>
+              <a:t> </a:t>
+            </a:r>
+            <a:r>
+              <a:rPr lang="en-US" sz="1000" dirty="0" err="1"/>
+              <a:t>Sweepin</a:t>
+            </a:r>
+            <a:r>
+              <a:rPr lang="sr-Latn-RS" sz="1000" dirty="0"/>
+              <a:t>g</a:t>
+            </a:r>
+            <a:r>
+              <a:rPr lang="en-US" sz="1000" dirty="0"/>
+              <a:t>.</a:t>
+            </a:r>
+            <a:r>
+              <a:rPr lang="sr-Latn-RS" sz="1000" dirty="0"/>
+              <a:t> </a:t>
+            </a:r>
+            <a:r>
+              <a:rPr lang="en-US" sz="1000" dirty="0" err="1"/>
+              <a:t>Važno</a:t>
+            </a:r>
+            <a:r>
+              <a:rPr lang="en-US" sz="1000" dirty="0"/>
+              <a:t> </a:t>
+            </a:r>
+            <a:r>
+              <a:rPr lang="en-US" sz="1000" dirty="0" err="1"/>
+              <a:t>ograničenje</a:t>
+            </a:r>
+            <a:r>
+              <a:rPr lang="en-US" sz="1000" dirty="0"/>
+              <a:t> GC-a je </a:t>
+            </a:r>
+            <a:r>
+              <a:rPr lang="en-US" sz="1000" b="1" dirty="0"/>
+              <a:t>Oldest Active Transaction (OAT)</a:t>
+            </a:r>
+            <a:r>
+              <a:rPr lang="en-US" sz="1000" dirty="0"/>
+              <a:t> — </a:t>
+            </a:r>
+            <a:r>
+              <a:rPr lang="en-US" sz="1000" dirty="0" err="1"/>
+              <a:t>sve</a:t>
+            </a:r>
+            <a:r>
+              <a:rPr lang="en-US" sz="1000" dirty="0"/>
+              <a:t> </a:t>
+            </a:r>
+            <a:r>
+              <a:rPr lang="en-US" sz="1000" dirty="0" err="1"/>
+              <a:t>verzije</a:t>
+            </a:r>
+            <a:r>
+              <a:rPr lang="en-US" sz="1000" dirty="0"/>
+              <a:t> </a:t>
+            </a:r>
+            <a:r>
+              <a:rPr lang="en-US" sz="1000" dirty="0" err="1"/>
+              <a:t>nastale</a:t>
+            </a:r>
+            <a:r>
+              <a:rPr lang="en-US" sz="1000" dirty="0"/>
+              <a:t> </a:t>
+            </a:r>
+            <a:r>
+              <a:rPr lang="en-US" sz="1000" dirty="0" err="1"/>
+              <a:t>posle</a:t>
+            </a:r>
+            <a:r>
+              <a:rPr lang="en-US" sz="1000" dirty="0"/>
+              <a:t> </a:t>
+            </a:r>
+            <a:r>
+              <a:rPr lang="en-US" sz="1000" dirty="0" err="1"/>
+              <a:t>najstarije</a:t>
+            </a:r>
+            <a:r>
+              <a:rPr lang="en-US" sz="1000" dirty="0"/>
+              <a:t> </a:t>
+            </a:r>
+            <a:r>
+              <a:rPr lang="en-US" sz="1000" dirty="0" err="1"/>
+              <a:t>aktivne</a:t>
+            </a:r>
+            <a:r>
+              <a:rPr lang="en-US" sz="1000" dirty="0"/>
+              <a:t> </a:t>
+            </a:r>
+            <a:r>
+              <a:rPr lang="en-US" sz="1000" dirty="0" err="1"/>
+              <a:t>transakcije</a:t>
+            </a:r>
+            <a:r>
+              <a:rPr lang="en-US" sz="1000" dirty="0"/>
+              <a:t> ne </a:t>
+            </a:r>
+            <a:r>
+              <a:rPr lang="en-US" sz="1000" dirty="0" err="1"/>
+              <a:t>smeju</a:t>
+            </a:r>
+            <a:r>
+              <a:rPr lang="en-US" sz="1000" dirty="0"/>
+              <a:t> </a:t>
+            </a:r>
+            <a:r>
+              <a:rPr lang="en-US" sz="1000" dirty="0" err="1"/>
+              <a:t>biti</a:t>
+            </a:r>
+            <a:r>
+              <a:rPr lang="en-US" sz="1000" dirty="0"/>
+              <a:t> </a:t>
+            </a:r>
+            <a:r>
+              <a:rPr lang="en-US" sz="1000" dirty="0" err="1"/>
+              <a:t>obrisane</a:t>
+            </a:r>
+            <a:r>
+              <a:rPr lang="en-US" sz="1000" dirty="0"/>
+              <a:t>, </a:t>
+            </a:r>
+            <a:r>
+              <a:rPr lang="en-US" sz="1000" dirty="0" err="1"/>
+              <a:t>jer</a:t>
+            </a:r>
+            <a:r>
+              <a:rPr lang="en-US" sz="1000" dirty="0"/>
+              <a:t> </a:t>
+            </a:r>
+            <a:r>
+              <a:rPr lang="en-US" sz="1000" dirty="0" err="1"/>
+              <a:t>neka</a:t>
+            </a:r>
+            <a:r>
+              <a:rPr lang="en-US" sz="1000" dirty="0"/>
+              <a:t> </a:t>
+            </a:r>
+            <a:r>
+              <a:rPr lang="en-US" sz="1000" dirty="0" err="1"/>
+              <a:t>transakcija</a:t>
+            </a:r>
+            <a:r>
+              <a:rPr lang="en-US" sz="1000" dirty="0"/>
+              <a:t> </a:t>
+            </a:r>
+            <a:r>
+              <a:rPr lang="en-US" sz="1000" dirty="0" err="1"/>
+              <a:t>ih</a:t>
+            </a:r>
+            <a:r>
+              <a:rPr lang="en-US" sz="1000" dirty="0"/>
+              <a:t> </a:t>
+            </a:r>
+            <a:r>
+              <a:rPr lang="en-US" sz="1000" dirty="0" err="1"/>
+              <a:t>možda</a:t>
+            </a:r>
+            <a:r>
+              <a:rPr lang="en-US" sz="1000" dirty="0"/>
+              <a:t> </a:t>
+            </a:r>
+            <a:r>
+              <a:rPr lang="en-US" sz="1000" dirty="0" err="1"/>
+              <a:t>još</a:t>
+            </a:r>
+            <a:r>
+              <a:rPr lang="en-US" sz="1000" dirty="0"/>
+              <a:t> </a:t>
+            </a:r>
+            <a:r>
+              <a:rPr lang="en-US" sz="1000" dirty="0" err="1"/>
+              <a:t>uvek</a:t>
+            </a:r>
+            <a:r>
+              <a:rPr lang="en-US" sz="1000" dirty="0"/>
+              <a:t> </a:t>
+            </a:r>
+            <a:r>
+              <a:rPr lang="en-US" sz="1000" dirty="0" err="1"/>
+              <a:t>treba</a:t>
+            </a:r>
+            <a:r>
+              <a:rPr lang="en-US" sz="1000" dirty="0"/>
+              <a:t>.</a:t>
+            </a:r>
+            <a:r>
+              <a:rPr lang="sr-Latn-RS" sz="1000" dirty="0"/>
+              <a:t> </a:t>
+            </a:r>
+            <a:r>
+              <a:rPr lang="en-US" sz="1000" dirty="0" err="1"/>
+              <a:t>Jedino</a:t>
+            </a:r>
+            <a:r>
+              <a:rPr lang="en-US" sz="1000" dirty="0"/>
+              <a:t> </a:t>
+            </a:r>
+            <a:r>
+              <a:rPr lang="en-US" sz="1000" dirty="0" err="1"/>
+              <a:t>trajno</a:t>
+            </a:r>
+            <a:r>
+              <a:rPr lang="en-US" sz="1000" dirty="0"/>
+              <a:t> </a:t>
+            </a:r>
+            <a:r>
+              <a:rPr lang="en-US" sz="1000" dirty="0" err="1"/>
+              <a:t>rešenje</a:t>
+            </a:r>
+            <a:r>
+              <a:rPr lang="en-US" sz="1000" dirty="0"/>
+              <a:t> za Index Bloat je </a:t>
+            </a:r>
+            <a:r>
+              <a:rPr lang="en-US" sz="1000" dirty="0" err="1"/>
+              <a:t>rekreacija</a:t>
+            </a:r>
+            <a:r>
+              <a:rPr lang="en-US" sz="1000" dirty="0"/>
+              <a:t> </a:t>
+            </a:r>
+            <a:r>
+              <a:rPr lang="en-US" sz="1000" dirty="0" err="1"/>
+              <a:t>indeksa</a:t>
+            </a:r>
+            <a:r>
+              <a:rPr lang="en-US" sz="1000" dirty="0"/>
+              <a:t> </a:t>
+            </a:r>
+            <a:r>
+              <a:rPr lang="en-US" sz="1000" dirty="0" err="1"/>
+              <a:t>komandom</a:t>
+            </a:r>
+            <a:r>
+              <a:rPr lang="en-US" sz="1000" dirty="0"/>
+              <a:t> </a:t>
+            </a:r>
+            <a:r>
+              <a:rPr lang="en-US" sz="1200" kern="1200" dirty="0">
+                <a:solidFill>
+                  <a:schemeClr val="tx1"/>
+                </a:solidFill>
+                <a:latin typeface="+mn-lt"/>
+                <a:ea typeface="+mn-ea"/>
+                <a:cs typeface="+mn-cs"/>
+              </a:rPr>
+              <a:t>ALTER INDEX INACTIVE → ACTIVE</a:t>
+            </a:r>
+            <a:r>
+              <a:rPr lang="en-US" sz="1000" dirty="0"/>
+              <a:t>, </a:t>
+            </a:r>
+            <a:r>
+              <a:rPr lang="en-US" sz="1000" dirty="0" err="1"/>
+              <a:t>čime</a:t>
+            </a:r>
+            <a:r>
+              <a:rPr lang="en-US" sz="1000" dirty="0"/>
+              <a:t> se B+ </a:t>
+            </a:r>
+            <a:r>
+              <a:rPr lang="en-US" sz="1000" dirty="0" err="1"/>
+              <a:t>stablo</a:t>
+            </a:r>
+            <a:r>
+              <a:rPr lang="en-US" sz="1000" dirty="0"/>
+              <a:t> </a:t>
+            </a:r>
+            <a:r>
+              <a:rPr lang="en-US" sz="1000" dirty="0" err="1"/>
+              <a:t>gradi</a:t>
+            </a:r>
+            <a:r>
+              <a:rPr lang="en-US" sz="1000" dirty="0"/>
+              <a:t> od </a:t>
+            </a:r>
+            <a:r>
+              <a:rPr lang="en-US" sz="1000" dirty="0" err="1"/>
+              <a:t>nule</a:t>
+            </a:r>
+            <a:r>
+              <a:rPr lang="en-US" sz="1000" dirty="0"/>
+              <a:t> </a:t>
+            </a:r>
+            <a:r>
+              <a:rPr lang="en-US" sz="1000" dirty="0" err="1"/>
+              <a:t>i</a:t>
+            </a:r>
+            <a:r>
+              <a:rPr lang="en-US" sz="1000" dirty="0"/>
+              <a:t> </a:t>
+            </a:r>
+            <a:r>
+              <a:rPr lang="en-US" sz="1000" dirty="0" err="1"/>
+              <a:t>sve</a:t>
+            </a:r>
+            <a:r>
+              <a:rPr lang="en-US" sz="1000" dirty="0"/>
+              <a:t> stare </a:t>
+            </a:r>
+            <a:r>
+              <a:rPr lang="en-US" sz="1000" dirty="0" err="1"/>
+              <a:t>verzije</a:t>
+            </a:r>
+            <a:r>
+              <a:rPr lang="en-US" sz="1000" dirty="0"/>
+              <a:t> se </a:t>
+            </a:r>
+            <a:r>
+              <a:rPr lang="en-US" sz="1000" dirty="0" err="1"/>
+              <a:t>odbacuju</a:t>
+            </a:r>
+            <a:r>
+              <a:rPr lang="en-US" sz="1000" dirty="0"/>
+              <a:t>.</a:t>
+            </a:r>
           </a:p>
         </p:txBody>
       </p:sp>
@@ -1048,6 +4769,1058 @@
           <a:bodyPr/>
           <a:lstStyle/>
           <a:p>
+            <a:r>
+              <a:rPr lang="en-US" dirty="0"/>
+              <a:t>Firebird </a:t>
+            </a:r>
+            <a:r>
+              <a:rPr lang="en-US" dirty="0" err="1"/>
+              <a:t>indeksi</a:t>
+            </a:r>
+            <a:r>
+              <a:rPr lang="en-US" dirty="0"/>
+              <a:t> </a:t>
+            </a:r>
+            <a:r>
+              <a:rPr lang="en-US" dirty="0" err="1"/>
+              <a:t>su</a:t>
+            </a:r>
+            <a:r>
+              <a:rPr lang="en-US" dirty="0"/>
+              <a:t> </a:t>
+            </a:r>
+            <a:r>
+              <a:rPr lang="en-US" dirty="0" err="1"/>
+              <a:t>implementirani</a:t>
+            </a:r>
+            <a:r>
+              <a:rPr lang="en-US" dirty="0"/>
+              <a:t> </a:t>
+            </a:r>
+            <a:r>
+              <a:rPr lang="en-US" dirty="0" err="1"/>
+              <a:t>kao</a:t>
+            </a:r>
+            <a:r>
+              <a:rPr lang="en-US" dirty="0"/>
+              <a:t> B+ </a:t>
+            </a:r>
+            <a:r>
+              <a:rPr lang="en-US" dirty="0" err="1"/>
+              <a:t>stabla</a:t>
+            </a:r>
+            <a:r>
+              <a:rPr lang="en-US" dirty="0"/>
+              <a:t> </a:t>
+            </a:r>
+            <a:r>
+              <a:rPr lang="en-US" dirty="0" err="1"/>
+              <a:t>koja</a:t>
+            </a:r>
+            <a:r>
+              <a:rPr lang="en-US" dirty="0"/>
+              <a:t> se </a:t>
+            </a:r>
+            <a:r>
+              <a:rPr lang="en-US" dirty="0" err="1"/>
+              <a:t>sastoje</a:t>
+            </a:r>
+            <a:r>
+              <a:rPr lang="en-US" dirty="0"/>
+              <a:t> od tri </a:t>
+            </a:r>
+            <a:r>
+              <a:rPr lang="en-US" dirty="0" err="1"/>
+              <a:t>nivoa</a:t>
+            </a:r>
+            <a:r>
+              <a:rPr lang="en-US" dirty="0"/>
+              <a:t> — </a:t>
+            </a:r>
+            <a:r>
+              <a:rPr lang="en-US" dirty="0" err="1"/>
+              <a:t>korena</a:t>
+            </a:r>
+            <a:r>
+              <a:rPr lang="en-US" dirty="0"/>
+              <a:t> (Root), grana </a:t>
+            </a:r>
+            <a:r>
+              <a:rPr lang="en-US" dirty="0" err="1"/>
+              <a:t>kao</a:t>
+            </a:r>
+            <a:r>
+              <a:rPr lang="en-US" dirty="0"/>
+              <a:t> </a:t>
+            </a:r>
+            <a:r>
+              <a:rPr lang="en-US" dirty="0" err="1"/>
+              <a:t>navigacionih</a:t>
+            </a:r>
+            <a:r>
+              <a:rPr lang="en-US" dirty="0"/>
+              <a:t> </a:t>
+            </a:r>
+            <a:r>
+              <a:rPr lang="en-US" dirty="0" err="1"/>
+              <a:t>čvorova</a:t>
+            </a:r>
+            <a:r>
+              <a:rPr lang="en-US" dirty="0"/>
+              <a:t>, </a:t>
+            </a:r>
+            <a:r>
+              <a:rPr lang="en-US" dirty="0" err="1"/>
+              <a:t>i</a:t>
+            </a:r>
+            <a:r>
+              <a:rPr lang="en-US" dirty="0"/>
+              <a:t> </a:t>
+            </a:r>
+            <a:r>
+              <a:rPr lang="en-US" dirty="0" err="1"/>
+              <a:t>listova</a:t>
+            </a:r>
+            <a:r>
+              <a:rPr lang="en-US" dirty="0"/>
+              <a:t> (Leaf Pages) koji </a:t>
+            </a:r>
+            <a:r>
+              <a:rPr lang="en-US" dirty="0" err="1"/>
+              <a:t>jedini</a:t>
+            </a:r>
+            <a:r>
+              <a:rPr lang="en-US" dirty="0"/>
+              <a:t> </a:t>
+            </a:r>
+            <a:r>
+              <a:rPr lang="en-US" dirty="0" err="1"/>
+              <a:t>čuvaju</a:t>
+            </a:r>
+            <a:r>
+              <a:rPr lang="en-US" dirty="0"/>
+              <a:t> </a:t>
+            </a:r>
+            <a:r>
+              <a:rPr lang="en-US" dirty="0" err="1"/>
+              <a:t>stvarne</a:t>
+            </a:r>
+            <a:r>
+              <a:rPr lang="en-US" dirty="0"/>
+              <a:t> </a:t>
+            </a:r>
+            <a:r>
+              <a:rPr lang="en-US" dirty="0" err="1"/>
+              <a:t>ključeve</a:t>
+            </a:r>
+            <a:r>
+              <a:rPr lang="en-US" dirty="0"/>
+              <a:t> </a:t>
+            </a:r>
+            <a:r>
+              <a:rPr lang="en-US" dirty="0" err="1"/>
+              <a:t>i</a:t>
+            </a:r>
+            <a:r>
+              <a:rPr lang="en-US" dirty="0"/>
+              <a:t> RDB$DB_KEY </a:t>
+            </a:r>
+            <a:r>
+              <a:rPr lang="en-US" dirty="0" err="1"/>
+              <a:t>adrese</a:t>
+            </a:r>
+            <a:r>
+              <a:rPr lang="en-US" dirty="0"/>
+              <a:t>.</a:t>
+            </a:r>
+            <a:r>
+              <a:rPr lang="sr-Latn-RS" dirty="0"/>
+              <a:t> </a:t>
+            </a:r>
+            <a:r>
+              <a:rPr lang="en-US" dirty="0"/>
+              <a:t>Grane </a:t>
+            </a:r>
+            <a:r>
+              <a:rPr lang="en-US" dirty="0" err="1"/>
+              <a:t>služe</a:t>
+            </a:r>
+            <a:r>
+              <a:rPr lang="en-US" dirty="0"/>
+              <a:t> </a:t>
+            </a:r>
+            <a:r>
+              <a:rPr lang="en-US" dirty="0" err="1"/>
+              <a:t>isključivo</a:t>
+            </a:r>
+            <a:r>
+              <a:rPr lang="en-US" dirty="0"/>
+              <a:t> za </a:t>
+            </a:r>
+            <a:r>
+              <a:rPr lang="en-US" dirty="0" err="1"/>
+              <a:t>usmeravanje</a:t>
+            </a:r>
+            <a:r>
+              <a:rPr lang="en-US" dirty="0"/>
+              <a:t> </a:t>
+            </a:r>
+            <a:r>
+              <a:rPr lang="en-US" dirty="0" err="1"/>
+              <a:t>pretrage</a:t>
+            </a:r>
+            <a:r>
+              <a:rPr lang="sr-Latn-RS" dirty="0"/>
+              <a:t> koja </a:t>
+            </a:r>
+            <a:r>
+              <a:rPr lang="en-US" dirty="0" err="1"/>
+              <a:t>kreće</a:t>
+            </a:r>
+            <a:r>
+              <a:rPr lang="en-US" dirty="0"/>
+              <a:t> od </a:t>
+            </a:r>
+            <a:r>
+              <a:rPr lang="en-US" dirty="0" err="1"/>
+              <a:t>korena</a:t>
+            </a:r>
+            <a:r>
+              <a:rPr lang="en-US" dirty="0"/>
+              <a:t> </a:t>
+            </a:r>
+            <a:r>
+              <a:rPr lang="en-US" dirty="0" err="1"/>
+              <a:t>i</a:t>
+            </a:r>
+            <a:r>
+              <a:rPr lang="en-US" dirty="0"/>
+              <a:t> </a:t>
+            </a:r>
+            <a:r>
+              <a:rPr lang="en-US" dirty="0" err="1"/>
+              <a:t>na</a:t>
+            </a:r>
+            <a:r>
+              <a:rPr lang="en-US" dirty="0"/>
+              <a:t> </a:t>
+            </a:r>
+            <a:r>
+              <a:rPr lang="en-US" dirty="0" err="1"/>
+              <a:t>svakom</a:t>
+            </a:r>
+            <a:r>
+              <a:rPr lang="en-US" dirty="0"/>
+              <a:t> </a:t>
+            </a:r>
+            <a:r>
+              <a:rPr lang="en-US" dirty="0" err="1"/>
+              <a:t>nivou</a:t>
+            </a:r>
+            <a:r>
+              <a:rPr lang="en-US" dirty="0"/>
+              <a:t> </a:t>
+            </a:r>
+            <a:r>
+              <a:rPr lang="en-US" dirty="0" err="1"/>
+              <a:t>eliminiše</a:t>
+            </a:r>
+            <a:r>
+              <a:rPr lang="en-US" dirty="0"/>
+              <a:t> </a:t>
+            </a:r>
+            <a:r>
+              <a:rPr lang="en-US" dirty="0" err="1"/>
+              <a:t>čitave</a:t>
+            </a:r>
+            <a:r>
+              <a:rPr lang="en-US" dirty="0"/>
+              <a:t> </a:t>
+            </a:r>
+            <a:r>
+              <a:rPr lang="en-US" dirty="0" err="1"/>
+              <a:t>grane</a:t>
+            </a:r>
+            <a:r>
+              <a:rPr lang="en-US" dirty="0"/>
+              <a:t> </a:t>
+            </a:r>
+            <a:r>
+              <a:rPr lang="en-US" dirty="0" err="1"/>
+              <a:t>koje</a:t>
+            </a:r>
+            <a:r>
+              <a:rPr lang="en-US" dirty="0"/>
+              <a:t> ne </a:t>
+            </a:r>
+            <a:r>
+              <a:rPr lang="en-US" dirty="0" err="1"/>
+              <a:t>zadovoljavaju</a:t>
+            </a:r>
+            <a:r>
+              <a:rPr lang="en-US" dirty="0"/>
+              <a:t> </a:t>
+            </a:r>
+            <a:r>
+              <a:rPr lang="en-US" dirty="0" err="1"/>
+              <a:t>kriterijum</a:t>
+            </a:r>
+            <a:r>
+              <a:rPr lang="en-US" dirty="0"/>
+              <a:t> </a:t>
+            </a:r>
+            <a:r>
+              <a:rPr lang="en-US" dirty="0" err="1"/>
+              <a:t>upita</a:t>
+            </a:r>
+            <a:r>
+              <a:rPr lang="en-US" dirty="0"/>
+              <a:t>, </a:t>
+            </a:r>
+            <a:r>
+              <a:rPr lang="en-US" dirty="0" err="1"/>
+              <a:t>čime</a:t>
+            </a:r>
+            <a:r>
+              <a:rPr lang="en-US" dirty="0"/>
+              <a:t> se </a:t>
+            </a:r>
+            <a:r>
+              <a:rPr lang="en-US" dirty="0" err="1"/>
+              <a:t>broj</a:t>
+            </a:r>
+            <a:r>
+              <a:rPr lang="en-US" dirty="0"/>
+              <a:t> I/O </a:t>
+            </a:r>
+            <a:r>
+              <a:rPr lang="en-US" dirty="0" err="1"/>
+              <a:t>operacija</a:t>
+            </a:r>
+            <a:r>
+              <a:rPr lang="en-US" dirty="0"/>
+              <a:t> </a:t>
+            </a:r>
+            <a:r>
+              <a:rPr lang="en-US" dirty="0" err="1"/>
+              <a:t>svodi</a:t>
+            </a:r>
+            <a:r>
+              <a:rPr lang="en-US" dirty="0"/>
+              <a:t> </a:t>
+            </a:r>
+            <a:r>
+              <a:rPr lang="en-US" dirty="0" err="1"/>
+              <a:t>na</a:t>
+            </a:r>
+            <a:r>
+              <a:rPr lang="en-US" dirty="0"/>
+              <a:t> </a:t>
+            </a:r>
+            <a:r>
+              <a:rPr lang="en-US" dirty="0" err="1"/>
+              <a:t>logaritamsku</a:t>
+            </a:r>
+            <a:r>
+              <a:rPr lang="en-US" dirty="0"/>
+              <a:t> </a:t>
+            </a:r>
+            <a:r>
+              <a:rPr lang="en-US" dirty="0" err="1"/>
+              <a:t>zavisnost</a:t>
+            </a:r>
+            <a:r>
+              <a:rPr lang="en-US" dirty="0"/>
+              <a:t>.</a:t>
+            </a:r>
+            <a:r>
+              <a:rPr lang="sr-Latn-RS" dirty="0"/>
+              <a:t> </a:t>
+            </a:r>
+            <a:r>
+              <a:rPr lang="en-US" dirty="0" err="1"/>
+              <a:t>Listovi</a:t>
+            </a:r>
+            <a:r>
+              <a:rPr lang="en-US" dirty="0"/>
+              <a:t> </a:t>
+            </a:r>
+            <a:r>
+              <a:rPr lang="en-US" dirty="0" err="1"/>
+              <a:t>su</a:t>
+            </a:r>
+            <a:r>
+              <a:rPr lang="en-US" dirty="0"/>
+              <a:t> </a:t>
+            </a:r>
+            <a:r>
+              <a:rPr lang="en-US" dirty="0" err="1"/>
+              <a:t>horizontalno</a:t>
+            </a:r>
+            <a:r>
+              <a:rPr lang="en-US" dirty="0"/>
+              <a:t> </a:t>
+            </a:r>
+            <a:r>
+              <a:rPr lang="en-US" dirty="0" err="1"/>
+              <a:t>povezani</a:t>
+            </a:r>
+            <a:r>
+              <a:rPr lang="en-US" dirty="0"/>
+              <a:t> u </a:t>
+            </a:r>
+            <a:r>
+              <a:rPr lang="en-US" dirty="0" err="1"/>
+              <a:t>dvostruko</a:t>
+            </a:r>
+            <a:r>
+              <a:rPr lang="en-US" dirty="0"/>
+              <a:t> </a:t>
+            </a:r>
+            <a:r>
+              <a:rPr lang="en-US" dirty="0" err="1"/>
+              <a:t>povezanu</a:t>
+            </a:r>
+            <a:r>
+              <a:rPr lang="en-US" dirty="0"/>
+              <a:t> </a:t>
+            </a:r>
+            <a:r>
+              <a:rPr lang="en-US" dirty="0" err="1"/>
+              <a:t>listu</a:t>
+            </a:r>
+            <a:r>
+              <a:rPr lang="sr-Latn-RS" dirty="0"/>
+              <a:t> </a:t>
+            </a:r>
+            <a:r>
+              <a:rPr lang="en-US" dirty="0" err="1"/>
+              <a:t>što</a:t>
+            </a:r>
+            <a:r>
+              <a:rPr lang="en-US" dirty="0"/>
+              <a:t> </a:t>
+            </a:r>
+            <a:r>
+              <a:rPr lang="en-US" dirty="0" err="1"/>
+              <a:t>omogućava</a:t>
+            </a:r>
+            <a:r>
+              <a:rPr lang="en-US" dirty="0"/>
+              <a:t> </a:t>
+            </a:r>
+            <a:r>
+              <a:rPr lang="en-US" dirty="0" err="1"/>
+              <a:t>efikasan</a:t>
+            </a:r>
+            <a:r>
+              <a:rPr lang="en-US" dirty="0"/>
+              <a:t> Range Scan — engine </a:t>
+            </a:r>
+            <a:r>
+              <a:rPr lang="en-US" dirty="0" err="1"/>
+              <a:t>jednom</a:t>
+            </a:r>
+            <a:r>
+              <a:rPr lang="en-US" dirty="0"/>
+              <a:t> </a:t>
+            </a:r>
+            <a:r>
+              <a:rPr lang="en-US" dirty="0" err="1"/>
+              <a:t>navigira</a:t>
+            </a:r>
+            <a:r>
+              <a:rPr lang="en-US" dirty="0"/>
+              <a:t> </a:t>
+            </a:r>
+            <a:r>
+              <a:rPr lang="en-US" dirty="0" err="1"/>
+              <a:t>vertikalno</a:t>
+            </a:r>
+            <a:r>
+              <a:rPr lang="en-US" dirty="0"/>
+              <a:t> do </a:t>
+            </a:r>
+            <a:r>
+              <a:rPr lang="en-US" dirty="0" err="1"/>
+              <a:t>prvog</a:t>
+            </a:r>
+            <a:r>
+              <a:rPr lang="en-US" dirty="0"/>
+              <a:t> </a:t>
+            </a:r>
+            <a:r>
+              <a:rPr lang="en-US" dirty="0" err="1"/>
+              <a:t>ključa</a:t>
+            </a:r>
+            <a:r>
+              <a:rPr lang="en-US" dirty="0"/>
+              <a:t>, a </a:t>
+            </a:r>
+            <a:r>
+              <a:rPr lang="en-US" dirty="0" err="1"/>
+              <a:t>zatim</a:t>
+            </a:r>
+            <a:r>
+              <a:rPr lang="en-US" dirty="0"/>
+              <a:t> </a:t>
+            </a:r>
+            <a:r>
+              <a:rPr lang="en-US" dirty="0" err="1"/>
+              <a:t>čita</a:t>
+            </a:r>
+            <a:r>
+              <a:rPr lang="en-US" dirty="0"/>
+              <a:t> </a:t>
+            </a:r>
+            <a:r>
+              <a:rPr lang="en-US" dirty="0" err="1"/>
+              <a:t>susedne</a:t>
+            </a:r>
+            <a:r>
+              <a:rPr lang="en-US" dirty="0"/>
+              <a:t> </a:t>
+            </a:r>
+            <a:r>
+              <a:rPr lang="en-US" dirty="0" err="1"/>
+              <a:t>listove</a:t>
+            </a:r>
+            <a:r>
+              <a:rPr lang="en-US" dirty="0"/>
+              <a:t> </a:t>
+            </a:r>
+            <a:r>
+              <a:rPr lang="en-US" dirty="0" err="1"/>
+              <a:t>horizontalno</a:t>
+            </a:r>
+            <a:r>
+              <a:rPr lang="en-US" dirty="0"/>
+              <a:t> bez </a:t>
+            </a:r>
+            <a:r>
+              <a:rPr lang="en-US" dirty="0" err="1"/>
+              <a:t>ponovnog</a:t>
+            </a:r>
+            <a:r>
+              <a:rPr lang="en-US" dirty="0"/>
+              <a:t> </a:t>
+            </a:r>
+            <a:r>
+              <a:rPr lang="en-US" dirty="0" err="1"/>
+              <a:t>obilaska</a:t>
+            </a:r>
+            <a:r>
+              <a:rPr lang="en-US" dirty="0"/>
+              <a:t> od </a:t>
+            </a:r>
+            <a:r>
+              <a:rPr lang="en-US" dirty="0" err="1"/>
+              <a:t>korena</a:t>
+            </a:r>
+            <a:r>
+              <a:rPr lang="en-US" dirty="0"/>
+              <a:t>.</a:t>
+            </a:r>
+          </a:p>
+          <a:p>
+            <a:r>
+              <a:rPr lang="en-US" dirty="0"/>
+              <a:t>Kada se </a:t>
+            </a:r>
+            <a:r>
+              <a:rPr lang="en-US" dirty="0" err="1"/>
+              <a:t>stranica</a:t>
+            </a:r>
+            <a:r>
+              <a:rPr lang="en-US" dirty="0"/>
+              <a:t> </a:t>
+            </a:r>
+            <a:r>
+              <a:rPr lang="en-US" dirty="0" err="1"/>
+              <a:t>popuni</a:t>
+            </a:r>
+            <a:r>
+              <a:rPr lang="en-US" dirty="0"/>
+              <a:t>, </a:t>
+            </a:r>
+            <a:r>
+              <a:rPr lang="en-US" dirty="0" err="1"/>
+              <a:t>aktivira</a:t>
+            </a:r>
+            <a:r>
+              <a:rPr lang="en-US" dirty="0"/>
+              <a:t> se </a:t>
+            </a:r>
+            <a:r>
+              <a:rPr lang="en-US" b="1" dirty="0"/>
+              <a:t>Page Split</a:t>
+            </a:r>
+            <a:r>
+              <a:rPr lang="en-US" dirty="0"/>
+              <a:t> — </a:t>
+            </a:r>
+            <a:r>
+              <a:rPr lang="en-US" dirty="0" err="1"/>
+              <a:t>stranica</a:t>
+            </a:r>
+            <a:r>
+              <a:rPr lang="en-US" dirty="0"/>
+              <a:t> se deli </a:t>
+            </a:r>
+            <a:r>
+              <a:rPr lang="en-US" dirty="0" err="1"/>
+              <a:t>na</a:t>
+            </a:r>
+            <a:r>
+              <a:rPr lang="en-US" dirty="0"/>
+              <a:t> </a:t>
+            </a:r>
+            <a:r>
+              <a:rPr lang="en-US" dirty="0" err="1"/>
+              <a:t>dve</a:t>
+            </a:r>
+            <a:r>
+              <a:rPr lang="en-US" dirty="0"/>
+              <a:t>, </a:t>
+            </a:r>
+            <a:r>
+              <a:rPr lang="en-US" dirty="0" err="1"/>
+              <a:t>polovina</a:t>
+            </a:r>
+            <a:r>
+              <a:rPr lang="en-US" dirty="0"/>
+              <a:t> </a:t>
+            </a:r>
+            <a:r>
+              <a:rPr lang="en-US" dirty="0" err="1"/>
+              <a:t>ključeva</a:t>
+            </a:r>
+            <a:r>
+              <a:rPr lang="en-US" dirty="0"/>
+              <a:t> se </a:t>
+            </a:r>
+            <a:r>
+              <a:rPr lang="en-US" dirty="0" err="1"/>
+              <a:t>premešta</a:t>
+            </a:r>
+            <a:r>
+              <a:rPr lang="en-US" dirty="0"/>
+              <a:t>, a </a:t>
+            </a:r>
+            <a:r>
+              <a:rPr lang="en-US" dirty="0" err="1"/>
+              <a:t>roditeljski</a:t>
+            </a:r>
+            <a:r>
+              <a:rPr lang="en-US" dirty="0"/>
+              <a:t> </a:t>
+            </a:r>
+            <a:r>
+              <a:rPr lang="en-US" dirty="0" err="1"/>
+              <a:t>čvor</a:t>
+            </a:r>
+            <a:r>
+              <a:rPr lang="en-US" dirty="0"/>
+              <a:t> </a:t>
+            </a:r>
+            <a:r>
+              <a:rPr lang="en-US" dirty="0" err="1"/>
+              <a:t>dobija</a:t>
+            </a:r>
+            <a:r>
+              <a:rPr lang="en-US" dirty="0"/>
+              <a:t> novi </a:t>
+            </a:r>
+            <a:r>
+              <a:rPr lang="en-US" dirty="0" err="1"/>
+              <a:t>pokazivač</a:t>
+            </a:r>
+            <a:r>
+              <a:rPr lang="en-US" dirty="0"/>
+              <a:t>, </a:t>
+            </a:r>
+            <a:r>
+              <a:rPr lang="en-US" dirty="0" err="1"/>
+              <a:t>čime</a:t>
+            </a:r>
+            <a:r>
+              <a:rPr lang="en-US" dirty="0"/>
+              <a:t> </a:t>
+            </a:r>
+            <a:r>
+              <a:rPr lang="en-US" dirty="0" err="1"/>
+              <a:t>stablo</a:t>
+            </a:r>
+            <a:r>
+              <a:rPr lang="en-US" dirty="0"/>
+              <a:t> </a:t>
+            </a:r>
+            <a:r>
+              <a:rPr lang="en-US" dirty="0" err="1"/>
+              <a:t>raste</a:t>
+            </a:r>
+            <a:r>
+              <a:rPr lang="en-US" dirty="0"/>
+              <a:t> </a:t>
+            </a:r>
+            <a:r>
+              <a:rPr lang="en-US" dirty="0" err="1"/>
+              <a:t>vertikalno</a:t>
+            </a:r>
+            <a:r>
+              <a:rPr lang="en-US" dirty="0"/>
+              <a:t> </a:t>
+            </a:r>
+            <a:r>
+              <a:rPr lang="en-US" dirty="0" err="1"/>
+              <a:t>i</a:t>
+            </a:r>
+            <a:r>
+              <a:rPr lang="en-US" dirty="0"/>
+              <a:t> </a:t>
+            </a:r>
+            <a:r>
+              <a:rPr lang="en-US" dirty="0" err="1"/>
+              <a:t>povećava</a:t>
+            </a:r>
+            <a:r>
+              <a:rPr lang="en-US" dirty="0"/>
+              <a:t> se </a:t>
+            </a:r>
+            <a:r>
+              <a:rPr lang="en-US" dirty="0" err="1"/>
+              <a:t>njegova</a:t>
+            </a:r>
+            <a:r>
+              <a:rPr lang="en-US" dirty="0"/>
+              <a:t> </a:t>
+            </a:r>
+            <a:r>
+              <a:rPr lang="en-US" dirty="0" err="1"/>
+              <a:t>dubina</a:t>
+            </a:r>
+            <a:r>
+              <a:rPr lang="en-US" dirty="0"/>
+              <a:t>.</a:t>
+            </a:r>
+            <a:r>
+              <a:rPr lang="sr-Latn-RS" dirty="0"/>
+              <a:t> </a:t>
+            </a:r>
+            <a:r>
+              <a:rPr lang="en-US" dirty="0"/>
+              <a:t>Da bi se </a:t>
+            </a:r>
+            <a:r>
+              <a:rPr lang="en-US" dirty="0" err="1"/>
+              <a:t>odložio</a:t>
+            </a:r>
+            <a:r>
+              <a:rPr lang="en-US" dirty="0"/>
+              <a:t> Page Split, Firebird </a:t>
+            </a:r>
+            <a:r>
+              <a:rPr lang="en-US" dirty="0" err="1"/>
+              <a:t>koristi</a:t>
+            </a:r>
+            <a:r>
+              <a:rPr lang="en-US" dirty="0"/>
+              <a:t> </a:t>
+            </a:r>
+            <a:r>
+              <a:rPr lang="en-US" b="1" dirty="0"/>
+              <a:t>Fill Factor</a:t>
+            </a:r>
+            <a:r>
+              <a:rPr lang="en-US" dirty="0"/>
+              <a:t> — </a:t>
+            </a:r>
+            <a:r>
+              <a:rPr lang="en-US" dirty="0" err="1"/>
+              <a:t>stranice</a:t>
+            </a:r>
+            <a:r>
+              <a:rPr lang="en-US" dirty="0"/>
+              <a:t> se </a:t>
+            </a:r>
+            <a:r>
+              <a:rPr lang="en-US" dirty="0" err="1"/>
+              <a:t>pune</a:t>
+            </a:r>
+            <a:r>
+              <a:rPr lang="en-US" dirty="0"/>
+              <a:t> </a:t>
+            </a:r>
+            <a:r>
+              <a:rPr lang="en-US" dirty="0" err="1"/>
+              <a:t>samo</a:t>
+            </a:r>
+            <a:r>
+              <a:rPr lang="en-US" dirty="0"/>
+              <a:t> 80-90%, </a:t>
+            </a:r>
+            <a:r>
+              <a:rPr lang="en-US" dirty="0" err="1"/>
+              <a:t>ostavljajući</a:t>
+            </a:r>
+            <a:r>
+              <a:rPr lang="en-US" dirty="0"/>
+              <a:t> </a:t>
+            </a:r>
+            <a:r>
+              <a:rPr lang="en-US" dirty="0" err="1"/>
+              <a:t>rezervni</a:t>
+            </a:r>
+            <a:r>
+              <a:rPr lang="en-US" dirty="0"/>
+              <a:t> </a:t>
+            </a:r>
+            <a:r>
+              <a:rPr lang="en-US" dirty="0" err="1"/>
+              <a:t>prostor</a:t>
+            </a:r>
+            <a:r>
+              <a:rPr lang="en-US" dirty="0"/>
+              <a:t> za </a:t>
+            </a:r>
+            <a:r>
+              <a:rPr lang="en-US" dirty="0" err="1"/>
+              <a:t>nove</a:t>
+            </a:r>
+            <a:r>
+              <a:rPr lang="en-US" dirty="0"/>
+              <a:t> </a:t>
+            </a:r>
+            <a:r>
+              <a:rPr lang="en-US" dirty="0" err="1"/>
+              <a:t>ključeve</a:t>
+            </a:r>
+            <a:r>
+              <a:rPr lang="en-US" dirty="0"/>
+              <a:t> </a:t>
+            </a:r>
+            <a:r>
+              <a:rPr lang="en-US" dirty="0" err="1"/>
+              <a:t>i</a:t>
+            </a:r>
+            <a:r>
+              <a:rPr lang="en-US" dirty="0"/>
+              <a:t> </a:t>
+            </a:r>
+            <a:r>
+              <a:rPr lang="en-US" dirty="0" err="1"/>
+              <a:t>sprečavajući</a:t>
+            </a:r>
+            <a:r>
+              <a:rPr lang="en-US" dirty="0"/>
+              <a:t> </a:t>
+            </a:r>
+            <a:r>
+              <a:rPr lang="en-US" dirty="0" err="1"/>
+              <a:t>preuranjenu</a:t>
+            </a:r>
+            <a:r>
+              <a:rPr lang="en-US" dirty="0"/>
+              <a:t> </a:t>
+            </a:r>
+            <a:r>
+              <a:rPr lang="en-US" dirty="0" err="1"/>
+              <a:t>fragmentaciju</a:t>
+            </a:r>
+            <a:r>
+              <a:rPr lang="en-US" dirty="0"/>
+              <a:t>.</a:t>
+            </a:r>
+            <a:r>
+              <a:rPr lang="sr-Latn-RS" dirty="0"/>
+              <a:t> </a:t>
+            </a:r>
+            <a:r>
+              <a:rPr lang="en-US" dirty="0" err="1"/>
+              <a:t>Ključna</a:t>
+            </a:r>
+            <a:r>
+              <a:rPr lang="en-US" dirty="0"/>
+              <a:t> </a:t>
+            </a:r>
+            <a:r>
+              <a:rPr lang="en-US" dirty="0" err="1"/>
+              <a:t>prednost</a:t>
+            </a:r>
+            <a:r>
+              <a:rPr lang="en-US" dirty="0"/>
+              <a:t> B+ </a:t>
+            </a:r>
+            <a:r>
+              <a:rPr lang="en-US" dirty="0" err="1"/>
+              <a:t>stabla</a:t>
+            </a:r>
+            <a:r>
+              <a:rPr lang="en-US" dirty="0"/>
+              <a:t> je </a:t>
+            </a:r>
+            <a:r>
+              <a:rPr lang="en-US" b="1" dirty="0" err="1"/>
+              <a:t>konstantna</a:t>
+            </a:r>
+            <a:r>
+              <a:rPr lang="en-US" b="1" dirty="0"/>
+              <a:t> </a:t>
+            </a:r>
+            <a:r>
+              <a:rPr lang="en-US" b="1" dirty="0" err="1"/>
+              <a:t>dubina</a:t>
+            </a:r>
+            <a:r>
+              <a:rPr lang="en-US" dirty="0"/>
+              <a:t> — put od </a:t>
+            </a:r>
+            <a:r>
+              <a:rPr lang="en-US" dirty="0" err="1"/>
+              <a:t>korena</a:t>
+            </a:r>
+            <a:r>
+              <a:rPr lang="en-US" dirty="0"/>
+              <a:t> do </a:t>
+            </a:r>
+            <a:r>
+              <a:rPr lang="en-US" dirty="0" err="1"/>
+              <a:t>bilo</a:t>
+            </a:r>
+            <a:r>
+              <a:rPr lang="en-US" dirty="0"/>
+              <a:t> </a:t>
+            </a:r>
+            <a:r>
+              <a:rPr lang="en-US" dirty="0" err="1"/>
+              <a:t>kog</a:t>
+            </a:r>
+            <a:r>
+              <a:rPr lang="en-US" dirty="0"/>
+              <a:t> </a:t>
+            </a:r>
+            <a:r>
+              <a:rPr lang="en-US" dirty="0" err="1"/>
+              <a:t>lista</a:t>
+            </a:r>
+            <a:r>
+              <a:rPr lang="en-US" dirty="0"/>
+              <a:t> je </a:t>
+            </a:r>
+            <a:r>
+              <a:rPr lang="en-US" dirty="0" err="1"/>
+              <a:t>uvek</a:t>
+            </a:r>
+            <a:r>
+              <a:rPr lang="en-US" dirty="0"/>
+              <a:t> </a:t>
+            </a:r>
+            <a:r>
+              <a:rPr lang="en-US" dirty="0" err="1"/>
+              <a:t>iste</a:t>
+            </a:r>
+            <a:r>
+              <a:rPr lang="en-US" dirty="0"/>
+              <a:t> </a:t>
+            </a:r>
+            <a:r>
+              <a:rPr lang="en-US" dirty="0" err="1"/>
+              <a:t>dužine</a:t>
+            </a:r>
+            <a:r>
+              <a:rPr lang="en-US" dirty="0"/>
+              <a:t>, </a:t>
+            </a:r>
+            <a:r>
+              <a:rPr lang="en-US" dirty="0" err="1"/>
+              <a:t>što</a:t>
+            </a:r>
+            <a:r>
+              <a:rPr lang="en-US" dirty="0"/>
+              <a:t> </a:t>
+            </a:r>
+            <a:r>
+              <a:rPr lang="en-US" dirty="0" err="1"/>
+              <a:t>garantuje</a:t>
+            </a:r>
+            <a:r>
+              <a:rPr lang="en-US" dirty="0"/>
+              <a:t> </a:t>
+            </a:r>
+            <a:r>
+              <a:rPr lang="en-US" dirty="0" err="1"/>
+              <a:t>predvidiv</a:t>
+            </a:r>
+            <a:r>
+              <a:rPr lang="en-US" dirty="0"/>
+              <a:t> </a:t>
+            </a:r>
+            <a:r>
+              <a:rPr lang="en-US" dirty="0" err="1"/>
+              <a:t>i</a:t>
+            </a:r>
+            <a:r>
+              <a:rPr lang="en-US" dirty="0"/>
+              <a:t> </a:t>
+            </a:r>
+            <a:r>
+              <a:rPr lang="en-US" dirty="0" err="1"/>
+              <a:t>konstantan</a:t>
+            </a:r>
+            <a:r>
+              <a:rPr lang="en-US" dirty="0"/>
+              <a:t> </a:t>
+            </a:r>
+            <a:r>
+              <a:rPr lang="en-US" dirty="0" err="1"/>
+              <a:t>broj</a:t>
+            </a:r>
+            <a:r>
+              <a:rPr lang="en-US" dirty="0"/>
+              <a:t> I/O </a:t>
+            </a:r>
+            <a:r>
+              <a:rPr lang="en-US" dirty="0" err="1"/>
+              <a:t>operacija</a:t>
+            </a:r>
+            <a:r>
+              <a:rPr lang="en-US" dirty="0"/>
+              <a:t> bez </a:t>
+            </a:r>
+            <a:r>
+              <a:rPr lang="en-US" dirty="0" err="1"/>
+              <a:t>obzira</a:t>
+            </a:r>
+            <a:r>
+              <a:rPr lang="en-US" dirty="0"/>
+              <a:t> </a:t>
+            </a:r>
+            <a:r>
+              <a:rPr lang="en-US" dirty="0" err="1"/>
+              <a:t>na</a:t>
+            </a:r>
+            <a:r>
+              <a:rPr lang="en-US" dirty="0"/>
+              <a:t> </a:t>
+            </a:r>
+            <a:r>
+              <a:rPr lang="en-US" dirty="0" err="1"/>
+              <a:t>veličinu</a:t>
+            </a:r>
+            <a:r>
+              <a:rPr lang="en-US" dirty="0"/>
+              <a:t> </a:t>
+            </a:r>
+            <a:r>
+              <a:rPr lang="en-US" dirty="0" err="1"/>
+              <a:t>tabele</a:t>
+            </a:r>
+            <a:r>
+              <a:rPr lang="en-US" dirty="0"/>
+              <a:t>.</a:t>
+            </a:r>
+          </a:p>
+          <a:p>
             <a:endParaRPr lang="en-US" dirty="0"/>
           </a:p>
         </p:txBody>
@@ -1132,6 +5905,828 @@
           <a:bodyPr/>
           <a:lstStyle/>
           <a:p>
+            <a:r>
+              <a:rPr lang="en-US" dirty="0" err="1"/>
+              <a:t>Prefiksna</a:t>
+            </a:r>
+            <a:r>
+              <a:rPr lang="en-US" dirty="0"/>
+              <a:t> </a:t>
+            </a:r>
+            <a:r>
+              <a:rPr lang="en-US" dirty="0" err="1"/>
+              <a:t>kompresija</a:t>
+            </a:r>
+            <a:r>
+              <a:rPr lang="en-US" dirty="0"/>
+              <a:t> je </a:t>
+            </a:r>
+            <a:r>
+              <a:rPr lang="en-US" dirty="0" err="1"/>
+              <a:t>tehnika</a:t>
+            </a:r>
+            <a:r>
+              <a:rPr lang="en-US" dirty="0"/>
+              <a:t> </a:t>
+            </a:r>
+            <a:r>
+              <a:rPr lang="en-US" dirty="0" err="1"/>
+              <a:t>kojom</a:t>
+            </a:r>
+            <a:r>
+              <a:rPr lang="en-US" dirty="0"/>
+              <a:t> Firebird </a:t>
+            </a:r>
+            <a:r>
+              <a:rPr lang="en-US" dirty="0" err="1"/>
+              <a:t>smanjuje</a:t>
+            </a:r>
+            <a:r>
+              <a:rPr lang="en-US" dirty="0"/>
+              <a:t> </a:t>
+            </a:r>
+            <a:r>
+              <a:rPr lang="en-US" dirty="0" err="1"/>
+              <a:t>prostor</a:t>
+            </a:r>
+            <a:r>
+              <a:rPr lang="en-US" dirty="0"/>
+              <a:t> koji </a:t>
+            </a:r>
+            <a:r>
+              <a:rPr lang="en-US" dirty="0" err="1"/>
+              <a:t>indeksi</a:t>
+            </a:r>
+            <a:r>
+              <a:rPr lang="en-US" dirty="0"/>
+              <a:t> </a:t>
+            </a:r>
+            <a:r>
+              <a:rPr lang="en-US" dirty="0" err="1"/>
+              <a:t>zauzimaju</a:t>
+            </a:r>
+            <a:r>
+              <a:rPr lang="en-US" dirty="0"/>
+              <a:t> — </a:t>
+            </a:r>
+            <a:r>
+              <a:rPr lang="en-US" dirty="0" err="1"/>
+              <a:t>umesto</a:t>
+            </a:r>
+            <a:r>
+              <a:rPr lang="en-US" dirty="0"/>
+              <a:t> da </a:t>
+            </a:r>
+            <a:r>
+              <a:rPr lang="en-US" dirty="0" err="1"/>
+              <a:t>čuva</a:t>
+            </a:r>
+            <a:r>
+              <a:rPr lang="en-US" dirty="0"/>
+              <a:t> </a:t>
+            </a:r>
+            <a:r>
+              <a:rPr lang="en-US" dirty="0" err="1"/>
+              <a:t>svaki</a:t>
+            </a:r>
+            <a:r>
+              <a:rPr lang="en-US" dirty="0"/>
+              <a:t> </a:t>
+            </a:r>
+            <a:r>
+              <a:rPr lang="en-US" dirty="0" err="1"/>
+              <a:t>ključ</a:t>
+            </a:r>
+            <a:r>
+              <a:rPr lang="en-US" dirty="0"/>
+              <a:t> u </a:t>
+            </a:r>
+            <a:r>
+              <a:rPr lang="en-US" dirty="0" err="1"/>
+              <a:t>celosti</a:t>
+            </a:r>
+            <a:r>
+              <a:rPr lang="en-US" dirty="0"/>
+              <a:t>, </a:t>
+            </a:r>
+            <a:r>
+              <a:rPr lang="en-US" dirty="0" err="1"/>
+              <a:t>čuva</a:t>
+            </a:r>
+            <a:r>
+              <a:rPr lang="en-US" dirty="0"/>
+              <a:t> </a:t>
+            </a:r>
+            <a:r>
+              <a:rPr lang="en-US" dirty="0" err="1"/>
+              <a:t>samo</a:t>
+            </a:r>
+            <a:r>
+              <a:rPr lang="en-US" dirty="0"/>
+              <a:t> deo koji se </a:t>
+            </a:r>
+            <a:r>
+              <a:rPr lang="en-US" dirty="0" err="1"/>
+              <a:t>razlikuje</a:t>
+            </a:r>
+            <a:r>
+              <a:rPr lang="en-US" dirty="0"/>
+              <a:t> od </a:t>
+            </a:r>
+            <a:r>
+              <a:rPr lang="en-US" dirty="0" err="1"/>
+              <a:t>prethodnog</a:t>
+            </a:r>
+            <a:r>
+              <a:rPr lang="en-US" dirty="0"/>
+              <a:t> </a:t>
+            </a:r>
+            <a:r>
+              <a:rPr lang="en-US" dirty="0" err="1"/>
+              <a:t>ključa</a:t>
+            </a:r>
+            <a:r>
+              <a:rPr lang="en-US" dirty="0"/>
+              <a:t>.</a:t>
+            </a:r>
+          </a:p>
+          <a:p>
+            <a:r>
+              <a:rPr lang="en-US" dirty="0"/>
+              <a:t>Na </a:t>
+            </a:r>
+            <a:r>
+              <a:rPr lang="en-US" dirty="0" err="1"/>
+              <a:t>primeru</a:t>
+            </a:r>
+            <a:r>
+              <a:rPr lang="en-US" dirty="0"/>
+              <a:t> </a:t>
+            </a:r>
+            <a:r>
+              <a:rPr lang="en-US" dirty="0" err="1"/>
+              <a:t>prezimena</a:t>
+            </a:r>
+            <a:r>
+              <a:rPr lang="en-US" dirty="0"/>
+              <a:t> — "Petrov" se </a:t>
+            </a:r>
+            <a:r>
+              <a:rPr lang="en-US" dirty="0" err="1"/>
+              <a:t>čuva</a:t>
+            </a:r>
+            <a:r>
+              <a:rPr lang="en-US" dirty="0"/>
+              <a:t> </a:t>
+            </a:r>
+            <a:r>
+              <a:rPr lang="en-US" dirty="0" err="1"/>
+              <a:t>ceo</a:t>
+            </a:r>
+            <a:r>
+              <a:rPr lang="en-US" dirty="0"/>
+              <a:t>, "Petrović" </a:t>
+            </a:r>
+            <a:r>
+              <a:rPr lang="en-US" dirty="0" err="1"/>
+              <a:t>čuva</a:t>
+            </a:r>
+            <a:r>
+              <a:rPr lang="en-US" dirty="0"/>
+              <a:t> </a:t>
+            </a:r>
+            <a:r>
+              <a:rPr lang="en-US" dirty="0" err="1"/>
+              <a:t>samo</a:t>
+            </a:r>
+            <a:r>
+              <a:rPr lang="en-US" dirty="0"/>
+              <a:t> "</a:t>
+            </a:r>
+            <a:r>
+              <a:rPr lang="en-US" dirty="0" err="1"/>
+              <a:t>ić</a:t>
+            </a:r>
+            <a:r>
+              <a:rPr lang="en-US" dirty="0"/>
+              <a:t>" </a:t>
+            </a:r>
+            <a:r>
+              <a:rPr lang="en-US" dirty="0" err="1"/>
+              <a:t>jer</a:t>
+            </a:r>
+            <a:r>
+              <a:rPr lang="en-US" dirty="0"/>
+              <a:t> </a:t>
+            </a:r>
+            <a:r>
+              <a:rPr lang="en-US" dirty="0" err="1"/>
+              <a:t>prvih</a:t>
+            </a:r>
+            <a:r>
+              <a:rPr lang="en-US" dirty="0"/>
+              <a:t> 6 </a:t>
+            </a:r>
+            <a:r>
+              <a:rPr lang="en-US" dirty="0" err="1"/>
+              <a:t>slova</a:t>
+            </a:r>
+            <a:r>
+              <a:rPr lang="en-US" dirty="0"/>
+              <a:t> </a:t>
+            </a:r>
+            <a:r>
+              <a:rPr lang="en-US" dirty="0" err="1"/>
+              <a:t>su</a:t>
+            </a:r>
+            <a:r>
+              <a:rPr lang="en-US" dirty="0"/>
+              <a:t> </a:t>
+            </a:r>
+            <a:r>
+              <a:rPr lang="en-US" dirty="0" err="1"/>
+              <a:t>ista</a:t>
+            </a:r>
+            <a:r>
+              <a:rPr lang="en-US" dirty="0"/>
+              <a:t> </a:t>
+            </a:r>
+            <a:r>
+              <a:rPr lang="en-US" dirty="0" err="1"/>
+              <a:t>kao</a:t>
+            </a:r>
+            <a:r>
+              <a:rPr lang="en-US" dirty="0"/>
+              <a:t> </a:t>
+            </a:r>
+            <a:r>
+              <a:rPr lang="en-US" dirty="0" err="1"/>
+              <a:t>kod</a:t>
+            </a:r>
+            <a:r>
+              <a:rPr lang="en-US" dirty="0"/>
+              <a:t> "Petrov", a "</a:t>
+            </a:r>
+            <a:r>
+              <a:rPr lang="en-US" dirty="0" err="1"/>
+              <a:t>Petronijević</a:t>
+            </a:r>
+            <a:r>
+              <a:rPr lang="en-US" dirty="0"/>
+              <a:t>" </a:t>
+            </a:r>
+            <a:r>
+              <a:rPr lang="en-US" dirty="0" err="1"/>
+              <a:t>čuva</a:t>
+            </a:r>
+            <a:r>
+              <a:rPr lang="en-US" dirty="0"/>
+              <a:t> </a:t>
+            </a:r>
+            <a:r>
+              <a:rPr lang="en-US" dirty="0" err="1"/>
+              <a:t>samo</a:t>
+            </a:r>
+            <a:r>
+              <a:rPr lang="en-US" dirty="0"/>
+              <a:t> "</a:t>
+            </a:r>
+            <a:r>
+              <a:rPr lang="en-US" dirty="0" err="1"/>
+              <a:t>nijević</a:t>
+            </a:r>
+            <a:r>
+              <a:rPr lang="en-US" dirty="0"/>
+              <a:t>" </a:t>
+            </a:r>
+            <a:r>
+              <a:rPr lang="en-US" dirty="0" err="1"/>
+              <a:t>jer</a:t>
+            </a:r>
+            <a:r>
+              <a:rPr lang="en-US" dirty="0"/>
+              <a:t> </a:t>
+            </a:r>
+            <a:r>
+              <a:rPr lang="en-US" dirty="0" err="1"/>
+              <a:t>prvih</a:t>
+            </a:r>
+            <a:r>
+              <a:rPr lang="en-US" dirty="0"/>
+              <a:t> 5 </a:t>
+            </a:r>
+            <a:r>
+              <a:rPr lang="en-US" dirty="0" err="1"/>
+              <a:t>slova</a:t>
+            </a:r>
+            <a:r>
+              <a:rPr lang="en-US" dirty="0"/>
+              <a:t> deli </a:t>
+            </a:r>
+            <a:r>
+              <a:rPr lang="en-US" dirty="0" err="1"/>
+              <a:t>sa</a:t>
+            </a:r>
+            <a:r>
+              <a:rPr lang="en-US" dirty="0"/>
+              <a:t> "Petrov".</a:t>
+            </a:r>
+          </a:p>
+          <a:p>
+            <a:r>
+              <a:rPr lang="en-US" dirty="0"/>
+              <a:t>Ova </a:t>
+            </a:r>
+            <a:r>
+              <a:rPr lang="en-US" dirty="0" err="1"/>
+              <a:t>tehnika</a:t>
+            </a:r>
+            <a:r>
+              <a:rPr lang="en-US" dirty="0"/>
+              <a:t> </a:t>
+            </a:r>
+            <a:r>
+              <a:rPr lang="en-US" dirty="0" err="1"/>
+              <a:t>može</a:t>
+            </a:r>
+            <a:r>
+              <a:rPr lang="en-US" dirty="0"/>
+              <a:t> </a:t>
+            </a:r>
+            <a:r>
+              <a:rPr lang="en-US" dirty="0" err="1"/>
+              <a:t>smanjiti</a:t>
+            </a:r>
+            <a:r>
+              <a:rPr lang="en-US" dirty="0"/>
+              <a:t> </a:t>
+            </a:r>
+            <a:r>
+              <a:rPr lang="en-US" dirty="0" err="1"/>
+              <a:t>ukupnu</a:t>
+            </a:r>
+            <a:r>
+              <a:rPr lang="en-US" dirty="0"/>
+              <a:t> </a:t>
+            </a:r>
+            <a:r>
+              <a:rPr lang="en-US" dirty="0" err="1"/>
+              <a:t>veličinu</a:t>
+            </a:r>
+            <a:r>
+              <a:rPr lang="en-US" dirty="0"/>
+              <a:t> </a:t>
+            </a:r>
+            <a:r>
+              <a:rPr lang="en-US" dirty="0" err="1"/>
+              <a:t>indeksa</a:t>
+            </a:r>
+            <a:r>
+              <a:rPr lang="en-US" dirty="0"/>
+              <a:t> za </a:t>
+            </a:r>
+            <a:r>
+              <a:rPr lang="en-US" dirty="0" err="1"/>
+              <a:t>više</a:t>
+            </a:r>
+            <a:r>
+              <a:rPr lang="en-US" dirty="0"/>
+              <a:t> od 50%, </a:t>
+            </a:r>
+            <a:r>
+              <a:rPr lang="en-US" dirty="0" err="1"/>
+              <a:t>naročito</a:t>
+            </a:r>
+            <a:r>
+              <a:rPr lang="en-US" dirty="0"/>
+              <a:t> </a:t>
+            </a:r>
+            <a:r>
+              <a:rPr lang="en-US" dirty="0" err="1"/>
+              <a:t>kod</a:t>
+            </a:r>
+            <a:r>
+              <a:rPr lang="en-US" dirty="0"/>
+              <a:t> </a:t>
+            </a:r>
+            <a:r>
+              <a:rPr lang="en-US" dirty="0" err="1"/>
+              <a:t>kompozitnih</a:t>
+            </a:r>
+            <a:r>
+              <a:rPr lang="en-US" dirty="0"/>
+              <a:t> </a:t>
+            </a:r>
+            <a:r>
+              <a:rPr lang="en-US" dirty="0" err="1"/>
+              <a:t>indeksa</a:t>
+            </a:r>
+            <a:r>
+              <a:rPr lang="en-US" dirty="0"/>
+              <a:t> </a:t>
+            </a:r>
+            <a:r>
+              <a:rPr lang="en-US" dirty="0" err="1"/>
+              <a:t>gde</a:t>
+            </a:r>
+            <a:r>
+              <a:rPr lang="en-US" dirty="0"/>
+              <a:t> se </a:t>
+            </a:r>
+            <a:r>
+              <a:rPr lang="en-US" dirty="0" err="1"/>
+              <a:t>vodeći</a:t>
+            </a:r>
+            <a:r>
+              <a:rPr lang="en-US" dirty="0"/>
+              <a:t> </a:t>
+            </a:r>
+            <a:r>
+              <a:rPr lang="en-US" dirty="0" err="1"/>
+              <a:t>segmenti</a:t>
+            </a:r>
+            <a:r>
+              <a:rPr lang="en-US" dirty="0"/>
+              <a:t> </a:t>
+            </a:r>
+            <a:r>
+              <a:rPr lang="en-US" dirty="0" err="1"/>
+              <a:t>ponavljaju</a:t>
+            </a:r>
+            <a:r>
+              <a:rPr lang="en-US" dirty="0"/>
+              <a:t> u </a:t>
+            </a:r>
+            <a:r>
+              <a:rPr lang="en-US" dirty="0" err="1"/>
+              <a:t>hiljadama</a:t>
+            </a:r>
+            <a:r>
+              <a:rPr lang="en-US" dirty="0"/>
+              <a:t> </a:t>
+            </a:r>
+            <a:r>
+              <a:rPr lang="en-US" dirty="0" err="1"/>
+              <a:t>redova</a:t>
+            </a:r>
+            <a:r>
+              <a:rPr lang="en-US" dirty="0"/>
+              <a:t>.</a:t>
+            </a:r>
+          </a:p>
+          <a:p>
+            <a:r>
+              <a:rPr lang="en-US" dirty="0" err="1"/>
+              <a:t>Kod</a:t>
+            </a:r>
+            <a:r>
+              <a:rPr lang="en-US" dirty="0"/>
+              <a:t> non-unique </a:t>
+            </a:r>
+            <a:r>
+              <a:rPr lang="en-US" dirty="0" err="1"/>
+              <a:t>indeksa</a:t>
+            </a:r>
+            <a:r>
+              <a:rPr lang="en-US" dirty="0"/>
+              <a:t> koji </a:t>
+            </a:r>
+            <a:r>
+              <a:rPr lang="en-US" dirty="0" err="1"/>
+              <a:t>dozvoljavaju</a:t>
+            </a:r>
+            <a:r>
+              <a:rPr lang="en-US" dirty="0"/>
+              <a:t> </a:t>
+            </a:r>
+            <a:r>
+              <a:rPr lang="en-US" dirty="0" err="1"/>
+              <a:t>duplikate</a:t>
+            </a:r>
+            <a:r>
+              <a:rPr lang="en-US" dirty="0"/>
+              <a:t>, Firebird ne </a:t>
+            </a:r>
+            <a:r>
+              <a:rPr lang="en-US" dirty="0" err="1"/>
+              <a:t>ponavlja</a:t>
+            </a:r>
+            <a:r>
+              <a:rPr lang="en-US" dirty="0"/>
+              <a:t> </a:t>
+            </a:r>
+            <a:r>
+              <a:rPr lang="en-US" dirty="0" err="1"/>
+              <a:t>isti</a:t>
+            </a:r>
+            <a:r>
+              <a:rPr lang="en-US" dirty="0"/>
+              <a:t> </a:t>
+            </a:r>
+            <a:r>
+              <a:rPr lang="en-US" dirty="0" err="1"/>
+              <a:t>ključ</a:t>
+            </a:r>
+            <a:r>
+              <a:rPr lang="en-US" dirty="0"/>
+              <a:t> za </a:t>
+            </a:r>
+            <a:r>
+              <a:rPr lang="en-US" dirty="0" err="1"/>
+              <a:t>svaki</a:t>
+            </a:r>
+            <a:r>
+              <a:rPr lang="en-US" dirty="0"/>
+              <a:t> red — </a:t>
+            </a:r>
+            <a:r>
+              <a:rPr lang="en-US" dirty="0" err="1"/>
+              <a:t>umesto</a:t>
+            </a:r>
+            <a:r>
+              <a:rPr lang="en-US" dirty="0"/>
+              <a:t> toga </a:t>
+            </a:r>
+            <a:r>
+              <a:rPr lang="en-US" dirty="0" err="1"/>
+              <a:t>grupiše</a:t>
+            </a:r>
+            <a:r>
+              <a:rPr lang="en-US" dirty="0"/>
+              <a:t> </a:t>
+            </a:r>
+            <a:r>
+              <a:rPr lang="en-US" dirty="0" err="1"/>
+              <a:t>sve</a:t>
+            </a:r>
+            <a:r>
+              <a:rPr lang="en-US" dirty="0"/>
+              <a:t> RDB$DB_KEY </a:t>
+            </a:r>
+            <a:r>
+              <a:rPr lang="en-US" dirty="0" err="1"/>
+              <a:t>adrese</a:t>
+            </a:r>
+            <a:r>
+              <a:rPr lang="en-US" dirty="0"/>
+              <a:t> pod </a:t>
+            </a:r>
+            <a:r>
+              <a:rPr lang="en-US" dirty="0" err="1"/>
+              <a:t>jednom</a:t>
+            </a:r>
+            <a:r>
+              <a:rPr lang="en-US" dirty="0"/>
+              <a:t> </a:t>
+            </a:r>
+            <a:r>
+              <a:rPr lang="en-US" dirty="0" err="1"/>
+              <a:t>binarnom</a:t>
+            </a:r>
+            <a:r>
+              <a:rPr lang="en-US" dirty="0"/>
+              <a:t> </a:t>
+            </a:r>
+            <a:r>
+              <a:rPr lang="en-US" dirty="0" err="1"/>
+              <a:t>reprezentacijom</a:t>
+            </a:r>
+            <a:r>
+              <a:rPr lang="en-US" dirty="0"/>
+              <a:t> </a:t>
+            </a:r>
+            <a:r>
+              <a:rPr lang="en-US" dirty="0" err="1"/>
+              <a:t>ključa</a:t>
+            </a:r>
+            <a:r>
+              <a:rPr lang="en-US" dirty="0"/>
+              <a:t>, </a:t>
+            </a:r>
+            <a:r>
+              <a:rPr lang="en-US" dirty="0" err="1"/>
+              <a:t>što</a:t>
+            </a:r>
+            <a:r>
+              <a:rPr lang="en-US" dirty="0"/>
+              <a:t> </a:t>
+            </a:r>
+            <a:r>
+              <a:rPr lang="en-US" dirty="0" err="1"/>
+              <a:t>štedi</a:t>
+            </a:r>
+            <a:r>
+              <a:rPr lang="en-US" dirty="0"/>
+              <a:t> </a:t>
+            </a:r>
+            <a:r>
+              <a:rPr lang="en-US" dirty="0" err="1"/>
+              <a:t>prostor</a:t>
+            </a:r>
+            <a:r>
+              <a:rPr lang="en-US" dirty="0"/>
+              <a:t> u Buffer Pool-u.</a:t>
+            </a:r>
+          </a:p>
+          <a:p>
+            <a:r>
+              <a:rPr lang="en-US" dirty="0"/>
+              <a:t>NULL </a:t>
+            </a:r>
+            <a:r>
+              <a:rPr lang="en-US" dirty="0" err="1"/>
+              <a:t>vrednosti</a:t>
+            </a:r>
+            <a:r>
+              <a:rPr lang="en-US" dirty="0"/>
+              <a:t> Firebird </a:t>
+            </a:r>
+            <a:r>
+              <a:rPr lang="en-US" dirty="0" err="1"/>
+              <a:t>tretira</a:t>
+            </a:r>
+            <a:r>
+              <a:rPr lang="en-US" dirty="0"/>
+              <a:t> </a:t>
+            </a:r>
+            <a:r>
+              <a:rPr lang="en-US" dirty="0" err="1"/>
+              <a:t>kao</a:t>
+            </a:r>
+            <a:r>
+              <a:rPr lang="en-US" dirty="0"/>
+              <a:t> </a:t>
+            </a:r>
+            <a:r>
+              <a:rPr lang="en-US" dirty="0" err="1"/>
+              <a:t>ravnopravne</a:t>
+            </a:r>
+            <a:r>
+              <a:rPr lang="en-US" dirty="0"/>
+              <a:t> </a:t>
+            </a:r>
+            <a:r>
+              <a:rPr lang="en-US" dirty="0" err="1"/>
+              <a:t>elemente</a:t>
+            </a:r>
+            <a:r>
+              <a:rPr lang="en-US" dirty="0"/>
+              <a:t> </a:t>
+            </a:r>
+            <a:r>
+              <a:rPr lang="en-US" dirty="0" err="1"/>
+              <a:t>indeksa</a:t>
+            </a:r>
+            <a:r>
+              <a:rPr lang="en-US" dirty="0"/>
+              <a:t> — </a:t>
+            </a:r>
+            <a:r>
+              <a:rPr lang="en-US" dirty="0" err="1"/>
+              <a:t>pozicionira</a:t>
+            </a:r>
+            <a:r>
+              <a:rPr lang="en-US" dirty="0"/>
+              <a:t> </a:t>
+            </a:r>
+            <a:r>
+              <a:rPr lang="en-US" dirty="0" err="1"/>
+              <a:t>ih</a:t>
+            </a:r>
+            <a:r>
+              <a:rPr lang="en-US" dirty="0"/>
+              <a:t> </a:t>
+            </a:r>
+            <a:r>
+              <a:rPr lang="en-US" dirty="0" err="1"/>
+              <a:t>kao</a:t>
+            </a:r>
+            <a:r>
+              <a:rPr lang="en-US" dirty="0"/>
+              <a:t> </a:t>
+            </a:r>
+            <a:r>
+              <a:rPr lang="en-US" dirty="0" err="1"/>
+              <a:t>najmanje</a:t>
+            </a:r>
+            <a:r>
+              <a:rPr lang="en-US" dirty="0"/>
+              <a:t> </a:t>
+            </a:r>
+            <a:r>
+              <a:rPr lang="en-US" dirty="0" err="1"/>
+              <a:t>moguće</a:t>
+            </a:r>
+            <a:r>
+              <a:rPr lang="en-US" dirty="0"/>
+              <a:t> </a:t>
+            </a:r>
+            <a:r>
+              <a:rPr lang="en-US" dirty="0" err="1"/>
+              <a:t>vrednosti</a:t>
+            </a:r>
+            <a:r>
+              <a:rPr lang="en-US" dirty="0"/>
+              <a:t> </a:t>
+            </a:r>
+            <a:r>
+              <a:rPr lang="en-US" dirty="0" err="1"/>
+              <a:t>na</a:t>
+            </a:r>
+            <a:r>
+              <a:rPr lang="en-US" dirty="0"/>
+              <a:t> </a:t>
+            </a:r>
+            <a:r>
+              <a:rPr lang="en-US" dirty="0" err="1"/>
+              <a:t>samom</a:t>
+            </a:r>
+            <a:r>
+              <a:rPr lang="en-US" dirty="0"/>
+              <a:t> </a:t>
+            </a:r>
+            <a:r>
+              <a:rPr lang="en-US" dirty="0" err="1"/>
+              <a:t>početku</a:t>
+            </a:r>
+            <a:r>
+              <a:rPr lang="en-US" dirty="0"/>
+              <a:t> B+ </a:t>
+            </a:r>
+            <a:r>
+              <a:rPr lang="en-US" dirty="0" err="1"/>
+              <a:t>stabla</a:t>
+            </a:r>
+            <a:r>
+              <a:rPr lang="en-US" dirty="0"/>
+              <a:t>, </a:t>
+            </a:r>
+            <a:r>
+              <a:rPr lang="en-US" dirty="0" err="1"/>
+              <a:t>što</a:t>
+            </a:r>
+            <a:r>
+              <a:rPr lang="en-US" dirty="0"/>
+              <a:t> </a:t>
+            </a:r>
+            <a:r>
+              <a:rPr lang="en-US" dirty="0" err="1"/>
+              <a:t>znači</a:t>
+            </a:r>
+            <a:r>
+              <a:rPr lang="en-US" dirty="0"/>
+              <a:t> da </a:t>
+            </a:r>
+            <a:r>
+              <a:rPr lang="en-US" dirty="0" err="1"/>
+              <a:t>upiti</a:t>
+            </a:r>
+            <a:r>
+              <a:rPr lang="en-US" dirty="0"/>
+              <a:t> </a:t>
+            </a:r>
+            <a:r>
+              <a:rPr lang="en-US" dirty="0" err="1"/>
+              <a:t>sa</a:t>
+            </a:r>
+            <a:r>
+              <a:rPr lang="en-US" dirty="0"/>
+              <a:t> IS NULL </a:t>
+            </a:r>
+            <a:r>
+              <a:rPr lang="en-US" dirty="0" err="1"/>
+              <a:t>koriste</a:t>
+            </a:r>
+            <a:r>
+              <a:rPr lang="en-US" dirty="0"/>
+              <a:t> </a:t>
+            </a:r>
+            <a:r>
+              <a:rPr lang="en-US" dirty="0" err="1"/>
+              <a:t>indeksnu</a:t>
+            </a:r>
+            <a:r>
+              <a:rPr lang="en-US" dirty="0"/>
+              <a:t> </a:t>
+            </a:r>
+            <a:r>
+              <a:rPr lang="en-US" dirty="0" err="1"/>
+              <a:t>navigaciju</a:t>
+            </a:r>
+            <a:r>
+              <a:rPr lang="en-US" dirty="0"/>
+              <a:t> bez </a:t>
+            </a:r>
+            <a:r>
+              <a:rPr lang="en-US" dirty="0" err="1"/>
+              <a:t>skupog</a:t>
+            </a:r>
+            <a:r>
+              <a:rPr lang="en-US" dirty="0"/>
+              <a:t> Full Table Scan-a.</a:t>
+            </a:r>
+          </a:p>
+          <a:p>
             <a:endParaRPr lang="en-US" dirty="0"/>
           </a:p>
         </p:txBody>
@@ -1215,6 +6810,973 @@
         <p:txBody>
           <a:bodyPr/>
           <a:lstStyle/>
+          <a:p>
+            <a:r>
+              <a:rPr lang="en-US" dirty="0"/>
+              <a:t>U </a:t>
+            </a:r>
+            <a:r>
+              <a:rPr lang="en-US" dirty="0" err="1"/>
+              <a:t>Firebirdu</a:t>
+            </a:r>
+            <a:r>
+              <a:rPr lang="en-US" dirty="0"/>
+              <a:t> </a:t>
+            </a:r>
+            <a:r>
+              <a:rPr lang="en-US" dirty="0" err="1"/>
+              <a:t>postoje</a:t>
+            </a:r>
+            <a:r>
+              <a:rPr lang="en-US" dirty="0"/>
+              <a:t> </a:t>
+            </a:r>
+            <a:r>
+              <a:rPr lang="en-US" dirty="0" err="1"/>
+              <a:t>četiri</a:t>
+            </a:r>
+            <a:r>
+              <a:rPr lang="en-US" dirty="0"/>
+              <a:t> </a:t>
+            </a:r>
+            <a:r>
+              <a:rPr lang="en-US" dirty="0" err="1"/>
+              <a:t>tipa</a:t>
+            </a:r>
+            <a:r>
+              <a:rPr lang="en-US" dirty="0"/>
+              <a:t> </a:t>
+            </a:r>
+            <a:r>
+              <a:rPr lang="en-US" dirty="0" err="1"/>
+              <a:t>indeksa</a:t>
+            </a:r>
+            <a:r>
+              <a:rPr lang="en-US" dirty="0"/>
+              <a:t>, a </a:t>
+            </a:r>
+            <a:r>
+              <a:rPr lang="en-US" dirty="0" err="1"/>
+              <a:t>svaki</a:t>
+            </a:r>
+            <a:r>
+              <a:rPr lang="en-US" dirty="0"/>
+              <a:t> </a:t>
+            </a:r>
+            <a:r>
+              <a:rPr lang="en-US" dirty="0" err="1"/>
+              <a:t>ima</a:t>
+            </a:r>
+            <a:r>
+              <a:rPr lang="en-US" dirty="0"/>
+              <a:t> </a:t>
+            </a:r>
+            <a:r>
+              <a:rPr lang="en-US" dirty="0" err="1"/>
+              <a:t>specifičnu</a:t>
+            </a:r>
+            <a:r>
+              <a:rPr lang="en-US" dirty="0"/>
+              <a:t> </a:t>
+            </a:r>
+            <a:r>
+              <a:rPr lang="en-US" dirty="0" err="1"/>
+              <a:t>ulogu</a:t>
+            </a:r>
+            <a:r>
+              <a:rPr lang="en-US" dirty="0"/>
+              <a:t> u </a:t>
+            </a:r>
+            <a:r>
+              <a:rPr lang="en-US" dirty="0" err="1"/>
+              <a:t>održavanju</a:t>
+            </a:r>
+            <a:r>
+              <a:rPr lang="en-US" dirty="0"/>
+              <a:t> </a:t>
+            </a:r>
+            <a:r>
+              <a:rPr lang="en-US" dirty="0" err="1"/>
+              <a:t>performansi</a:t>
+            </a:r>
+            <a:r>
+              <a:rPr lang="en-US" dirty="0"/>
+              <a:t> </a:t>
+            </a:r>
+            <a:r>
+              <a:rPr lang="en-US" dirty="0" err="1"/>
+              <a:t>i</a:t>
+            </a:r>
+            <a:r>
+              <a:rPr lang="en-US" dirty="0"/>
+              <a:t> </a:t>
+            </a:r>
+            <a:r>
+              <a:rPr lang="en-US" dirty="0" err="1"/>
+              <a:t>integriteta</a:t>
+            </a:r>
+            <a:r>
+              <a:rPr lang="en-US" dirty="0"/>
+              <a:t> </a:t>
+            </a:r>
+            <a:r>
+              <a:rPr lang="en-US" dirty="0" err="1"/>
+              <a:t>baze</a:t>
+            </a:r>
+            <a:r>
+              <a:rPr lang="en-US" dirty="0"/>
+              <a:t>.</a:t>
+            </a:r>
+          </a:p>
+          <a:p>
+            <a:r>
+              <a:rPr lang="en-US" dirty="0" err="1"/>
+              <a:t>Primarni</a:t>
+            </a:r>
+            <a:r>
+              <a:rPr lang="en-US" dirty="0"/>
+              <a:t> </a:t>
+            </a:r>
+            <a:r>
+              <a:rPr lang="en-US" dirty="0" err="1"/>
+              <a:t>ključ</a:t>
+            </a:r>
+            <a:r>
+              <a:rPr lang="en-US" dirty="0"/>
+              <a:t> se </a:t>
+            </a:r>
+            <a:r>
+              <a:rPr lang="en-US" dirty="0" err="1"/>
+              <a:t>automatski</a:t>
+            </a:r>
+            <a:r>
+              <a:rPr lang="en-US" dirty="0"/>
+              <a:t> </a:t>
+            </a:r>
+            <a:r>
+              <a:rPr lang="en-US" dirty="0" err="1"/>
+              <a:t>kreira</a:t>
+            </a:r>
+            <a:r>
+              <a:rPr lang="en-US" dirty="0"/>
+              <a:t> </a:t>
+            </a:r>
+            <a:r>
+              <a:rPr lang="en-US" dirty="0" err="1"/>
+              <a:t>pri</a:t>
+            </a:r>
+            <a:r>
+              <a:rPr lang="en-US" dirty="0"/>
+              <a:t> </a:t>
+            </a:r>
+            <a:r>
+              <a:rPr lang="en-US" dirty="0" err="1"/>
+              <a:t>definisanju</a:t>
+            </a:r>
+            <a:r>
+              <a:rPr lang="en-US" dirty="0"/>
+              <a:t> PRIMARY KEY </a:t>
+            </a:r>
+            <a:r>
+              <a:rPr lang="en-US" dirty="0" err="1"/>
+              <a:t>ograničenja</a:t>
+            </a:r>
+            <a:r>
+              <a:rPr lang="en-US" dirty="0"/>
+              <a:t> </a:t>
+            </a:r>
+            <a:r>
+              <a:rPr lang="en-US" dirty="0" err="1"/>
+              <a:t>i</a:t>
+            </a:r>
+            <a:r>
+              <a:rPr lang="en-US" dirty="0"/>
+              <a:t> </a:t>
+            </a:r>
+            <a:r>
+              <a:rPr lang="en-US" dirty="0" err="1"/>
+              <a:t>ima</a:t>
+            </a:r>
+            <a:r>
+              <a:rPr lang="en-US" dirty="0"/>
+              <a:t> </a:t>
+            </a:r>
+            <a:r>
+              <a:rPr lang="en-US" dirty="0" err="1"/>
+              <a:t>najnižu</a:t>
+            </a:r>
+            <a:r>
+              <a:rPr lang="en-US" dirty="0"/>
+              <a:t> </a:t>
+            </a:r>
+            <a:r>
+              <a:rPr lang="en-US" dirty="0" err="1"/>
+              <a:t>moguću</a:t>
+            </a:r>
+            <a:r>
+              <a:rPr lang="en-US" dirty="0"/>
+              <a:t> </a:t>
+            </a:r>
+            <a:r>
+              <a:rPr lang="en-US" dirty="0" err="1"/>
+              <a:t>selektivnost</a:t>
+            </a:r>
+            <a:r>
+              <a:rPr lang="en-US" dirty="0"/>
+              <a:t> </a:t>
+            </a:r>
+            <a:r>
+              <a:rPr lang="en-US" dirty="0" err="1"/>
+              <a:t>jer</a:t>
+            </a:r>
+            <a:r>
+              <a:rPr lang="en-US" dirty="0"/>
+              <a:t> je </a:t>
+            </a:r>
+            <a:r>
+              <a:rPr lang="en-US" dirty="0" err="1"/>
+              <a:t>svaki</a:t>
+            </a:r>
+            <a:r>
+              <a:rPr lang="en-US" dirty="0"/>
+              <a:t> red </a:t>
+            </a:r>
+            <a:r>
+              <a:rPr lang="en-US" dirty="0" err="1"/>
+              <a:t>jedinstven</a:t>
+            </a:r>
+            <a:r>
+              <a:rPr lang="en-US" dirty="0"/>
+              <a:t> — </a:t>
+            </a:r>
+            <a:r>
+              <a:rPr lang="en-US" dirty="0" err="1"/>
+              <a:t>preporučuje</a:t>
+            </a:r>
+            <a:r>
+              <a:rPr lang="en-US" dirty="0"/>
+              <a:t> se </a:t>
+            </a:r>
+            <a:r>
+              <a:rPr lang="en-US" dirty="0" err="1"/>
+              <a:t>uski</a:t>
+            </a:r>
+            <a:r>
+              <a:rPr lang="en-US" dirty="0"/>
+              <a:t> tip </a:t>
+            </a:r>
+            <a:r>
+              <a:rPr lang="en-US" dirty="0" err="1"/>
+              <a:t>podatka</a:t>
+            </a:r>
+            <a:r>
+              <a:rPr lang="en-US" dirty="0"/>
+              <a:t> </a:t>
+            </a:r>
+            <a:r>
+              <a:rPr lang="en-US" dirty="0" err="1"/>
+              <a:t>poput</a:t>
+            </a:r>
+            <a:r>
+              <a:rPr lang="en-US" dirty="0"/>
+              <a:t> BIGINT </a:t>
+            </a:r>
+            <a:r>
+              <a:rPr lang="en-US" dirty="0" err="1"/>
+              <a:t>kako</a:t>
+            </a:r>
+            <a:r>
+              <a:rPr lang="en-US" dirty="0"/>
+              <a:t> bi </a:t>
+            </a:r>
+            <a:r>
+              <a:rPr lang="en-US" dirty="0" err="1"/>
+              <a:t>stablo</a:t>
+            </a:r>
+            <a:r>
+              <a:rPr lang="en-US" dirty="0"/>
+              <a:t> </a:t>
+            </a:r>
+            <a:r>
+              <a:rPr lang="en-US" dirty="0" err="1"/>
+              <a:t>bilo</a:t>
+            </a:r>
+            <a:r>
+              <a:rPr lang="en-US" dirty="0"/>
+              <a:t> </a:t>
+            </a:r>
+            <a:r>
+              <a:rPr lang="en-US" dirty="0" err="1"/>
+              <a:t>što</a:t>
+            </a:r>
+            <a:r>
+              <a:rPr lang="en-US" dirty="0"/>
+              <a:t> </a:t>
+            </a:r>
+            <a:r>
+              <a:rPr lang="en-US" dirty="0" err="1"/>
+              <a:t>pliće</a:t>
+            </a:r>
+            <a:r>
+              <a:rPr lang="en-US" dirty="0"/>
+              <a:t>.</a:t>
+            </a:r>
+          </a:p>
+          <a:p>
+            <a:r>
+              <a:rPr lang="en-US" dirty="0" err="1"/>
+              <a:t>Unikatni</a:t>
+            </a:r>
+            <a:r>
+              <a:rPr lang="en-US" dirty="0"/>
+              <a:t> </a:t>
+            </a:r>
+            <a:r>
+              <a:rPr lang="en-US" dirty="0" err="1"/>
+              <a:t>indeks</a:t>
+            </a:r>
+            <a:r>
+              <a:rPr lang="en-US" dirty="0"/>
+              <a:t> </a:t>
+            </a:r>
+            <a:r>
+              <a:rPr lang="en-US" dirty="0" err="1"/>
+              <a:t>koristi</a:t>
+            </a:r>
+            <a:r>
+              <a:rPr lang="en-US" dirty="0"/>
+              <a:t> </a:t>
+            </a:r>
+            <a:r>
+              <a:rPr lang="en-US" dirty="0" err="1"/>
+              <a:t>samo</a:t>
+            </a:r>
+            <a:r>
+              <a:rPr lang="en-US" dirty="0"/>
+              <a:t> B+ </a:t>
+            </a:r>
+            <a:r>
+              <a:rPr lang="en-US" dirty="0" err="1"/>
+              <a:t>stablo</a:t>
+            </a:r>
+            <a:r>
+              <a:rPr lang="en-US" dirty="0"/>
+              <a:t> </a:t>
+            </a:r>
+            <a:r>
+              <a:rPr lang="en-US" dirty="0" err="1"/>
+              <a:t>kao</a:t>
+            </a:r>
+            <a:r>
+              <a:rPr lang="en-US" dirty="0"/>
+              <a:t> </a:t>
+            </a:r>
+            <a:r>
+              <a:rPr lang="en-US" dirty="0" err="1"/>
+              <a:t>zaštitnu</a:t>
+            </a:r>
+            <a:r>
+              <a:rPr lang="en-US" dirty="0"/>
+              <a:t> </a:t>
+            </a:r>
+            <a:r>
+              <a:rPr lang="en-US" dirty="0" err="1"/>
+              <a:t>barijeru</a:t>
+            </a:r>
+            <a:r>
+              <a:rPr lang="en-US" dirty="0"/>
+              <a:t> </a:t>
+            </a:r>
+            <a:r>
+              <a:rPr lang="en-US" dirty="0" err="1"/>
+              <a:t>integriteta</a:t>
+            </a:r>
+            <a:r>
+              <a:rPr lang="en-US" dirty="0"/>
+              <a:t> — </a:t>
+            </a:r>
+            <a:r>
+              <a:rPr lang="en-US" dirty="0" err="1"/>
+              <a:t>pri</a:t>
+            </a:r>
+            <a:r>
+              <a:rPr lang="en-US" dirty="0"/>
+              <a:t> </a:t>
+            </a:r>
+            <a:r>
+              <a:rPr lang="en-US" dirty="0" err="1"/>
+              <a:t>svakom</a:t>
+            </a:r>
+            <a:r>
+              <a:rPr lang="en-US" dirty="0"/>
+              <a:t> INSERT-u engine </a:t>
+            </a:r>
+            <a:r>
+              <a:rPr lang="en-US" dirty="0" err="1"/>
+              <a:t>navigira</a:t>
+            </a:r>
+            <a:r>
+              <a:rPr lang="en-US" dirty="0"/>
+              <a:t> do </a:t>
+            </a:r>
+            <a:r>
+              <a:rPr lang="en-US" dirty="0" err="1"/>
+              <a:t>odgovarajućeg</a:t>
+            </a:r>
+            <a:r>
+              <a:rPr lang="en-US" dirty="0"/>
+              <a:t> </a:t>
+            </a:r>
+            <a:r>
+              <a:rPr lang="en-US" dirty="0" err="1"/>
+              <a:t>lista</a:t>
+            </a:r>
+            <a:r>
+              <a:rPr lang="en-US" dirty="0"/>
+              <a:t> </a:t>
+            </a:r>
+            <a:r>
+              <a:rPr lang="en-US" dirty="0" err="1"/>
+              <a:t>i</a:t>
+            </a:r>
+            <a:r>
+              <a:rPr lang="en-US" dirty="0"/>
+              <a:t> </a:t>
+            </a:r>
+            <a:r>
+              <a:rPr lang="en-US" dirty="0" err="1"/>
+              <a:t>ako</a:t>
+            </a:r>
+            <a:r>
+              <a:rPr lang="en-US" dirty="0"/>
+              <a:t> </a:t>
+            </a:r>
+            <a:r>
+              <a:rPr lang="en-US" dirty="0" err="1"/>
+              <a:t>pronađe</a:t>
+            </a:r>
+            <a:r>
+              <a:rPr lang="en-US" dirty="0"/>
+              <a:t> </a:t>
+            </a:r>
+            <a:r>
+              <a:rPr lang="en-US" dirty="0" err="1"/>
+              <a:t>identičan</a:t>
+            </a:r>
+            <a:r>
+              <a:rPr lang="en-US" dirty="0"/>
+              <a:t> </a:t>
+            </a:r>
+            <a:r>
+              <a:rPr lang="en-US" dirty="0" err="1"/>
+              <a:t>ključ</a:t>
+            </a:r>
+            <a:r>
+              <a:rPr lang="en-US" dirty="0"/>
+              <a:t>, </a:t>
+            </a:r>
+            <a:r>
+              <a:rPr lang="en-US" dirty="0" err="1"/>
+              <a:t>transakcija</a:t>
+            </a:r>
+            <a:r>
+              <a:rPr lang="en-US" dirty="0"/>
+              <a:t> se </a:t>
+            </a:r>
+            <a:r>
+              <a:rPr lang="en-US" dirty="0" err="1"/>
+              <a:t>odbija</a:t>
+            </a:r>
+            <a:r>
+              <a:rPr lang="en-US" dirty="0"/>
+              <a:t> pre </a:t>
+            </a:r>
+            <a:r>
+              <a:rPr lang="en-US" dirty="0" err="1"/>
+              <a:t>nego</a:t>
+            </a:r>
+            <a:r>
+              <a:rPr lang="en-US" dirty="0"/>
+              <a:t> </a:t>
+            </a:r>
+            <a:r>
+              <a:rPr lang="en-US" dirty="0" err="1"/>
+              <a:t>što</a:t>
+            </a:r>
+            <a:r>
+              <a:rPr lang="en-US" dirty="0"/>
+              <a:t> se </a:t>
+            </a:r>
+            <a:r>
+              <a:rPr lang="en-US" dirty="0" err="1"/>
+              <a:t>išta</a:t>
+            </a:r>
+            <a:r>
+              <a:rPr lang="en-US" dirty="0"/>
+              <a:t> </a:t>
+            </a:r>
+            <a:r>
+              <a:rPr lang="en-US" dirty="0" err="1"/>
+              <a:t>upiše</a:t>
+            </a:r>
+            <a:r>
+              <a:rPr lang="en-US" dirty="0"/>
+              <a:t> </a:t>
+            </a:r>
+            <a:r>
+              <a:rPr lang="en-US" dirty="0" err="1"/>
+              <a:t>na</a:t>
+            </a:r>
+            <a:r>
+              <a:rPr lang="en-US" dirty="0"/>
+              <a:t> disk.</a:t>
+            </a:r>
+          </a:p>
+          <a:p>
+            <a:r>
+              <a:rPr lang="en-US" dirty="0" err="1"/>
+              <a:t>Strani</a:t>
+            </a:r>
+            <a:r>
+              <a:rPr lang="en-US" dirty="0"/>
+              <a:t> </a:t>
+            </a:r>
+            <a:r>
+              <a:rPr lang="en-US" dirty="0" err="1"/>
+              <a:t>ključ</a:t>
+            </a:r>
+            <a:r>
+              <a:rPr lang="en-US" dirty="0"/>
+              <a:t> se </a:t>
+            </a:r>
+            <a:r>
+              <a:rPr lang="en-US" dirty="0" err="1"/>
+              <a:t>automatski</a:t>
+            </a:r>
+            <a:r>
+              <a:rPr lang="en-US" dirty="0"/>
+              <a:t> </a:t>
+            </a:r>
+            <a:r>
+              <a:rPr lang="en-US" dirty="0" err="1"/>
+              <a:t>kreira</a:t>
+            </a:r>
+            <a:r>
+              <a:rPr lang="en-US" dirty="0"/>
+              <a:t> </a:t>
+            </a:r>
+            <a:r>
+              <a:rPr lang="en-US" dirty="0" err="1"/>
+              <a:t>na</a:t>
+            </a:r>
+            <a:r>
+              <a:rPr lang="en-US" dirty="0"/>
+              <a:t> </a:t>
+            </a:r>
+            <a:r>
+              <a:rPr lang="en-US" dirty="0" err="1"/>
+              <a:t>strani</a:t>
+            </a:r>
+            <a:r>
+              <a:rPr lang="en-US" dirty="0"/>
+              <a:t> "</a:t>
+            </a:r>
+            <a:r>
+              <a:rPr lang="en-US" dirty="0" err="1"/>
+              <a:t>deteta</a:t>
+            </a:r>
+            <a:r>
+              <a:rPr lang="en-US" dirty="0"/>
+              <a:t>" </a:t>
+            </a:r>
+            <a:r>
+              <a:rPr lang="en-US" dirty="0" err="1"/>
+              <a:t>i</a:t>
+            </a:r>
+            <a:r>
+              <a:rPr lang="en-US" dirty="0"/>
+              <a:t> </a:t>
+            </a:r>
+            <a:r>
+              <a:rPr lang="en-US" dirty="0" err="1"/>
+              <a:t>omogućava</a:t>
+            </a:r>
+            <a:r>
+              <a:rPr lang="en-US" dirty="0"/>
+              <a:t> da engine </a:t>
+            </a:r>
+            <a:r>
+              <a:rPr lang="en-US" dirty="0" err="1"/>
+              <a:t>pri</a:t>
+            </a:r>
+            <a:r>
+              <a:rPr lang="en-US" dirty="0"/>
+              <a:t> </a:t>
+            </a:r>
+            <a:r>
+              <a:rPr lang="en-US" dirty="0" err="1"/>
+              <a:t>brisanju</a:t>
+            </a:r>
+            <a:r>
+              <a:rPr lang="en-US" dirty="0"/>
+              <a:t> </a:t>
+            </a:r>
+            <a:r>
+              <a:rPr lang="en-US" dirty="0" err="1"/>
+              <a:t>roditelja</a:t>
+            </a:r>
+            <a:r>
+              <a:rPr lang="en-US" dirty="0"/>
+              <a:t> </a:t>
+            </a:r>
+            <a:r>
+              <a:rPr lang="en-US" dirty="0" err="1"/>
+              <a:t>trenutno</a:t>
+            </a:r>
+            <a:r>
+              <a:rPr lang="en-US" dirty="0"/>
+              <a:t> </a:t>
+            </a:r>
+            <a:r>
+              <a:rPr lang="en-US" dirty="0" err="1"/>
+              <a:t>proveri</a:t>
+            </a:r>
+            <a:r>
+              <a:rPr lang="en-US" dirty="0"/>
+              <a:t> </a:t>
+            </a:r>
+            <a:r>
+              <a:rPr lang="en-US" dirty="0" err="1"/>
+              <a:t>postojanje</a:t>
+            </a:r>
+            <a:r>
+              <a:rPr lang="en-US" dirty="0"/>
+              <a:t> </a:t>
+            </a:r>
+            <a:r>
+              <a:rPr lang="en-US" dirty="0" err="1"/>
+              <a:t>zavisnih</a:t>
+            </a:r>
+            <a:r>
+              <a:rPr lang="en-US" dirty="0"/>
+              <a:t> </a:t>
+            </a:r>
+            <a:r>
+              <a:rPr lang="en-US" dirty="0" err="1"/>
+              <a:t>zapisa</a:t>
+            </a:r>
+            <a:r>
+              <a:rPr lang="en-US" dirty="0"/>
+              <a:t> bez </a:t>
+            </a:r>
+            <a:r>
+              <a:rPr lang="en-US" dirty="0" err="1"/>
+              <a:t>skeniranja</a:t>
+            </a:r>
+            <a:r>
+              <a:rPr lang="en-US" dirty="0"/>
+              <a:t> </a:t>
+            </a:r>
+            <a:r>
+              <a:rPr lang="en-US" dirty="0" err="1"/>
+              <a:t>cele</a:t>
+            </a:r>
+            <a:r>
+              <a:rPr lang="en-US" dirty="0"/>
+              <a:t> </a:t>
+            </a:r>
+            <a:r>
+              <a:rPr lang="en-US" dirty="0" err="1"/>
+              <a:t>tabele</a:t>
+            </a:r>
+            <a:r>
+              <a:rPr lang="en-US" dirty="0"/>
+              <a:t> — bez </a:t>
+            </a:r>
+            <a:r>
+              <a:rPr lang="en-US" dirty="0" err="1"/>
+              <a:t>ovog</a:t>
+            </a:r>
+            <a:r>
+              <a:rPr lang="en-US" dirty="0"/>
+              <a:t> </a:t>
+            </a:r>
+            <a:r>
+              <a:rPr lang="en-US" dirty="0" err="1"/>
+              <a:t>indeksa</a:t>
+            </a:r>
+            <a:r>
+              <a:rPr lang="en-US" dirty="0"/>
+              <a:t> </a:t>
+            </a:r>
+            <a:r>
+              <a:rPr lang="en-US" dirty="0" err="1"/>
+              <a:t>svaka</a:t>
+            </a:r>
+            <a:r>
+              <a:rPr lang="en-US" dirty="0"/>
+              <a:t> </a:t>
+            </a:r>
+            <a:r>
+              <a:rPr lang="en-US" dirty="0" err="1"/>
+              <a:t>provera</a:t>
+            </a:r>
+            <a:r>
+              <a:rPr lang="en-US" dirty="0"/>
+              <a:t> </a:t>
+            </a:r>
+            <a:r>
+              <a:rPr lang="en-US" dirty="0" err="1"/>
+              <a:t>integriteta</a:t>
+            </a:r>
+            <a:r>
+              <a:rPr lang="en-US" dirty="0"/>
+              <a:t> </a:t>
+            </a:r>
+            <a:r>
+              <a:rPr lang="en-US" dirty="0" err="1"/>
+              <a:t>bila</a:t>
+            </a:r>
+            <a:r>
+              <a:rPr lang="en-US" dirty="0"/>
+              <a:t> bi Full Table Scan.</a:t>
+            </a:r>
+          </a:p>
+          <a:p>
+            <a:r>
+              <a:rPr lang="en-US" dirty="0"/>
+              <a:t>Expression </a:t>
+            </a:r>
+            <a:r>
+              <a:rPr lang="en-US" dirty="0" err="1"/>
+              <a:t>indeks</a:t>
+            </a:r>
+            <a:r>
+              <a:rPr lang="en-US" dirty="0"/>
+              <a:t> se </a:t>
+            </a:r>
+            <a:r>
+              <a:rPr lang="en-US" dirty="0" err="1"/>
+              <a:t>razlikuje</a:t>
+            </a:r>
+            <a:r>
+              <a:rPr lang="en-US" dirty="0"/>
+              <a:t> od </a:t>
+            </a:r>
+            <a:r>
+              <a:rPr lang="en-US" dirty="0" err="1"/>
+              <a:t>ostalih</a:t>
+            </a:r>
+            <a:r>
+              <a:rPr lang="en-US" dirty="0"/>
+              <a:t> po tome </a:t>
+            </a:r>
+            <a:r>
+              <a:rPr lang="en-US" dirty="0" err="1"/>
+              <a:t>što</a:t>
+            </a:r>
+            <a:r>
+              <a:rPr lang="en-US" dirty="0"/>
+              <a:t> se </a:t>
+            </a:r>
+            <a:r>
+              <a:rPr lang="en-US" dirty="0" err="1"/>
+              <a:t>izraz</a:t>
+            </a:r>
+            <a:r>
+              <a:rPr lang="en-US" dirty="0"/>
+              <a:t> (</a:t>
+            </a:r>
+            <a:r>
+              <a:rPr lang="en-US" dirty="0" err="1"/>
+              <a:t>npr</a:t>
+            </a:r>
+            <a:r>
+              <a:rPr lang="en-US" dirty="0"/>
+              <a:t>. UPPER(LAST_NAME) </a:t>
+            </a:r>
+            <a:r>
+              <a:rPr lang="en-US" dirty="0" err="1"/>
+              <a:t>ili</a:t>
+            </a:r>
+            <a:r>
+              <a:rPr lang="en-US" dirty="0"/>
+              <a:t> CASE) </a:t>
+            </a:r>
+            <a:r>
+              <a:rPr lang="en-US" dirty="0" err="1"/>
+              <a:t>izračunava</a:t>
+            </a:r>
+            <a:r>
+              <a:rPr lang="en-US" dirty="0"/>
+              <a:t> </a:t>
+            </a:r>
+            <a:r>
+              <a:rPr lang="en-US" dirty="0" err="1"/>
+              <a:t>jednom</a:t>
+            </a:r>
+            <a:r>
+              <a:rPr lang="en-US" dirty="0"/>
+              <a:t> </a:t>
+            </a:r>
+            <a:r>
+              <a:rPr lang="en-US" dirty="0" err="1"/>
+              <a:t>pri</a:t>
+            </a:r>
+            <a:r>
+              <a:rPr lang="en-US" dirty="0"/>
+              <a:t> </a:t>
+            </a:r>
+            <a:r>
+              <a:rPr lang="en-US" dirty="0" err="1"/>
+              <a:t>upisu</a:t>
+            </a:r>
+            <a:r>
+              <a:rPr lang="en-US" dirty="0"/>
+              <a:t> </a:t>
+            </a:r>
+            <a:r>
+              <a:rPr lang="en-US" dirty="0" err="1"/>
+              <a:t>i</a:t>
+            </a:r>
+            <a:r>
+              <a:rPr lang="en-US" dirty="0"/>
+              <a:t> </a:t>
+            </a:r>
+            <a:r>
+              <a:rPr lang="en-US" dirty="0" err="1"/>
+              <a:t>trajno</a:t>
+            </a:r>
+            <a:r>
+              <a:rPr lang="en-US" dirty="0"/>
+              <a:t> </a:t>
+            </a:r>
+            <a:r>
+              <a:rPr lang="en-US" dirty="0" err="1"/>
+              <a:t>čuva</a:t>
+            </a:r>
+            <a:r>
+              <a:rPr lang="en-US" dirty="0"/>
+              <a:t> u B+ </a:t>
+            </a:r>
+            <a:r>
+              <a:rPr lang="en-US" dirty="0" err="1"/>
+              <a:t>stablu</a:t>
+            </a:r>
+            <a:r>
+              <a:rPr lang="en-US" dirty="0"/>
+              <a:t> — </a:t>
+            </a:r>
+            <a:r>
+              <a:rPr lang="en-US" dirty="0" err="1"/>
+              <a:t>pri</a:t>
+            </a:r>
+            <a:r>
+              <a:rPr lang="en-US" dirty="0"/>
+              <a:t> </a:t>
+            </a:r>
+            <a:r>
+              <a:rPr lang="en-US" dirty="0" err="1"/>
+              <a:t>pretrazi</a:t>
+            </a:r>
+            <a:r>
+              <a:rPr lang="en-US" dirty="0"/>
+              <a:t> optimizer </a:t>
+            </a:r>
+            <a:r>
+              <a:rPr lang="en-US" dirty="0" err="1"/>
+              <a:t>direktno</a:t>
+            </a:r>
+            <a:r>
+              <a:rPr lang="en-US" dirty="0"/>
+              <a:t> </a:t>
+            </a:r>
+            <a:r>
+              <a:rPr lang="en-US" dirty="0" err="1"/>
+              <a:t>poredi</a:t>
+            </a:r>
+            <a:r>
+              <a:rPr lang="en-US" dirty="0"/>
+              <a:t> </a:t>
+            </a:r>
+            <a:r>
+              <a:rPr lang="en-US" dirty="0" err="1"/>
+              <a:t>vrednosti</a:t>
+            </a:r>
+            <a:r>
+              <a:rPr lang="en-US" dirty="0"/>
+              <a:t> </a:t>
+            </a:r>
+            <a:r>
+              <a:rPr lang="en-US" dirty="0" err="1"/>
+              <a:t>sa</a:t>
+            </a:r>
+            <a:r>
+              <a:rPr lang="en-US" dirty="0"/>
+              <a:t> </a:t>
+            </a:r>
+            <a:r>
+              <a:rPr lang="en-US" dirty="0" err="1"/>
+              <a:t>već</a:t>
+            </a:r>
+            <a:r>
+              <a:rPr lang="en-US" dirty="0"/>
+              <a:t> </a:t>
+            </a:r>
+            <a:r>
+              <a:rPr lang="en-US" dirty="0" err="1"/>
+              <a:t>izračunatim</a:t>
+            </a:r>
+            <a:r>
+              <a:rPr lang="en-US" dirty="0"/>
+              <a:t> </a:t>
+            </a:r>
+            <a:r>
+              <a:rPr lang="en-US" dirty="0" err="1"/>
+              <a:t>ključevima</a:t>
+            </a:r>
+            <a:r>
+              <a:rPr lang="en-US" dirty="0"/>
+              <a:t>, </a:t>
+            </a:r>
+            <a:r>
+              <a:rPr lang="en-US" dirty="0" err="1"/>
+              <a:t>čime</a:t>
+            </a:r>
+            <a:r>
+              <a:rPr lang="en-US" dirty="0"/>
+              <a:t> se </a:t>
+            </a:r>
+            <a:r>
+              <a:rPr lang="en-US" dirty="0" err="1"/>
+              <a:t>potpuno</a:t>
+            </a:r>
+            <a:r>
+              <a:rPr lang="en-US" dirty="0"/>
+              <a:t> </a:t>
+            </a:r>
+            <a:r>
+              <a:rPr lang="en-US" dirty="0" err="1"/>
+              <a:t>eliminiše</a:t>
+            </a:r>
+            <a:r>
+              <a:rPr lang="en-US" dirty="0"/>
+              <a:t> </a:t>
+            </a:r>
+            <a:r>
+              <a:rPr lang="en-US" dirty="0" err="1"/>
+              <a:t>potreba</a:t>
+            </a:r>
+            <a:r>
+              <a:rPr lang="en-US" dirty="0"/>
+              <a:t> za Full Table Scan-</a:t>
+            </a:r>
+            <a:r>
+              <a:rPr lang="en-US" dirty="0" err="1"/>
+              <a:t>om.</a:t>
+            </a:r>
+            <a:endParaRPr lang="en-US" dirty="0"/>
+          </a:p>
           <a:p>
             <a:endParaRPr lang="en-US" dirty="0"/>
           </a:p>
@@ -2425,7 +8987,7 @@
               <a:buNone/>
             </a:pPr>
             <a:r>
-              <a:rPr lang="en-US" sz="1200" dirty="0">
+              <a:rPr lang="en-US" sz="1400" dirty="0">
                 <a:solidFill>
                   <a:srgbClr val="475569"/>
                 </a:solidFill>
@@ -2435,14 +8997,14 @@
               </a:rPr>
               <a:t>Primarni ključ (EMP_NO).</a:t>
             </a:r>
-            <a:endParaRPr lang="en-US" sz="1200" dirty="0"/>
+            <a:endParaRPr lang="en-US" sz="1400" dirty="0"/>
           </a:p>
           <a:p>
             <a:pPr marL="0" indent="0">
               <a:buNone/>
             </a:pPr>
             <a:r>
-              <a:rPr lang="en-US" sz="1200" dirty="0">
+              <a:rPr lang="en-US" sz="1400" dirty="0">
                 <a:solidFill>
                   <a:srgbClr val="475569"/>
                 </a:solidFill>
@@ -2452,14 +9014,14 @@
               </a:rPr>
               <a:t>Svaki red jedinstven.</a:t>
             </a:r>
-            <a:endParaRPr lang="en-US" sz="1200" dirty="0"/>
+            <a:endParaRPr lang="en-US" sz="1400" dirty="0"/>
           </a:p>
           <a:p>
             <a:pPr marL="0" indent="0">
               <a:buNone/>
             </a:pPr>
             <a:r>
-              <a:rPr lang="en-US" sz="1200" dirty="0">
+              <a:rPr lang="en-US" sz="1400" dirty="0">
                 <a:solidFill>
                   <a:srgbClr val="475569"/>
                 </a:solidFill>
@@ -2469,7 +9031,7 @@
               </a:rPr>
               <a:t>Optimizator UVEK koristi.</a:t>
             </a:r>
-            <a:endParaRPr lang="en-US" sz="1200" dirty="0"/>
+            <a:endParaRPr lang="en-US" sz="1400" dirty="0"/>
           </a:p>
         </p:txBody>
       </p:sp>
@@ -2606,7 +9168,7 @@
               <a:buNone/>
             </a:pPr>
             <a:r>
-              <a:rPr lang="en-US" sz="1200" dirty="0" err="1">
+              <a:rPr lang="en-US" sz="1400" dirty="0" err="1">
                 <a:solidFill>
                   <a:srgbClr val="475569"/>
                 </a:solidFill>
@@ -2617,7 +9179,7 @@
               <a:t>Optimizator</a:t>
             </a:r>
             <a:r>
-              <a:rPr lang="en-US" sz="1200" dirty="0">
+              <a:rPr lang="en-US" sz="1400" dirty="0">
                 <a:solidFill>
                   <a:srgbClr val="475569"/>
                 </a:solidFill>
@@ -2627,14 +9189,14 @@
               </a:rPr>
               <a:t> IGNORIŠE.</a:t>
             </a:r>
-            <a:endParaRPr lang="en-US" sz="1200" dirty="0"/>
+            <a:endParaRPr lang="en-US" sz="1400" dirty="0"/>
           </a:p>
           <a:p>
             <a:pPr marL="0" indent="0">
               <a:buNone/>
             </a:pPr>
             <a:r>
-              <a:rPr lang="en-US" sz="1200" dirty="0">
+              <a:rPr lang="en-US" sz="1400" dirty="0">
                 <a:solidFill>
                   <a:srgbClr val="475569"/>
                 </a:solidFill>
@@ -2644,7 +9206,7 @@
               </a:rPr>
               <a:t>Full Scan je brži.</a:t>
             </a:r>
-            <a:endParaRPr lang="en-US" sz="1200" dirty="0"/>
+            <a:endParaRPr lang="en-US" sz="1400" dirty="0"/>
           </a:p>
         </p:txBody>
       </p:sp>
@@ -2781,7 +9343,7 @@
               <a:buNone/>
             </a:pPr>
             <a:r>
-              <a:rPr lang="en-US" sz="1200" dirty="0">
+              <a:rPr lang="en-US" sz="1400" dirty="0">
                 <a:solidFill>
                   <a:srgbClr val="475569"/>
                 </a:solidFill>
@@ -2791,14 +9353,14 @@
               </a:rPr>
               <a:t>Rekalkulacija selektivnosti.</a:t>
             </a:r>
-            <a:endParaRPr lang="en-US" sz="1200" dirty="0"/>
+            <a:endParaRPr lang="en-US" sz="1400" dirty="0"/>
           </a:p>
           <a:p>
             <a:pPr marL="0" indent="0">
               <a:buNone/>
             </a:pPr>
             <a:r>
-              <a:rPr lang="en-US" sz="1200" dirty="0">
+              <a:rPr lang="en-US" sz="1400" dirty="0">
                 <a:solidFill>
                   <a:srgbClr val="475569"/>
                 </a:solidFill>
@@ -2808,14 +9370,14 @@
               </a:rPr>
               <a:t>Neophodna posle masovnih</a:t>
             </a:r>
-            <a:endParaRPr lang="en-US" sz="1200" dirty="0"/>
+            <a:endParaRPr lang="en-US" sz="1400" dirty="0"/>
           </a:p>
           <a:p>
             <a:pPr marL="0" indent="0">
               <a:buNone/>
             </a:pPr>
             <a:r>
-              <a:rPr lang="en-US" sz="1200" dirty="0">
+              <a:rPr lang="en-US" sz="1400" dirty="0">
                 <a:solidFill>
                   <a:srgbClr val="475569"/>
                 </a:solidFill>
@@ -2825,7 +9387,7 @@
               </a:rPr>
               <a:t>INSERT/DELETE operacija.</a:t>
             </a:r>
-            <a:endParaRPr lang="en-US" sz="1200" dirty="0"/>
+            <a:endParaRPr lang="en-US" sz="1400" dirty="0"/>
           </a:p>
         </p:txBody>
       </p:sp>
@@ -2944,7 +9506,7 @@
         </p:nvSpPr>
         <p:spPr>
           <a:xfrm>
-            <a:off x="365760" y="3840480"/>
+            <a:off x="365760" y="3767328"/>
             <a:ext cx="8503920" cy="768096"/>
           </a:xfrm>
           <a:prstGeom prst="rect">
@@ -2961,7 +9523,7 @@
               <a:buNone/>
             </a:pPr>
             <a:r>
-              <a:rPr lang="en-US" sz="1200" dirty="0">
+              <a:rPr lang="en-US" sz="1400" dirty="0">
                 <a:solidFill>
                   <a:srgbClr val="475569"/>
                 </a:solidFill>
@@ -2972,7 +9534,7 @@
               <a:t>Selektivnost se NE ažurira pri </a:t>
             </a:r>
             <a:r>
-              <a:rPr lang="en-US" sz="1200" dirty="0" err="1">
+              <a:rPr lang="en-US" sz="1400" dirty="0" err="1">
                 <a:solidFill>
                   <a:srgbClr val="475569"/>
                 </a:solidFill>
@@ -2983,7 +9545,7 @@
               <a:t>svakom</a:t>
             </a:r>
             <a:r>
-              <a:rPr lang="en-US" sz="1200" dirty="0">
+              <a:rPr lang="en-US" sz="1400" dirty="0">
                 <a:solidFill>
                   <a:srgbClr val="475569"/>
                 </a:solidFill>
@@ -2994,7 +9556,7 @@
               <a:t> INSERT</a:t>
             </a:r>
             <a:r>
-              <a:rPr lang="sr-Latn-RS" sz="1200" dirty="0">
+              <a:rPr lang="sr-Latn-RS" sz="1400" dirty="0">
                 <a:solidFill>
                   <a:srgbClr val="475569"/>
                 </a:solidFill>
@@ -3005,7 +9567,7 @@
               <a:t>/UPDATE/DELETE</a:t>
             </a:r>
             <a:r>
-              <a:rPr lang="en-US" sz="1200" dirty="0">
+              <a:rPr lang="en-US" sz="1400" dirty="0">
                 <a:solidFill>
                   <a:srgbClr val="475569"/>
                 </a:solidFill>
@@ -3016,7 +9578,7 @@
               <a:t> — to bi drastično usporilo upis. Tokom vremena, statistika u RDB$INDICES prestaje da odgovara stvarnoj distribuciji ključeva. Optimizator tada donosi loše odluke — bira Full Scan tamo gde bi INDEX Scan bio </a:t>
             </a:r>
             <a:r>
-              <a:rPr lang="en-US" sz="1200" dirty="0" err="1">
+              <a:rPr lang="en-US" sz="1400" dirty="0" err="1">
                 <a:solidFill>
                   <a:srgbClr val="475569"/>
                 </a:solidFill>
@@ -3027,7 +9589,7 @@
               <a:t>brži</a:t>
             </a:r>
             <a:r>
-              <a:rPr lang="en-US" sz="1200" dirty="0">
+              <a:rPr lang="en-US" sz="1400" dirty="0">
                 <a:solidFill>
                   <a:srgbClr val="475569"/>
                 </a:solidFill>
@@ -3037,7 +9599,7 @@
               </a:rPr>
               <a:t>.</a:t>
             </a:r>
-            <a:endParaRPr lang="sr-Latn-RS" sz="1200" dirty="0">
+            <a:endParaRPr lang="sr-Latn-RS" sz="1400" dirty="0">
               <a:solidFill>
                 <a:srgbClr val="475569"/>
               </a:solidFill>
@@ -3051,31 +9613,7 @@
               <a:buNone/>
             </a:pPr>
             <a:r>
-              <a:rPr lang="en-US" sz="1200" dirty="0">
-                <a:solidFill>
-                  <a:srgbClr val="475569"/>
-                </a:solidFill>
-                <a:latin typeface="Calibri" pitchFamily="34" charset="0"/>
-                <a:ea typeface="Calibri" pitchFamily="34" charset="-122"/>
-                <a:cs typeface="Calibri" pitchFamily="34" charset="-120"/>
-              </a:rPr>
-              <a:t> </a:t>
-            </a:r>
-            <a:endParaRPr lang="sr-Latn-RS" sz="1200" dirty="0">
-              <a:solidFill>
-                <a:srgbClr val="475569"/>
-              </a:solidFill>
-              <a:latin typeface="Calibri" pitchFamily="34" charset="0"/>
-              <a:ea typeface="Calibri" pitchFamily="34" charset="-122"/>
-              <a:cs typeface="Calibri" pitchFamily="34" charset="-120"/>
-            </a:endParaRPr>
-          </a:p>
-          <a:p>
-            <a:pPr marL="0" indent="0">
-              <a:buNone/>
-            </a:pPr>
-            <a:r>
-              <a:rPr lang="en-US" sz="1200" b="1" dirty="0" err="1">
+              <a:rPr lang="en-US" sz="1400" b="1" dirty="0" err="1">
                 <a:solidFill>
                   <a:schemeClr val="tx2"/>
                 </a:solidFill>
@@ -3086,7 +9624,7 @@
               <a:t>Rešenje</a:t>
             </a:r>
             <a:r>
-              <a:rPr lang="en-US" sz="1200" b="1" dirty="0">
+              <a:rPr lang="en-US" sz="1400" b="1" dirty="0">
                 <a:solidFill>
                   <a:schemeClr val="tx2"/>
                 </a:solidFill>
@@ -3096,7 +9634,7 @@
               </a:rPr>
               <a:t>: redovno pokretati SET STATISTICS INDEX.</a:t>
             </a:r>
-            <a:endParaRPr lang="en-US" sz="1200" b="1" dirty="0">
+            <a:endParaRPr lang="en-US" sz="1400" b="1" dirty="0">
               <a:solidFill>
                 <a:schemeClr val="tx2"/>
               </a:solidFill>
@@ -3334,7 +9872,7 @@
               <a:buNone/>
             </a:pPr>
             <a:r>
-              <a:rPr lang="en-US" sz="1600" b="1" dirty="0">
+              <a:rPr lang="en-US" b="1" dirty="0">
                 <a:solidFill>
                   <a:srgbClr val="FFFFFF"/>
                 </a:solidFill>
@@ -3344,7 +9882,7 @@
               </a:rPr>
               <a:t>Index Seek</a:t>
             </a:r>
-            <a:endParaRPr lang="en-US" sz="1600" dirty="0"/>
+            <a:endParaRPr lang="en-US" dirty="0"/>
           </a:p>
         </p:txBody>
       </p:sp>
@@ -3371,7 +9909,7 @@
           <a:bodyPr/>
           <a:lstStyle/>
           <a:p>
-            <a:endParaRPr lang="en-US"/>
+            <a:endParaRPr lang="en-US" sz="1400"/>
           </a:p>
         </p:txBody>
       </p:sp>
@@ -3400,7 +9938,7 @@
               <a:buNone/>
             </a:pPr>
             <a:r>
-              <a:rPr lang="en-US" sz="1000" b="1" dirty="0">
+              <a:rPr lang="en-US" sz="1400" b="1" dirty="0">
                 <a:solidFill>
                   <a:schemeClr val="bg1"/>
                 </a:solidFill>
@@ -3410,7 +9948,7 @@
               </a:rPr>
               <a:t>PLAN (EMPLOYEE INDEX (RDB$PRIMARY7))</a:t>
             </a:r>
-            <a:endParaRPr lang="en-US" sz="1000" b="1" dirty="0">
+            <a:endParaRPr lang="en-US" sz="1400" b="1" dirty="0">
               <a:solidFill>
                 <a:schemeClr val="bg1"/>
               </a:solidFill>
@@ -3443,7 +9981,7 @@
               <a:buNone/>
             </a:pPr>
             <a:r>
-              <a:rPr lang="en-US" sz="1200" dirty="0">
+              <a:rPr lang="en-US" sz="1400" dirty="0">
                 <a:solidFill>
                   <a:srgbClr val="475569"/>
                 </a:solidFill>
@@ -3452,14 +9990,14 @@
               </a:rPr>
               <a:t>Direktan pristup po primarnom ključu.</a:t>
             </a:r>
-            <a:endParaRPr lang="en-US" sz="1200" dirty="0"/>
+            <a:endParaRPr lang="en-US" sz="1400" dirty="0"/>
           </a:p>
           <a:p>
             <a:pPr marL="0" indent="0">
               <a:buNone/>
             </a:pPr>
             <a:r>
-              <a:rPr lang="en-US" sz="1200" dirty="0">
+              <a:rPr lang="en-US" sz="1400" dirty="0">
                 <a:solidFill>
                   <a:srgbClr val="475569"/>
                 </a:solidFill>
@@ -3468,7 +10006,7 @@
               </a:rPr>
               <a:t>Logaritamska brzina O(log n).</a:t>
             </a:r>
-            <a:endParaRPr lang="en-US" sz="1200" dirty="0"/>
+            <a:endParaRPr lang="en-US" sz="1400" dirty="0"/>
           </a:p>
         </p:txBody>
       </p:sp>
@@ -3571,7 +10109,7 @@
               <a:buNone/>
             </a:pPr>
             <a:r>
-              <a:rPr lang="en-US" sz="1600" b="1" dirty="0">
+              <a:rPr lang="en-US" b="1" dirty="0">
                 <a:solidFill>
                   <a:srgbClr val="FFFFFF"/>
                 </a:solidFill>
@@ -3581,7 +10119,7 @@
               </a:rPr>
               <a:t>Index Scan</a:t>
             </a:r>
-            <a:endParaRPr lang="en-US" sz="1600" dirty="0"/>
+            <a:endParaRPr lang="en-US" dirty="0"/>
           </a:p>
         </p:txBody>
       </p:sp>
@@ -3637,7 +10175,7 @@
               <a:buNone/>
             </a:pPr>
             <a:r>
-              <a:rPr lang="en-US" sz="1000" b="1" dirty="0">
+              <a:rPr lang="en-US" sz="1400" b="1" dirty="0">
                 <a:solidFill>
                   <a:schemeClr val="bg1"/>
                 </a:solidFill>
@@ -3647,7 +10185,7 @@
               </a:rPr>
               <a:t>PLAN (SALES INDEX (IDX_SALES_ORDER_DESC))</a:t>
             </a:r>
-            <a:endParaRPr lang="en-US" sz="1000" b="1" dirty="0">
+            <a:endParaRPr lang="en-US" sz="1400" b="1" dirty="0">
               <a:solidFill>
                 <a:schemeClr val="bg1"/>
               </a:solidFill>
@@ -3680,7 +10218,7 @@
               <a:buNone/>
             </a:pPr>
             <a:r>
-              <a:rPr lang="en-US" sz="1200" dirty="0">
+              <a:rPr lang="en-US" sz="1400" dirty="0">
                 <a:solidFill>
                   <a:srgbClr val="475569"/>
                 </a:solidFill>
@@ -3689,14 +10227,14 @@
               </a:rPr>
               <a:t>Opseg vrednosti — Range Scan.</a:t>
             </a:r>
-            <a:endParaRPr lang="en-US" sz="1200" dirty="0"/>
+            <a:endParaRPr lang="en-US" sz="1400" dirty="0"/>
           </a:p>
           <a:p>
             <a:pPr marL="0" indent="0">
               <a:buNone/>
             </a:pPr>
             <a:r>
-              <a:rPr lang="en-US" sz="1200" dirty="0">
+              <a:rPr lang="en-US" sz="1400" dirty="0">
                 <a:solidFill>
                   <a:srgbClr val="475569"/>
                 </a:solidFill>
@@ -3705,7 +10243,7 @@
               </a:rPr>
               <a:t>Horizontalno čitanje listova B+ stabla.</a:t>
             </a:r>
-            <a:endParaRPr lang="en-US" sz="1200" dirty="0"/>
+            <a:endParaRPr lang="en-US" sz="1400" dirty="0"/>
           </a:p>
         </p:txBody>
       </p:sp>
@@ -3808,7 +10346,7 @@
               <a:buNone/>
             </a:pPr>
             <a:r>
-              <a:rPr lang="en-US" sz="1600" b="1" dirty="0">
+              <a:rPr lang="en-US" b="1" dirty="0">
                 <a:solidFill>
                   <a:srgbClr val="FFFFFF"/>
                 </a:solidFill>
@@ -3818,7 +10356,7 @@
               </a:rPr>
               <a:t>NATURAL</a:t>
             </a:r>
-            <a:endParaRPr lang="en-US" sz="1600" dirty="0"/>
+            <a:endParaRPr lang="en-US" dirty="0"/>
           </a:p>
         </p:txBody>
       </p:sp>
@@ -3874,7 +10412,7 @@
               <a:buNone/>
             </a:pPr>
             <a:r>
-              <a:rPr lang="en-US" sz="1000" b="1" dirty="0">
+              <a:rPr lang="en-US" sz="1400" b="1" dirty="0">
                 <a:solidFill>
                   <a:schemeClr val="bg1"/>
                 </a:solidFill>
@@ -3884,7 +10422,7 @@
               </a:rPr>
               <a:t>PLAN (EMPLOYEE NATURAL)</a:t>
             </a:r>
-            <a:endParaRPr lang="en-US" sz="1000" b="1" dirty="0">
+            <a:endParaRPr lang="en-US" sz="1400" b="1" dirty="0">
               <a:solidFill>
                 <a:schemeClr val="bg1"/>
               </a:solidFill>
@@ -3917,7 +10455,7 @@
               <a:buNone/>
             </a:pPr>
             <a:r>
-              <a:rPr lang="en-US" sz="1200" dirty="0">
+              <a:rPr lang="en-US" sz="1400" dirty="0">
                 <a:solidFill>
                   <a:srgbClr val="475569"/>
                 </a:solidFill>
@@ -3926,14 +10464,14 @@
               </a:rPr>
               <a:t>Nema indeksa ili loša selektivnost.</a:t>
             </a:r>
-            <a:endParaRPr lang="en-US" sz="1200" dirty="0"/>
+            <a:endParaRPr lang="en-US" sz="1400" dirty="0"/>
           </a:p>
           <a:p>
             <a:pPr marL="0" indent="0">
               <a:buNone/>
             </a:pPr>
             <a:r>
-              <a:rPr lang="en-US" sz="1200" dirty="0">
+              <a:rPr lang="en-US" sz="1400" dirty="0">
                 <a:solidFill>
                   <a:srgbClr val="475569"/>
                 </a:solidFill>
@@ -3943,7 +10481,7 @@
               <a:t>Linearno čitanje svake stranice — </a:t>
             </a:r>
             <a:r>
-              <a:rPr lang="en-US" sz="1200" b="1" dirty="0">
+              <a:rPr lang="en-US" sz="1400" b="1" dirty="0">
                 <a:solidFill>
                   <a:srgbClr val="475569"/>
                 </a:solidFill>
@@ -3953,7 +10491,7 @@
               <a:t>SPORO</a:t>
             </a:r>
             <a:r>
-              <a:rPr lang="en-US" sz="1200" dirty="0">
+              <a:rPr lang="en-US" sz="1400" dirty="0">
                 <a:solidFill>
                   <a:srgbClr val="475569"/>
                 </a:solidFill>
@@ -3962,7 +10500,7 @@
               </a:rPr>
               <a:t>!</a:t>
             </a:r>
-            <a:endParaRPr lang="en-US" sz="1200" dirty="0"/>
+            <a:endParaRPr lang="en-US" sz="1400" dirty="0"/>
           </a:p>
         </p:txBody>
       </p:sp>
@@ -3991,7 +10529,7 @@
               <a:buNone/>
             </a:pPr>
             <a:r>
-              <a:rPr lang="en-US" sz="1000" i="1" dirty="0">
+              <a:rPr lang="en-US" sz="1600" b="1" dirty="0">
                 <a:solidFill>
                   <a:srgbClr val="0D9488"/>
                 </a:solidFill>
@@ -3999,9 +10537,42 @@
                 <a:ea typeface="Calibri" pitchFamily="34" charset="-122"/>
                 <a:cs typeface="Calibri" pitchFamily="34" charset="-120"/>
               </a:rPr>
-              <a:t>SET PLAN ON  u ISQL-u prikazuje plan za svaki upit — osnovno dijagnostičko oruđe!</a:t>
-            </a:r>
-            <a:endParaRPr lang="en-US" sz="1000" dirty="0"/>
+              <a:t>SET PLAN ON  u ISQL-u prikazuje plan za svaki upit — osnovno </a:t>
+            </a:r>
+            <a:r>
+              <a:rPr lang="en-US" sz="1600" b="1" dirty="0" err="1">
+                <a:solidFill>
+                  <a:srgbClr val="0D9488"/>
+                </a:solidFill>
+                <a:latin typeface="Calibri" pitchFamily="34" charset="0"/>
+                <a:ea typeface="Calibri" pitchFamily="34" charset="-122"/>
+                <a:cs typeface="Calibri" pitchFamily="34" charset="-120"/>
+              </a:rPr>
+              <a:t>dijagnostičko</a:t>
+            </a:r>
+            <a:r>
+              <a:rPr lang="en-US" sz="1600" b="1" dirty="0">
+                <a:solidFill>
+                  <a:srgbClr val="0D9488"/>
+                </a:solidFill>
+                <a:latin typeface="Calibri" pitchFamily="34" charset="0"/>
+                <a:ea typeface="Calibri" pitchFamily="34" charset="-122"/>
+                <a:cs typeface="Calibri" pitchFamily="34" charset="-120"/>
+              </a:rPr>
+              <a:t> </a:t>
+            </a:r>
+            <a:r>
+              <a:rPr lang="en-US" sz="1600" b="1" dirty="0" err="1">
+                <a:solidFill>
+                  <a:srgbClr val="0D9488"/>
+                </a:solidFill>
+                <a:latin typeface="Calibri" pitchFamily="34" charset="0"/>
+                <a:ea typeface="Calibri" pitchFamily="34" charset="-122"/>
+                <a:cs typeface="Calibri" pitchFamily="34" charset="-120"/>
+              </a:rPr>
+              <a:t>oruđe</a:t>
+            </a:r>
+            <a:endParaRPr lang="en-US" sz="1600" b="1" dirty="0"/>
           </a:p>
         </p:txBody>
       </p:sp>
@@ -4226,7 +10797,7 @@
               <a:buNone/>
             </a:pPr>
             <a:r>
-              <a:rPr lang="en-US" sz="1400" b="1" dirty="0">
+              <a:rPr lang="en-US" sz="1600" b="1" dirty="0">
                 <a:solidFill>
                   <a:schemeClr val="bg1"/>
                 </a:solidFill>
@@ -4236,7 +10807,7 @@
               </a:rPr>
               <a:t>B+ stablo:</a:t>
             </a:r>
-            <a:endParaRPr lang="en-US" sz="1400" dirty="0">
+            <a:endParaRPr lang="en-US" sz="1600" dirty="0">
               <a:solidFill>
                 <a:schemeClr val="bg1"/>
               </a:solidFill>
@@ -4269,7 +10840,7 @@
               <a:buNone/>
             </a:pPr>
             <a:r>
-              <a:rPr lang="en-US" sz="1200" dirty="0">
+              <a:rPr lang="en-US" sz="1400" dirty="0">
                 <a:solidFill>
                   <a:srgbClr val="FFFFFF"/>
                 </a:solidFill>
@@ -4279,7 +10850,7 @@
               </a:rPr>
               <a:t>Logaritamska pretraga — dubina stabla direktno određuje broj I/O operacija.</a:t>
             </a:r>
-            <a:endParaRPr lang="en-US" sz="1200" dirty="0"/>
+            <a:endParaRPr lang="en-US" sz="1400" dirty="0"/>
           </a:p>
         </p:txBody>
       </p:sp>
@@ -4367,7 +10938,7 @@
               <a:buNone/>
             </a:pPr>
             <a:r>
-              <a:rPr lang="en-US" sz="1400" b="1" dirty="0">
+              <a:rPr lang="en-US" sz="1600" b="1" dirty="0">
                 <a:solidFill>
                   <a:schemeClr val="bg1"/>
                 </a:solidFill>
@@ -4377,7 +10948,7 @@
               </a:rPr>
               <a:t>MGA = Index Bloat:</a:t>
             </a:r>
-            <a:endParaRPr lang="en-US" sz="1400" dirty="0">
+            <a:endParaRPr lang="en-US" sz="1600" dirty="0">
               <a:solidFill>
                 <a:schemeClr val="bg1"/>
               </a:solidFill>
@@ -4410,7 +10981,7 @@
               <a:buNone/>
             </a:pPr>
             <a:r>
-              <a:rPr lang="en-US" sz="1200" dirty="0">
+              <a:rPr lang="en-US" sz="1400" dirty="0">
                 <a:solidFill>
                   <a:srgbClr val="FFFFFF"/>
                 </a:solidFill>
@@ -4420,7 +10991,7 @@
               </a:rPr>
               <a:t>Svaki UPDATE kreira novu verziju — indeksi se "naduvavaju" tokom vremena.</a:t>
             </a:r>
-            <a:endParaRPr lang="en-US" sz="1200" dirty="0"/>
+            <a:endParaRPr lang="en-US" sz="1400" dirty="0"/>
           </a:p>
         </p:txBody>
       </p:sp>
@@ -4508,7 +11079,7 @@
               <a:buNone/>
             </a:pPr>
             <a:r>
-              <a:rPr lang="en-US" sz="1400" b="1" dirty="0">
+              <a:rPr lang="en-US" sz="1600" b="1" dirty="0">
                 <a:solidFill>
                   <a:schemeClr val="bg1"/>
                 </a:solidFill>
@@ -4518,7 +11089,7 @@
               </a:rPr>
               <a:t>Garbage Collection:</a:t>
             </a:r>
-            <a:endParaRPr lang="en-US" sz="1400" dirty="0">
+            <a:endParaRPr lang="en-US" sz="1600" dirty="0">
               <a:solidFill>
                 <a:schemeClr val="bg1"/>
               </a:solidFill>
@@ -4551,7 +11122,7 @@
               <a:buNone/>
             </a:pPr>
             <a:r>
-              <a:rPr lang="en-US" sz="1200" dirty="0">
+              <a:rPr lang="en-US" sz="1400" dirty="0">
                 <a:solidFill>
                   <a:srgbClr val="FFFFFF"/>
                 </a:solidFill>
@@ -4561,7 +11132,7 @@
               </a:rPr>
               <a:t>OAT blokira GC — dugačke transakcije su najveći neprijatelj performansi.</a:t>
             </a:r>
-            <a:endParaRPr lang="en-US" sz="1200" dirty="0"/>
+            <a:endParaRPr lang="en-US" sz="1400" dirty="0"/>
           </a:p>
         </p:txBody>
       </p:sp>
@@ -4649,7 +11220,7 @@
               <a:buNone/>
             </a:pPr>
             <a:r>
-              <a:rPr lang="en-US" sz="1400" b="1" dirty="0">
+              <a:rPr lang="en-US" sz="1600" b="1" dirty="0">
                 <a:solidFill>
                   <a:schemeClr val="bg1"/>
                 </a:solidFill>
@@ -4659,7 +11230,7 @@
               </a:rPr>
               <a:t>Selektivnost:</a:t>
             </a:r>
-            <a:endParaRPr lang="en-US" sz="1400" b="1" dirty="0">
+            <a:endParaRPr lang="en-US" sz="1600" b="1" dirty="0">
               <a:solidFill>
                 <a:schemeClr val="bg1"/>
               </a:solidFill>
@@ -4692,7 +11263,7 @@
               <a:buNone/>
             </a:pPr>
             <a:r>
-              <a:rPr lang="en-US" sz="1200" dirty="0">
+              <a:rPr lang="en-US" sz="1400" dirty="0">
                 <a:solidFill>
                   <a:srgbClr val="FFFFFF"/>
                 </a:solidFill>
@@ -4700,9 +11271,31 @@
                 <a:ea typeface="Calibri" pitchFamily="34" charset="-122"/>
                 <a:cs typeface="Calibri" pitchFamily="34" charset="-120"/>
               </a:rPr>
-              <a:t>Statiku treba osvežavati — zastarela statistika vodi do pogrešnih planova.</a:t>
-            </a:r>
-            <a:endParaRPr lang="en-US" sz="1200" dirty="0"/>
+              <a:t>Stati</a:t>
+            </a:r>
+            <a:r>
+              <a:rPr lang="sr-Latn-RS" sz="1400" dirty="0">
+                <a:solidFill>
+                  <a:srgbClr val="FFFFFF"/>
+                </a:solidFill>
+                <a:latin typeface="Calibri" pitchFamily="34" charset="0"/>
+                <a:ea typeface="Calibri" pitchFamily="34" charset="-122"/>
+                <a:cs typeface="Calibri" pitchFamily="34" charset="-120"/>
+              </a:rPr>
+              <a:t>stik</a:t>
+            </a:r>
+            <a:r>
+              <a:rPr lang="en-US" sz="1400" dirty="0">
+                <a:solidFill>
+                  <a:srgbClr val="FFFFFF"/>
+                </a:solidFill>
+                <a:latin typeface="Calibri" pitchFamily="34" charset="0"/>
+                <a:ea typeface="Calibri" pitchFamily="34" charset="-122"/>
+                <a:cs typeface="Calibri" pitchFamily="34" charset="-120"/>
+              </a:rPr>
+              <a:t>u treba osvežavati — zastarela statistika vodi do pogrešnih planova.</a:t>
+            </a:r>
+            <a:endParaRPr lang="en-US" sz="1400" dirty="0"/>
           </a:p>
         </p:txBody>
       </p:sp>
@@ -4790,7 +11383,7 @@
               <a:buNone/>
             </a:pPr>
             <a:r>
-              <a:rPr lang="en-US" sz="1400" b="1" dirty="0">
+              <a:rPr lang="en-US" sz="1600" b="1" dirty="0">
                 <a:solidFill>
                   <a:schemeClr val="bg1"/>
                 </a:solidFill>
@@ -4800,7 +11393,7 @@
               </a:rPr>
               <a:t>Expression indeksi:</a:t>
             </a:r>
-            <a:endParaRPr lang="en-US" sz="1400" dirty="0">
+            <a:endParaRPr lang="en-US" sz="1600" dirty="0">
               <a:solidFill>
                 <a:schemeClr val="bg1"/>
               </a:solidFill>
@@ -4833,7 +11426,7 @@
               <a:buNone/>
             </a:pPr>
             <a:r>
-              <a:rPr lang="en-US" sz="1200" dirty="0">
+              <a:rPr lang="en-US" sz="1400" dirty="0">
                 <a:solidFill>
                   <a:srgbClr val="FFFFFF"/>
                 </a:solidFill>
@@ -4843,7 +11436,7 @@
               </a:rPr>
               <a:t>Izraz se izračunava pri upisu, ne pri čitanju — drastično ubrzava upite.</a:t>
             </a:r>
-            <a:endParaRPr lang="en-US" sz="1200" dirty="0"/>
+            <a:endParaRPr lang="en-US" sz="1400" dirty="0"/>
           </a:p>
         </p:txBody>
       </p:sp>
@@ -8224,6 +14817,17 @@
               </a:rPr>
               <a:t>Index B-Tree</a:t>
             </a:r>
+            <a:r>
+              <a:rPr lang="sr-Latn-RS" b="1" dirty="0">
+                <a:solidFill>
+                  <a:srgbClr val="1B2A4A"/>
+                </a:solidFill>
+                <a:latin typeface="Calibri" pitchFamily="34" charset="0"/>
+                <a:ea typeface="Calibri" pitchFamily="34" charset="-122"/>
+                <a:cs typeface="Calibri" pitchFamily="34" charset="-120"/>
+              </a:rPr>
+              <a:t> Page</a:t>
+            </a:r>
             <a:endParaRPr lang="en-US" dirty="0"/>
           </a:p>
         </p:txBody>
@@ -8697,7 +15301,7 @@
               <a:buNone/>
             </a:pPr>
             <a:r>
-              <a:rPr lang="en-US" sz="1200" dirty="0">
+              <a:rPr lang="en-US" sz="1400" dirty="0">
                 <a:solidFill>
                   <a:srgbClr val="475569"/>
                 </a:solidFill>
@@ -8707,14 +15311,14 @@
               </a:rPr>
               <a:t>Direktan skok na fizičku lokaciju u .fdb fajlu.</a:t>
             </a:r>
-            <a:endParaRPr lang="en-US" sz="1200" dirty="0"/>
+            <a:endParaRPr lang="en-US" sz="1400" dirty="0"/>
           </a:p>
           <a:p>
             <a:pPr marL="0" indent="0">
               <a:buNone/>
             </a:pPr>
             <a:r>
-              <a:rPr lang="en-US" sz="1200" dirty="0">
+              <a:rPr lang="en-US" sz="1400" dirty="0">
                 <a:solidFill>
                   <a:srgbClr val="475569"/>
                 </a:solidFill>
@@ -8725,7 +15329,7 @@
               <a:t>Baza ne pretražuje — izračunava </a:t>
             </a:r>
             <a:r>
-              <a:rPr lang="en-US" sz="1200" dirty="0" err="1">
+              <a:rPr lang="en-US" sz="1400" dirty="0" err="1">
                 <a:solidFill>
                   <a:srgbClr val="475569"/>
                 </a:solidFill>
@@ -8736,7 +15340,7 @@
               <a:t>adresu</a:t>
             </a:r>
             <a:r>
-              <a:rPr lang="en-US" sz="1200" dirty="0">
+              <a:rPr lang="en-US" sz="1400" dirty="0">
                 <a:solidFill>
                   <a:srgbClr val="475569"/>
                 </a:solidFill>
@@ -8747,7 +15351,7 @@
               <a:t> </a:t>
             </a:r>
             <a:r>
-              <a:rPr lang="en-US" sz="1200" dirty="0" err="1">
+              <a:rPr lang="en-US" sz="1400" dirty="0" err="1">
                 <a:solidFill>
                   <a:srgbClr val="475569"/>
                 </a:solidFill>
@@ -8757,7 +15361,7 @@
               </a:rPr>
               <a:t>trenutno</a:t>
             </a:r>
-            <a:endParaRPr lang="en-US" sz="1200" dirty="0"/>
+            <a:endParaRPr lang="en-US" sz="1400" dirty="0"/>
           </a:p>
         </p:txBody>
       </p:sp>
@@ -8893,7 +15497,7 @@
               <a:buNone/>
             </a:pPr>
             <a:r>
-              <a:rPr lang="en-US" sz="1200" dirty="0">
+              <a:rPr lang="sr-Latn-RS" sz="1400" dirty="0">
                 <a:solidFill>
                   <a:srgbClr val="475569"/>
                 </a:solidFill>
@@ -8901,16 +15505,27 @@
                 <a:ea typeface="Calibri" pitchFamily="34" charset="-122"/>
                 <a:cs typeface="Calibri" pitchFamily="34" charset="-120"/>
               </a:rPr>
-              <a:t>Indeks u tabeli slotova na dnu Data Page</a:t>
-            </a:r>
-            <a:endParaRPr lang="en-US" sz="1200" dirty="0"/>
+              <a:t>Pozicija</a:t>
+            </a:r>
+            <a:r>
+              <a:rPr lang="en-US" sz="1400" dirty="0">
+                <a:solidFill>
+                  <a:srgbClr val="475569"/>
+                </a:solidFill>
+                <a:latin typeface="Calibri" pitchFamily="34" charset="0"/>
+                <a:ea typeface="Calibri" pitchFamily="34" charset="-122"/>
+                <a:cs typeface="Calibri" pitchFamily="34" charset="-120"/>
+              </a:rPr>
+              <a:t> u tabeli slotova na dnu Data Page</a:t>
+            </a:r>
+            <a:endParaRPr lang="en-US" sz="1400" dirty="0"/>
           </a:p>
           <a:p>
             <a:pPr marL="0" indent="0">
               <a:buNone/>
             </a:pPr>
             <a:r>
-              <a:rPr lang="en-US" sz="1200" dirty="0">
+              <a:rPr lang="en-US" sz="1400" dirty="0">
                 <a:solidFill>
                   <a:srgbClr val="475569"/>
                 </a:solidFill>
@@ -8921,7 +15536,7 @@
               <a:t>Omogućava pomeranje zapisa bez </a:t>
             </a:r>
             <a:r>
-              <a:rPr lang="en-US" sz="1200" dirty="0" err="1">
+              <a:rPr lang="en-US" sz="1400" dirty="0" err="1">
                 <a:solidFill>
                   <a:srgbClr val="475569"/>
                 </a:solidFill>
@@ -8932,7 +15547,7 @@
               <a:t>ažuriranja</a:t>
             </a:r>
             <a:r>
-              <a:rPr lang="en-US" sz="1200" dirty="0">
+              <a:rPr lang="en-US" sz="1400" dirty="0">
                 <a:solidFill>
                   <a:srgbClr val="475569"/>
                 </a:solidFill>
@@ -8943,7 +15558,7 @@
               <a:t> </a:t>
             </a:r>
             <a:r>
-              <a:rPr lang="en-US" sz="1200" dirty="0" err="1">
+              <a:rPr lang="en-US" sz="1400" dirty="0" err="1">
                 <a:solidFill>
                   <a:srgbClr val="475569"/>
                 </a:solidFill>
@@ -8953,7 +15568,7 @@
               </a:rPr>
               <a:t>indeksa</a:t>
             </a:r>
-            <a:endParaRPr lang="en-US" sz="1200" dirty="0"/>
+            <a:endParaRPr lang="en-US" sz="1400" dirty="0"/>
           </a:p>
         </p:txBody>
       </p:sp>
@@ -9087,7 +15702,7 @@
               <a:buNone/>
             </a:pPr>
             <a:r>
-              <a:rPr lang="en-US" sz="1200" dirty="0">
+              <a:rPr lang="en-US" sz="1400" dirty="0">
                 <a:solidFill>
                   <a:srgbClr val="475569"/>
                 </a:solidFill>
@@ -9098,7 +15713,7 @@
               <a:t>Tabela slotova omogućava da se zapis fizički premesti unutar stranice (zbog MGA), a da svi indeksi koji na njega pokazuju ostanu validni — broj slota se ne menja. Bez ovog sistema, svaka promena dužine zapisa zahtevala bi hitno ažuriranje SVIH </a:t>
             </a:r>
             <a:r>
-              <a:rPr lang="en-US" sz="1200" dirty="0" err="1">
+              <a:rPr lang="en-US" sz="1400" dirty="0" err="1">
                 <a:solidFill>
                   <a:srgbClr val="475569"/>
                 </a:solidFill>
@@ -9108,7 +15723,7 @@
               </a:rPr>
               <a:t>indeksa</a:t>
             </a:r>
-            <a:endParaRPr lang="en-US" sz="1200" dirty="0"/>
+            <a:endParaRPr lang="en-US" sz="1400" dirty="0"/>
           </a:p>
         </p:txBody>
       </p:sp>
@@ -10576,7 +17191,7 @@
               <a:buNone/>
             </a:pPr>
             <a:r>
-              <a:rPr lang="en-US" sz="1200" dirty="0">
+              <a:rPr lang="en-US" sz="1400" dirty="0">
                 <a:solidFill>
                   <a:schemeClr val="bg1">
                     <a:lumMod val="95000"/>
@@ -10588,7 +17203,7 @@
               </a:rPr>
               <a:t>1 čvor</a:t>
             </a:r>
-            <a:endParaRPr lang="en-US" sz="1200" dirty="0">
+            <a:endParaRPr lang="en-US" sz="1400" dirty="0">
               <a:solidFill>
                 <a:schemeClr val="bg1">
                   <a:lumMod val="95000"/>
@@ -10702,7 +17317,7 @@
               <a:buNone/>
             </a:pPr>
             <a:r>
-              <a:rPr lang="en-US" sz="1200" dirty="0">
+              <a:rPr lang="en-US" sz="1400" dirty="0">
                 <a:solidFill>
                   <a:schemeClr val="bg1">
                     <a:lumMod val="95000"/>
@@ -10714,7 +17329,7 @@
               </a:rPr>
               <a:t>navigacioni čvorovi</a:t>
             </a:r>
-            <a:endParaRPr lang="en-US" sz="1200" dirty="0">
+            <a:endParaRPr lang="en-US" sz="1400" dirty="0">
               <a:solidFill>
                 <a:schemeClr val="bg1">
                   <a:lumMod val="95000"/>
@@ -10827,7 +17442,7 @@
           <a:lstStyle/>
           <a:p>
             <a:r>
-              <a:rPr lang="en-US" sz="1200" dirty="0" err="1">
+              <a:rPr lang="en-US" sz="1400" dirty="0" err="1">
                 <a:solidFill>
                   <a:schemeClr val="bg1">
                     <a:lumMod val="95000"/>
@@ -10840,7 +17455,7 @@
               <a:t>dvostruko</a:t>
             </a:r>
             <a:r>
-              <a:rPr lang="en-US" sz="1200" dirty="0">
+              <a:rPr lang="en-US" sz="1400" dirty="0">
                 <a:solidFill>
                   <a:schemeClr val="bg1">
                     <a:lumMod val="95000"/>
@@ -10853,7 +17468,7 @@
               <a:t> </a:t>
             </a:r>
             <a:r>
-              <a:rPr lang="en-US" sz="1200" dirty="0" err="1">
+              <a:rPr lang="en-US" sz="1400" dirty="0" err="1">
                 <a:solidFill>
                   <a:schemeClr val="bg1">
                     <a:lumMod val="95000"/>
@@ -10866,7 +17481,7 @@
               <a:t>povezana</a:t>
             </a:r>
             <a:r>
-              <a:rPr lang="en-US" sz="1200" dirty="0">
+              <a:rPr lang="en-US" sz="1400" dirty="0">
                 <a:solidFill>
                   <a:schemeClr val="bg1">
                     <a:lumMod val="95000"/>
@@ -10879,7 +17494,7 @@
               <a:t> </a:t>
             </a:r>
             <a:r>
-              <a:rPr lang="en-US" sz="1200" dirty="0" err="1">
+              <a:rPr lang="en-US" sz="1400" dirty="0" err="1">
                 <a:solidFill>
                   <a:schemeClr val="bg1">
                     <a:lumMod val="95000"/>
@@ -10892,7 +17507,7 @@
               <a:t>lista</a:t>
             </a:r>
             <a:r>
-              <a:rPr lang="sr-Latn-RS" sz="1200" dirty="0">
+              <a:rPr lang="sr-Latn-RS" sz="1400" dirty="0">
                 <a:solidFill>
                   <a:schemeClr val="bg1">
                     <a:lumMod val="95000"/>
@@ -10905,7 +17520,7 @@
               <a:t> → </a:t>
             </a:r>
             <a:r>
-              <a:rPr lang="en-US" sz="1200" dirty="0" err="1">
+              <a:rPr lang="en-US" sz="1400" dirty="0" err="1">
                 <a:solidFill>
                   <a:schemeClr val="bg1">
                     <a:lumMod val="95000"/>
@@ -10918,7 +17533,7 @@
               <a:t>ključ</a:t>
             </a:r>
             <a:r>
-              <a:rPr lang="en-US" sz="1200" dirty="0">
+              <a:rPr lang="en-US" sz="1400" dirty="0">
                 <a:solidFill>
                   <a:schemeClr val="bg1">
                     <a:lumMod val="95000"/>
@@ -10930,7 +17545,7 @@
               </a:rPr>
               <a:t> + RDB$DB_KEY </a:t>
             </a:r>
-            <a:endParaRPr lang="en-US" sz="1200" dirty="0">
+            <a:endParaRPr lang="en-US" sz="1400" dirty="0">
               <a:solidFill>
                 <a:schemeClr val="bg1">
                   <a:lumMod val="95000"/>
@@ -11071,7 +17686,7 @@
           <a:lstStyle/>
           <a:p>
             <a:r>
-              <a:rPr lang="en-US" sz="1200" dirty="0">
+              <a:rPr lang="en-US" sz="1400" dirty="0">
                 <a:solidFill>
                   <a:srgbClr val="475569"/>
                 </a:solidFill>
@@ -11081,11 +17696,11 @@
               </a:rPr>
               <a:t>Kad je stranica puna → deli se na 2.</a:t>
             </a:r>
-            <a:endParaRPr lang="en-US" sz="1200" dirty="0"/>
-          </a:p>
-          <a:p>
-            <a:r>
-              <a:rPr lang="en-US" sz="1200" dirty="0">
+            <a:endParaRPr lang="en-US" sz="1400" dirty="0"/>
+          </a:p>
+          <a:p>
+            <a:r>
+              <a:rPr lang="en-US" sz="1400" dirty="0">
                 <a:solidFill>
                   <a:srgbClr val="475569"/>
                 </a:solidFill>
@@ -11096,7 +17711,7 @@
               <a:t>Roditeljski čvor dobija novi </a:t>
             </a:r>
             <a:r>
-              <a:rPr lang="en-US" sz="1200" dirty="0" err="1">
+              <a:rPr lang="en-US" sz="1400" dirty="0" err="1">
                 <a:solidFill>
                   <a:srgbClr val="475569"/>
                 </a:solidFill>
@@ -11107,7 +17722,7 @@
               <a:t>pokazivač</a:t>
             </a:r>
             <a:r>
-              <a:rPr lang="sr-Latn-RS" sz="1200" dirty="0">
+              <a:rPr lang="sr-Latn-RS" sz="1400" dirty="0">
                 <a:solidFill>
                   <a:srgbClr val="475569"/>
                 </a:solidFill>
@@ -11117,11 +17732,11 @@
               </a:rPr>
               <a:t>.</a:t>
             </a:r>
-            <a:endParaRPr lang="en-US" sz="1200" dirty="0"/>
-          </a:p>
-          <a:p>
-            <a:r>
-              <a:rPr lang="en-US" sz="1200" dirty="0">
+            <a:endParaRPr lang="en-US" sz="1400" dirty="0"/>
+          </a:p>
+          <a:p>
+            <a:r>
+              <a:rPr lang="en-US" sz="1400" dirty="0">
                 <a:solidFill>
                   <a:srgbClr val="475569"/>
                 </a:solidFill>
@@ -11132,7 +17747,7 @@
               <a:t>Stablo </a:t>
             </a:r>
             <a:r>
-              <a:rPr lang="en-US" sz="1200" dirty="0" err="1">
+              <a:rPr lang="en-US" sz="1400" dirty="0" err="1">
                 <a:solidFill>
                   <a:srgbClr val="475569"/>
                 </a:solidFill>
@@ -11143,7 +17758,7 @@
               <a:t>raste</a:t>
             </a:r>
             <a:r>
-              <a:rPr lang="en-US" sz="1200" dirty="0">
+              <a:rPr lang="en-US" sz="1400" dirty="0">
                 <a:solidFill>
                   <a:srgbClr val="475569"/>
                 </a:solidFill>
@@ -11154,7 +17769,7 @@
               <a:t> </a:t>
             </a:r>
             <a:r>
-              <a:rPr lang="en-US" sz="1200" dirty="0" err="1">
+              <a:rPr lang="en-US" sz="1400" dirty="0" err="1">
                 <a:solidFill>
                   <a:srgbClr val="475569"/>
                 </a:solidFill>
@@ -11165,7 +17780,7 @@
               <a:t>vertikalno</a:t>
             </a:r>
             <a:r>
-              <a:rPr lang="sr-Latn-RS" sz="1200" dirty="0">
+              <a:rPr lang="sr-Latn-RS" sz="1400" dirty="0">
                 <a:solidFill>
                   <a:srgbClr val="475569"/>
                 </a:solidFill>
@@ -11175,7 +17790,7 @@
               </a:rPr>
               <a:t>.</a:t>
             </a:r>
-            <a:endParaRPr lang="en-US" sz="1200" dirty="0"/>
+            <a:endParaRPr lang="en-US" sz="1400" dirty="0"/>
           </a:p>
         </p:txBody>
       </p:sp>
@@ -11313,7 +17928,7 @@
               <a:buNone/>
             </a:pPr>
             <a:r>
-              <a:rPr lang="en-US" sz="1200" dirty="0">
+              <a:rPr lang="en-US" sz="1400" dirty="0">
                 <a:solidFill>
                   <a:srgbClr val="475569"/>
                 </a:solidFill>
@@ -11323,14 +17938,14 @@
               </a:rPr>
               <a:t>Firebird puni stranicu 80–90%.</a:t>
             </a:r>
-            <a:endParaRPr lang="en-US" sz="1200" dirty="0"/>
+            <a:endParaRPr lang="en-US" sz="1400" dirty="0"/>
           </a:p>
           <a:p>
             <a:pPr marL="0" indent="0">
               <a:buNone/>
             </a:pPr>
             <a:r>
-              <a:rPr lang="en-US" sz="1200" dirty="0">
+              <a:rPr lang="en-US" sz="1400" dirty="0">
                 <a:solidFill>
                   <a:srgbClr val="475569"/>
                 </a:solidFill>
@@ -11341,7 +17956,7 @@
               <a:t>Ostavlja bafer za </a:t>
             </a:r>
             <a:r>
-              <a:rPr lang="en-US" sz="1200" dirty="0" err="1">
+              <a:rPr lang="en-US" sz="1400" dirty="0" err="1">
                 <a:solidFill>
                   <a:srgbClr val="475569"/>
                 </a:solidFill>
@@ -11352,7 +17967,7 @@
               <a:t>nove</a:t>
             </a:r>
             <a:r>
-              <a:rPr lang="en-US" sz="1200" dirty="0">
+              <a:rPr lang="en-US" sz="1400" dirty="0">
                 <a:solidFill>
                   <a:srgbClr val="475569"/>
                 </a:solidFill>
@@ -11363,7 +17978,7 @@
               <a:t> </a:t>
             </a:r>
             <a:r>
-              <a:rPr lang="en-US" sz="1200" dirty="0" err="1">
+              <a:rPr lang="en-US" sz="1400" dirty="0" err="1">
                 <a:solidFill>
                   <a:srgbClr val="475569"/>
                 </a:solidFill>
@@ -11374,7 +17989,7 @@
               <a:t>ključeve</a:t>
             </a:r>
             <a:r>
-              <a:rPr lang="sr-Latn-RS" sz="1200" dirty="0">
+              <a:rPr lang="sr-Latn-RS" sz="1400" dirty="0">
                 <a:solidFill>
                   <a:srgbClr val="475569"/>
                 </a:solidFill>
@@ -11384,14 +17999,14 @@
               </a:rPr>
               <a:t>.</a:t>
             </a:r>
-            <a:endParaRPr lang="en-US" sz="1200" dirty="0"/>
+            <a:endParaRPr lang="en-US" sz="1400" dirty="0"/>
           </a:p>
           <a:p>
             <a:pPr marL="0" indent="0">
               <a:buNone/>
             </a:pPr>
             <a:r>
-              <a:rPr lang="en-US" sz="1200" dirty="0">
+              <a:rPr lang="en-US" sz="1400" dirty="0">
                 <a:solidFill>
                   <a:srgbClr val="475569"/>
                 </a:solidFill>
@@ -11402,7 +18017,7 @@
               <a:t>Spečava preuranjeni Page Split</a:t>
             </a:r>
             <a:r>
-              <a:rPr lang="sr-Latn-RS" sz="1200" dirty="0">
+              <a:rPr lang="sr-Latn-RS" sz="1400" dirty="0">
                 <a:solidFill>
                   <a:srgbClr val="475569"/>
                 </a:solidFill>
@@ -11412,7 +18027,7 @@
               </a:rPr>
               <a:t>.</a:t>
             </a:r>
-            <a:endParaRPr lang="en-US" sz="1200" dirty="0"/>
+            <a:endParaRPr lang="en-US" sz="1400" dirty="0"/>
           </a:p>
         </p:txBody>
       </p:sp>
@@ -11548,7 +18163,7 @@
               <a:buNone/>
             </a:pPr>
             <a:r>
-              <a:rPr lang="en-US" sz="1200" dirty="0">
+              <a:rPr lang="en-US" sz="1400" dirty="0">
                 <a:solidFill>
                   <a:srgbClr val="475569"/>
                 </a:solidFill>
@@ -11559,7 +18174,7 @@
               <a:t>Konstantan broj I/O operacija do bilo </a:t>
             </a:r>
             <a:r>
-              <a:rPr lang="en-US" sz="1200" dirty="0" err="1">
+              <a:rPr lang="en-US" sz="1400" dirty="0" err="1">
                 <a:solidFill>
                   <a:srgbClr val="475569"/>
                 </a:solidFill>
@@ -11570,7 +18185,7 @@
               <a:t>kog</a:t>
             </a:r>
             <a:r>
-              <a:rPr lang="en-US" sz="1200" dirty="0">
+              <a:rPr lang="en-US" sz="1400" dirty="0">
                 <a:solidFill>
                   <a:srgbClr val="475569"/>
                 </a:solidFill>
@@ -11581,7 +18196,7 @@
               <a:t> </a:t>
             </a:r>
             <a:r>
-              <a:rPr lang="en-US" sz="1200" dirty="0" err="1">
+              <a:rPr lang="en-US" sz="1400" dirty="0" err="1">
                 <a:solidFill>
                   <a:srgbClr val="475569"/>
                 </a:solidFill>
@@ -11591,14 +18206,14 @@
               </a:rPr>
               <a:t>zapisa</a:t>
             </a:r>
-            <a:endParaRPr lang="en-US" sz="1200" dirty="0"/>
+            <a:endParaRPr lang="en-US" sz="1400" dirty="0"/>
           </a:p>
           <a:p>
             <a:pPr marL="0" indent="0">
               <a:buNone/>
             </a:pPr>
             <a:r>
-              <a:rPr lang="en-US" sz="1200" dirty="0">
+              <a:rPr lang="en-US" sz="1400" dirty="0">
                 <a:solidFill>
                   <a:srgbClr val="475569"/>
                 </a:solidFill>
@@ -11609,7 +18224,7 @@
               <a:t>Manja dubina = </a:t>
             </a:r>
             <a:r>
-              <a:rPr lang="en-US" sz="1200" dirty="0" err="1">
+              <a:rPr lang="en-US" sz="1400" dirty="0" err="1">
                 <a:solidFill>
                   <a:srgbClr val="475569"/>
                 </a:solidFill>
@@ -11620,7 +18235,7 @@
               <a:t>brži</a:t>
             </a:r>
             <a:r>
-              <a:rPr lang="en-US" sz="1200" dirty="0">
+              <a:rPr lang="en-US" sz="1400" dirty="0">
                 <a:solidFill>
                   <a:srgbClr val="475569"/>
                 </a:solidFill>
@@ -11631,7 +18246,7 @@
               <a:t> </a:t>
             </a:r>
             <a:r>
-              <a:rPr lang="en-US" sz="1200" dirty="0" err="1">
+              <a:rPr lang="en-US" sz="1400" dirty="0" err="1">
                 <a:solidFill>
                   <a:srgbClr val="475569"/>
                 </a:solidFill>
@@ -11641,14 +18256,14 @@
               </a:rPr>
               <a:t>upiti</a:t>
             </a:r>
-            <a:endParaRPr lang="en-US" sz="1200" dirty="0"/>
+            <a:endParaRPr lang="en-US" sz="1400" dirty="0"/>
           </a:p>
           <a:p>
             <a:pPr marL="0" indent="0">
               <a:buNone/>
             </a:pPr>
             <a:r>
-              <a:rPr lang="en-US" sz="1200" dirty="0">
+              <a:rPr lang="en-US" sz="1400" dirty="0">
                 <a:solidFill>
                   <a:srgbClr val="475569"/>
                 </a:solidFill>
@@ -11659,7 +18274,7 @@
               <a:t>gstat -i </a:t>
             </a:r>
             <a:r>
-              <a:rPr lang="en-US" sz="1200" dirty="0" err="1">
+              <a:rPr lang="en-US" sz="1400" dirty="0" err="1">
                 <a:solidFill>
                   <a:srgbClr val="475569"/>
                 </a:solidFill>
@@ -11670,7 +18285,7 @@
               <a:t>prikazuje</a:t>
             </a:r>
             <a:r>
-              <a:rPr lang="en-US" sz="1200" dirty="0">
+              <a:rPr lang="en-US" sz="1400" dirty="0">
                 <a:solidFill>
                   <a:srgbClr val="475569"/>
                 </a:solidFill>
@@ -11681,7 +18296,7 @@
               <a:t> </a:t>
             </a:r>
             <a:r>
-              <a:rPr lang="sr-Latn-RS" sz="1200" dirty="0">
+              <a:rPr lang="sr-Latn-RS" sz="1400" dirty="0">
                 <a:solidFill>
                   <a:srgbClr val="475569"/>
                 </a:solidFill>
@@ -11691,7 +18306,7 @@
               </a:rPr>
               <a:t>dubinu stabla</a:t>
             </a:r>
-            <a:endParaRPr lang="en-US" sz="1200" dirty="0"/>
+            <a:endParaRPr lang="en-US" sz="1400" dirty="0"/>
           </a:p>
         </p:txBody>
       </p:sp>
@@ -13106,7 +19721,7 @@
               <a:buNone/>
             </a:pPr>
             <a:r>
-              <a:rPr lang="en-US" sz="1200" dirty="0">
+              <a:rPr lang="en-US" sz="1400" dirty="0">
                 <a:solidFill>
                   <a:srgbClr val="475569"/>
                 </a:solidFill>
@@ -13116,14 +19731,14 @@
               </a:rPr>
               <a:t>AUTO kreiran pri PRIMARY KEY.</a:t>
             </a:r>
-            <a:endParaRPr lang="en-US" sz="1200" dirty="0"/>
+            <a:endParaRPr lang="en-US" sz="1400" dirty="0"/>
           </a:p>
           <a:p>
             <a:pPr marL="0" indent="0">
               <a:buNone/>
             </a:pPr>
             <a:r>
-              <a:rPr lang="en-US" sz="1200" dirty="0">
+              <a:rPr lang="en-US" sz="1400" dirty="0">
                 <a:solidFill>
                   <a:srgbClr val="475569"/>
                 </a:solidFill>
@@ -13133,14 +19748,14 @@
               </a:rPr>
               <a:t>Najniža selektivnost (svaki red jedinstven).</a:t>
             </a:r>
-            <a:endParaRPr lang="en-US" sz="1200" dirty="0"/>
+            <a:endParaRPr lang="en-US" sz="1400" dirty="0"/>
           </a:p>
           <a:p>
             <a:pPr marL="0" indent="0">
               <a:buNone/>
             </a:pPr>
             <a:r>
-              <a:rPr lang="en-US" sz="1200" dirty="0">
+              <a:rPr lang="en-US" sz="1400" dirty="0">
                 <a:solidFill>
                   <a:srgbClr val="475569"/>
                 </a:solidFill>
@@ -13150,7 +19765,7 @@
               </a:rPr>
               <a:t>Preporučiti uski tip — BIGINT.</a:t>
             </a:r>
-            <a:endParaRPr lang="en-US" sz="1200" dirty="0"/>
+            <a:endParaRPr lang="en-US" sz="1400" dirty="0"/>
           </a:p>
         </p:txBody>
       </p:sp>
@@ -13284,7 +19899,7 @@
               <a:buNone/>
             </a:pPr>
             <a:r>
-              <a:rPr lang="en-US" sz="1200" dirty="0">
+              <a:rPr lang="en-US" sz="1400" dirty="0">
                 <a:solidFill>
                   <a:srgbClr val="475569"/>
                 </a:solidFill>
@@ -13294,14 +19909,14 @@
               </a:rPr>
               <a:t>B+ stablo kao zaštitna barijera.</a:t>
             </a:r>
-            <a:endParaRPr lang="en-US" sz="1200" dirty="0"/>
+            <a:endParaRPr lang="en-US" sz="1400" dirty="0"/>
           </a:p>
           <a:p>
             <a:pPr marL="0" indent="0">
               <a:buNone/>
             </a:pPr>
             <a:r>
-              <a:rPr lang="en-US" sz="1200" dirty="0">
+              <a:rPr lang="en-US" sz="1400" dirty="0">
                 <a:solidFill>
                   <a:srgbClr val="475569"/>
                 </a:solidFill>
@@ -13309,16 +19924,71 @@
                 <a:ea typeface="Calibri" pitchFamily="34" charset="-122"/>
                 <a:cs typeface="Calibri" pitchFamily="34" charset="-120"/>
               </a:rPr>
-              <a:t>Provera jedinstvenosti pri svakom INSERT.</a:t>
-            </a:r>
-            <a:endParaRPr lang="en-US" sz="1200" dirty="0"/>
+              <a:t>Provera jedinstvenosti </a:t>
+            </a:r>
+            <a:r>
+              <a:rPr lang="en-US" sz="1400" dirty="0" err="1">
+                <a:solidFill>
+                  <a:srgbClr val="475569"/>
+                </a:solidFill>
+                <a:latin typeface="Calibri" pitchFamily="34" charset="0"/>
+                <a:ea typeface="Calibri" pitchFamily="34" charset="-122"/>
+                <a:cs typeface="Calibri" pitchFamily="34" charset="-120"/>
+              </a:rPr>
+              <a:t>pri</a:t>
+            </a:r>
+            <a:r>
+              <a:rPr lang="en-US" sz="1400" dirty="0">
+                <a:solidFill>
+                  <a:srgbClr val="475569"/>
+                </a:solidFill>
+                <a:latin typeface="Calibri" pitchFamily="34" charset="0"/>
+                <a:ea typeface="Calibri" pitchFamily="34" charset="-122"/>
+                <a:cs typeface="Calibri" pitchFamily="34" charset="-120"/>
+              </a:rPr>
+              <a:t> </a:t>
+            </a:r>
+            <a:r>
+              <a:rPr lang="en-US" sz="1400" dirty="0" err="1">
+                <a:solidFill>
+                  <a:srgbClr val="475569"/>
+                </a:solidFill>
+                <a:latin typeface="Calibri" pitchFamily="34" charset="0"/>
+                <a:ea typeface="Calibri" pitchFamily="34" charset="-122"/>
+                <a:cs typeface="Calibri" pitchFamily="34" charset="-120"/>
+              </a:rPr>
+              <a:t>svako</a:t>
+            </a:r>
+            <a:r>
+              <a:rPr lang="sr-Latn-RS" sz="1400" dirty="0">
+                <a:solidFill>
+                  <a:srgbClr val="475569"/>
+                </a:solidFill>
+                <a:latin typeface="Calibri" pitchFamily="34" charset="0"/>
+                <a:ea typeface="Calibri" pitchFamily="34" charset="-122"/>
+                <a:cs typeface="Calibri" pitchFamily="34" charset="-120"/>
+              </a:rPr>
+              <a:t>j operaciji</a:t>
+            </a:r>
+            <a:r>
+              <a:rPr lang="en-US" sz="1400" dirty="0">
+                <a:solidFill>
+                  <a:srgbClr val="475569"/>
+                </a:solidFill>
+                <a:latin typeface="Calibri" pitchFamily="34" charset="0"/>
+                <a:ea typeface="Calibri" pitchFamily="34" charset="-122"/>
+                <a:cs typeface="Calibri" pitchFamily="34" charset="-120"/>
+              </a:rPr>
+              <a:t> INSERT.</a:t>
+            </a:r>
+            <a:endParaRPr lang="en-US" sz="1400" dirty="0"/>
           </a:p>
           <a:p>
             <a:pPr marL="0" indent="0">
               <a:buNone/>
             </a:pPr>
             <a:r>
-              <a:rPr lang="en-US" sz="1200" dirty="0">
+              <a:rPr lang="en-US" sz="1400" dirty="0">
                 <a:solidFill>
                   <a:srgbClr val="475569"/>
                 </a:solidFill>
@@ -13328,7 +19998,7 @@
               </a:rPr>
               <a:t>Greška pre upisa na disk.</a:t>
             </a:r>
-            <a:endParaRPr lang="en-US" sz="1200" dirty="0"/>
+            <a:endParaRPr lang="en-US" sz="1400" dirty="0"/>
           </a:p>
         </p:txBody>
       </p:sp>
@@ -13462,7 +20132,7 @@
               <a:buNone/>
             </a:pPr>
             <a:r>
-              <a:rPr lang="en-US" sz="1200" dirty="0">
+              <a:rPr lang="en-US" sz="1400" dirty="0">
                 <a:solidFill>
                   <a:srgbClr val="475569"/>
                 </a:solidFill>
@@ -13472,14 +20142,14 @@
               </a:rPr>
               <a:t>AUTO kreiran na strani "deteta".</a:t>
             </a:r>
-            <a:endParaRPr lang="en-US" sz="1200" dirty="0"/>
+            <a:endParaRPr lang="en-US" sz="1400" dirty="0"/>
           </a:p>
           <a:p>
             <a:pPr marL="0" indent="0">
               <a:buNone/>
             </a:pPr>
             <a:r>
-              <a:rPr lang="en-US" sz="1200" dirty="0">
+              <a:rPr lang="en-US" sz="1400" dirty="0">
                 <a:solidFill>
                   <a:srgbClr val="475569"/>
                 </a:solidFill>
@@ -13489,14 +20159,14 @@
               </a:rPr>
               <a:t>Validacija bez Full Scan roditeljske tabele.</a:t>
             </a:r>
-            <a:endParaRPr lang="en-US" sz="1200" dirty="0"/>
+            <a:endParaRPr lang="en-US" sz="1400" dirty="0"/>
           </a:p>
           <a:p>
             <a:pPr marL="0" indent="0">
               <a:buNone/>
             </a:pPr>
             <a:r>
-              <a:rPr lang="en-US" sz="1200" dirty="0">
+              <a:rPr lang="en-US" sz="1400" dirty="0">
                 <a:solidFill>
                   <a:srgbClr val="475569"/>
                 </a:solidFill>
@@ -13506,7 +20176,7 @@
               </a:rPr>
               <a:t>Brisanje roditelja — instant provera.</a:t>
             </a:r>
-            <a:endParaRPr lang="en-US" sz="1200" dirty="0"/>
+            <a:endParaRPr lang="en-US" sz="1400" dirty="0"/>
           </a:p>
         </p:txBody>
       </p:sp>
@@ -13642,7 +20312,7 @@
               <a:buNone/>
             </a:pPr>
             <a:r>
-              <a:rPr lang="en-US" sz="1200" dirty="0">
+              <a:rPr lang="en-US" sz="1400" dirty="0">
                 <a:solidFill>
                   <a:srgbClr val="475569"/>
                 </a:solidFill>
@@ -13652,14 +20322,14 @@
               </a:rPr>
               <a:t>Indeks nad UPPER(LAST_NAME) ili CASE.</a:t>
             </a:r>
-            <a:endParaRPr lang="en-US" sz="1200" dirty="0"/>
+            <a:endParaRPr lang="en-US" sz="1400" dirty="0"/>
           </a:p>
           <a:p>
             <a:pPr marL="0" indent="0">
               <a:buNone/>
             </a:pPr>
             <a:r>
-              <a:rPr lang="en-US" sz="1200" dirty="0">
+              <a:rPr lang="en-US" sz="1400" dirty="0">
                 <a:solidFill>
                   <a:srgbClr val="475569"/>
                 </a:solidFill>
@@ -13669,14 +20339,14 @@
               </a:rPr>
               <a:t>Izraz se izračunava pri upisu, NE pri čitanju.</a:t>
             </a:r>
-            <a:endParaRPr lang="en-US" sz="1200" dirty="0"/>
+            <a:endParaRPr lang="en-US" sz="1400" dirty="0"/>
           </a:p>
           <a:p>
             <a:pPr marL="0" indent="0">
               <a:buNone/>
             </a:pPr>
             <a:r>
-              <a:rPr lang="en-US" sz="1200" dirty="0">
+              <a:rPr lang="en-US" sz="1400" dirty="0">
                 <a:solidFill>
                   <a:srgbClr val="475569"/>
                 </a:solidFill>
@@ -13687,7 +20357,7 @@
               <a:t>Isti ključevi za optimizer — </a:t>
             </a:r>
             <a:r>
-              <a:rPr lang="en-US" sz="1200" b="1" dirty="0">
+              <a:rPr lang="en-US" sz="1400" b="1" dirty="0">
                 <a:solidFill>
                   <a:srgbClr val="475569"/>
                 </a:solidFill>
@@ -13697,7 +20367,7 @@
               </a:rPr>
               <a:t>nema Full Scan</a:t>
             </a:r>
-            <a:endParaRPr lang="en-US" sz="1200" b="1" dirty="0"/>
+            <a:endParaRPr lang="en-US" sz="1400" b="1" dirty="0"/>
           </a:p>
         </p:txBody>
       </p:sp>
